--- a/Project8_CV_2025-2026.pptx
+++ b/Project8_CV_2025-2026.pptx
@@ -30,9 +30,10 @@
     <p:sldId id="278" r:id="rId24"/>
     <p:sldId id="279" r:id="rId25"/>
     <p:sldId id="280" r:id="rId26"/>
+    <p:sldId id="281" r:id="rId27"/>
   </p:sldIdLst>
   <p:notesMasterIdLst>
-    <p:notesMasterId r:id="rId27"/>
+    <p:notesMasterId r:id="rId28"/>
   </p:notesMasterIdLst>
   <p:sldSz cx="12192000" cy="6858000"/>
   <p:notesSz cx="6858000" cy="12192000"/>
@@ -1748,8 +1749,7 @@
           <a:p>
             <a:r>
               <a:rPr lang="en-US" dirty="0"/>
-              <a:t>60 s. Left bars: bias present, random wins. Right bars: bias gone, gap opens.
-WITH THE BIAS REMOVED — Asked “how much PAI-5 tissue is this single token?”, a random projection cannot answer and a pre-trained one can. This is the largest margin we measured.</a:t>
+              <a:t>40 s. The 0.1 % line is the one to say aloud: it is why the comparison is about the encoder.</a:t>
             </a:r>
             <a:endParaRPr lang="en-US" dirty="0"/>
           </a:p>
@@ -1837,7 +1837,8 @@
           <a:p>
             <a:r>
               <a:rPr lang="en-US" dirty="0"/>
-              <a:t>50 s. The table is the argument: only our method is both latent-space and non-inventing.</a:t>
+              <a:t>60 s. Left bars: bias present, random wins. Right bars: bias gone, gap opens.
+WITH THE BIAS REMOVED — Asked “how much PAI-5 tissue is this single token?”, a random projection cannot answer and a pre-trained one can. This is the largest margin we measured.</a:t>
             </a:r>
             <a:endParaRPr lang="en-US" dirty="0"/>
           </a:p>
@@ -1925,7 +1926,7 @@
           <a:p>
             <a:r>
               <a:rPr lang="en-US" dirty="0"/>
-              <a:t>40 s. Read the first row, then the precision column: that is where the novelty differs from the others.</a:t>
+              <a:t>50 s. The table is the argument: only our method is both latent-space and non-inventing.</a:t>
             </a:r>
             <a:endParaRPr lang="en-US" dirty="0"/>
           </a:p>
@@ -2013,7 +2014,7 @@
           <a:p>
             <a:r>
               <a:rPr lang="en-US" dirty="0"/>
-              <a:t>40 s. The interior optimum is the interesting part: it is explained, not just observed.</a:t>
+              <a:t>40 s. Read the first row, then the precision column: that is where the novelty differs from the others.</a:t>
             </a:r>
             <a:endParaRPr lang="en-US" dirty="0"/>
           </a:p>
@@ -2101,8 +2102,7 @@
           <a:p>
             <a:r>
               <a:rPr lang="en-US" dirty="0"/>
-              <a:t>60 s. Grey bars random, green I-JEPA. First two groups tie; the K groups do not.
-NOT ONE LUCKY K — On PR-AUC of the minority class the gain reaches +32 % at z = 8.72.</a:t>
+              <a:t>40 s. The interior optimum is the interesting part: it is explained, not just observed.</a:t>
             </a:r>
             <a:endParaRPr lang="en-US" dirty="0"/>
           </a:p>
@@ -2278,9 +2278,8 @@
           <a:p>
             <a:r>
               <a:rPr lang="en-US" dirty="0"/>
-              <a:t>60 s. Stress: one encoder, two readings. Then the unselected checkpoint.
-WHAT THE THREE ROWS SAY TOGETHER — I-JEPA reaches its quality by epoch 69 and spends the next two hundred epochs partly unlearning the shortcut.
-NOT AN ARTEFACT OF CHECKPOINT CHOICE — On macro-F1 its z = 2.14 falls below our own 2.31 threshold — we say so rather than round it away.</a:t>
+              <a:t>60 s. Grey bars random, green I-JEPA. First two groups tie; the K groups do not.
+NOT ONE LUCKY K — On PR-AUC of the minority class the gain reaches +32 % at z = 8.72.</a:t>
             </a:r>
             <a:endParaRPr lang="en-US" dirty="0"/>
           </a:p>
@@ -2368,7 +2367,9 @@
           <a:p>
             <a:r>
               <a:rPr lang="en-US" dirty="0"/>
-              <a:t>35 s. Do not read the table — point at the three lines that matter: frozen, five seeds, PR-AUC on the minority class.</a:t>
+              <a:t>60 s. Stress: one encoder, two readings. Then the unselected checkpoint.
+WHAT THE THREE ROWS SAY TOGETHER — I-JEPA reaches its quality by epoch 69 and spends the next two hundred epochs partly unlearning the shortcut.
+NOT AN ARTEFACT OF CHECKPOINT CHOICE — On macro-F1 its z = 2.14 falls below our own 2.31 threshold — we say so rather than round it away.</a:t>
             </a:r>
             <a:endParaRPr lang="en-US" dirty="0"/>
           </a:p>
@@ -2456,7 +2457,7 @@
           <a:p>
             <a:r>
               <a:rPr lang="en-US" dirty="0"/>
-              <a:t>35 s. Point 3 pre-empts the sharpest question about our error bars — say it before they ask.</a:t>
+              <a:t>35 s. Do not read the table — point at the three lines that matter: frozen, five seeds, PR-AUC on the minority class.</a:t>
             </a:r>
             <a:endParaRPr lang="en-US" dirty="0"/>
           </a:p>
@@ -2544,7 +2545,7 @@
           <a:p>
             <a:r>
               <a:rPr lang="en-US" dirty="0"/>
-              <a:t>50 s. Three numbered claims, then the closing line. Do not add anything after it.</a:t>
+              <a:t>35 s. Point 3 pre-empts the sharpest question about our error bars — say it before they ask.</a:t>
             </a:r>
             <a:endParaRPr lang="en-US" dirty="0"/>
           </a:p>
@@ -2632,7 +2633,7 @@
           <a:p>
             <a:r>
               <a:rPr lang="en-US" dirty="0"/>
-              <a:t>40 s. Read the left column without softening it. The right column is short on purpose.</a:t>
+              <a:t>50 s. Three numbered claims, then the closing line. Do not add anything after it.</a:t>
             </a:r>
             <a:endParaRPr lang="en-US" dirty="0"/>
           </a:p>
@@ -2720,7 +2721,7 @@
           <a:p>
             <a:r>
               <a:rPr lang="en-US" dirty="0"/>
-              <a:t>15 s. Leave on screen for questions.</a:t>
+              <a:t>40 s. Read the left column without softening it. The right column is short on purpose.</a:t>
             </a:r>
             <a:endParaRPr lang="en-US" dirty="0"/>
           </a:p>
@@ -2744,6 +2745,94 @@
             <a:fld id="{F7021451-1387-4CA6-816F-3879F97B5CBC}" type="slidenum">
               <a:rPr lang="en-US"/>
               <a:t>25</a:t>
+            </a:fld>
+            <a:endParaRPr lang="en-US"/>
+          </a:p>
+        </p:txBody>
+      </p:sp>
+    </p:spTree>
+    <p:extLst>
+      <p:ext uri="{BB962C8B-B14F-4D97-AF65-F5344CB8AC3E}">
+        <p14:creationId xmlns:p14="http://schemas.microsoft.com/office/powerpoint/2010/main" val="1024086991"/>
+      </p:ext>
+    </p:extLst>
+  </p:cSld>
+  <p:clrMapOvr>
+    <a:masterClrMapping/>
+  </p:clrMapOvr>
+</p:notes>
+</file>
+
+<file path=ppt/notesSlides/notesSlide26.xml><?xml version="1.0" encoding="utf-8"?>
+<p:notes xmlns:a="http://schemas.openxmlformats.org/drawingml/2006/main" xmlns:r="http://schemas.openxmlformats.org/officeDocument/2006/relationships" xmlns:p="http://schemas.openxmlformats.org/presentationml/2006/main">
+  <p:cSld>
+    <p:spTree>
+      <p:nvGrpSpPr>
+        <p:cNvPr id="1" name=""/>
+        <p:cNvGrpSpPr/>
+        <p:nvPr/>
+      </p:nvGrpSpPr>
+      <p:grpSpPr>
+        <a:xfrm>
+          <a:off x="0" y="0"/>
+          <a:ext cx="0" cy="0"/>
+          <a:chOff x="0" y="0"/>
+          <a:chExt cx="0" cy="0"/>
+        </a:xfrm>
+      </p:grpSpPr>
+      <p:sp>
+        <p:nvSpPr>
+          <p:cNvPr id="2" name="Slide Image Placeholder 1"/>
+          <p:cNvSpPr>
+            <a:spLocks noGrp="1" noRot="1" noChangeAspect="1"/>
+          </p:cNvSpPr>
+          <p:nvPr>
+            <p:ph type="sldImg"/>
+          </p:nvPr>
+        </p:nvSpPr>
+        <p:spPr/>
+      </p:sp>
+      <p:sp>
+        <p:nvSpPr>
+          <p:cNvPr id="3" name="Notes Placeholder 2"/>
+          <p:cNvSpPr>
+            <a:spLocks noGrp="1"/>
+          </p:cNvSpPr>
+          <p:nvPr>
+            <p:ph type="body" idx="1"/>
+          </p:nvPr>
+        </p:nvSpPr>
+        <p:spPr/>
+        <p:txBody>
+          <a:bodyPr/>
+          <a:lstStyle/>
+          <a:p>
+            <a:r>
+              <a:rPr lang="en-US" dirty="0"/>
+              <a:t>15 s. Leave on screen for questions.</a:t>
+            </a:r>
+            <a:endParaRPr lang="en-US" dirty="0"/>
+          </a:p>
+        </p:txBody>
+      </p:sp>
+      <p:sp>
+        <p:nvSpPr>
+          <p:cNvPr id="4" name="Slide Number Placeholder 3"/>
+          <p:cNvSpPr>
+            <a:spLocks noGrp="1"/>
+          </p:cNvSpPr>
+          <p:nvPr>
+            <p:ph type="sldNum" sz="quarter" idx="10"/>
+          </p:nvPr>
+        </p:nvSpPr>
+        <p:spPr/>
+        <p:txBody>
+          <a:bodyPr/>
+          <a:lstStyle/>
+          <a:p>
+            <a:fld id="{F7021451-1387-4CA6-816F-3879F97B5CBC}" type="slidenum">
+              <a:rPr lang="en-US"/>
+              <a:t>26</a:t>
             </a:fld>
             <a:endParaRPr lang="en-US"/>
           </a:p>
@@ -3745,7 +3834,7 @@
                 <a:ea typeface="Calibri" pitchFamily="34" charset="-122"/>
                 <a:cs typeface="Calibri" pitchFamily="34" charset="-120"/>
               </a:rPr>
-              <a:t>1 / 25</a:t>
+              <a:t>1 / 26</a:t>
             </a:r>
             <a:endParaRPr lang="en-US" sz="1050" dirty="0"/>
           </a:p>
@@ -4770,7 +4859,7 @@
                 <a:ea typeface="Calibri" pitchFamily="34" charset="-122"/>
                 <a:cs typeface="Calibri" pitchFamily="34" charset="-120"/>
               </a:rPr>
-              <a:t>10 / 25</a:t>
+              <a:t>10 / 26</a:t>
             </a:r>
             <a:endParaRPr lang="en-US" sz="1050" dirty="0"/>
           </a:p>
@@ -7278,7 +7367,7 @@
                 <a:ea typeface="Calibri" pitchFamily="34" charset="-122"/>
                 <a:cs typeface="Calibri" pitchFamily="34" charset="-120"/>
               </a:rPr>
-              <a:t>11 / 25</a:t>
+              <a:t>11 / 26</a:t>
             </a:r>
             <a:endParaRPr lang="en-US" sz="1050" dirty="0"/>
           </a:p>
@@ -9204,7 +9293,7 @@
                 <a:ea typeface="Calibri" pitchFamily="34" charset="-122"/>
                 <a:cs typeface="Calibri" pitchFamily="34" charset="-120"/>
               </a:rPr>
-              <a:t>12 / 25</a:t>
+              <a:t>12 / 26</a:t>
             </a:r>
             <a:endParaRPr lang="en-US" sz="1050" dirty="0"/>
           </a:p>
@@ -10467,7 +10556,7 @@
                 <a:ea typeface="Calibri" pitchFamily="34" charset="-122"/>
                 <a:cs typeface="Calibri" pitchFamily="34" charset="-120"/>
               </a:rPr>
-              <a:t>13 / 25</a:t>
+              <a:t>13 / 26</a:t>
             </a:r>
             <a:endParaRPr lang="en-US" sz="1050" dirty="0"/>
           </a:p>
@@ -12885,7 +12974,7 @@
                 <a:ea typeface="Calibri" pitchFamily="34" charset="-122"/>
                 <a:cs typeface="Calibri" pitchFamily="34" charset="-120"/>
               </a:rPr>
-              <a:t>14 / 25</a:t>
+              <a:t>14 / 26</a:t>
             </a:r>
             <a:endParaRPr lang="en-US" sz="1050" dirty="0"/>
           </a:p>
@@ -14254,7 +14343,7 @@
                 <a:ea typeface="Calibri" pitchFamily="34" charset="-122"/>
                 <a:cs typeface="Calibri" pitchFamily="34" charset="-120"/>
               </a:rPr>
-              <a:t>METHOD  ·  HEADS  ·  RESULT</a:t>
+              <a:t>THE HEAD  ·  DESIGN CHOICE</a:t>
             </a:r>
             <a:endParaRPr lang="en-US" sz="1050" dirty="0"/>
           </a:p>
@@ -14293,7 +14382,7 @@
                 <a:ea typeface="Cambria" pitchFamily="34" charset="-122"/>
                 <a:cs typeface="Cambria" pitchFamily="34" charset="-120"/>
               </a:rPr>
-              <a:t>Instance-level MIL isolates the encoder</a:t>
+              <a:t>The classifier is 3,459 parameters — and that is the point</a:t>
             </a:r>
             <a:endParaRPr lang="en-US" sz="2700" dirty="0"/>
           </a:p>
@@ -14391,7 +14480,7 @@
                 <a:ea typeface="Calibri" pitchFamily="34" charset="-122"/>
                 <a:cs typeface="Calibri" pitchFamily="34" charset="-120"/>
               </a:rPr>
-              <a:t>I-JEPA (frozen, ep. 69)</a:t>
+              <a:t>Linear 1,152 → 3</a:t>
             </a:r>
             <a:endParaRPr lang="en-US" sz="1050" dirty="0"/>
           </a:p>
@@ -14492,7 +14581,7 @@
                 <a:ea typeface="Calibri" pitchFamily="34" charset="-122"/>
                 <a:cs typeface="Calibri" pitchFamily="34" charset="-120"/>
               </a:rPr>
-              <a:t>Random ViT (frozen)</a:t>
+              <a:t>Encoder: 21.6 M · pooling: 5.3 M</a:t>
             </a:r>
             <a:endParaRPr lang="en-US" sz="1050" dirty="0"/>
           </a:p>
@@ -14593,7 +14682,7 @@
                 <a:ea typeface="Calibri" pitchFamily="34" charset="-122"/>
                 <a:cs typeface="Calibri" pitchFamily="34" charset="-120"/>
               </a:rPr>
-              <a:t>Instance-level MIL head</a:t>
+              <a:t>Both protocols</a:t>
             </a:r>
             <a:endParaRPr lang="en-US" sz="1050" dirty="0"/>
           </a:p>
@@ -14694,7 +14783,7 @@
                 <a:ea typeface="Calibri" pitchFamily="34" charset="-122"/>
                 <a:cs typeface="Calibri" pitchFamily="34" charset="-120"/>
               </a:rPr>
-              <a:t>macro-F1, test, 5 seeds</a:t>
+              <a:t>5 seeds per cell</a:t>
             </a:r>
             <a:endParaRPr lang="en-US" sz="1050" dirty="0"/>
           </a:p>
@@ -14733,38 +14822,892 @@
                 <a:ea typeface="Calibri" pitchFamily="34" charset="-122"/>
                 <a:cs typeface="Calibri" pitchFamily="34" charset="-120"/>
               </a:rPr>
-              <a:t>15 / 25</a:t>
+              <a:t>15 / 26</a:t>
             </a:r>
             <a:endParaRPr lang="en-US" sz="1050" dirty="0"/>
+          </a:p>
+        </p:txBody>
+      </p:sp>
+      <p:sp>
+        <p:nvSpPr>
+          <p:cNvPr id="17" name="Text 15"/>
+          <p:cNvSpPr txBox="1"/>
+          <p:nvPr/>
+        </p:nvSpPr>
+        <p:spPr>
+          <a:xfrm>
+            <a:off x="566928" y="1691640"/>
+            <a:ext cx="5943600" cy="502920"/>
+          </a:xfrm>
+          <a:prstGeom prst="rect">
+            <a:avLst/>
+          </a:prstGeom>
+          <a:noFill/>
+          <a:ln/>
+        </p:spPr>
+        <p:txBody>
+          <a:bodyPr wrap="square" lIns="0" tIns="0" rIns="0" bIns="0" rtlCol="0" anchor="ctr"/>
+          <a:lstStyle/>
+          <a:p>
+            <a:pPr indent="0" marL="0">
+              <a:lnSpc>
+                <a:spcPts val="2000"/>
+              </a:lnSpc>
+              <a:buNone/>
+            </a:pPr>
+            <a:r>
+              <a:rPr lang="en-US" sz="1350" dirty="0">
+                <a:solidFill>
+                  <a:srgbClr val="111418"/>
+                </a:solidFill>
+                <a:latin typeface="Calibri" pitchFamily="34" charset="0"/>
+                <a:ea typeface="Calibri" pitchFamily="34" charset="-122"/>
+                <a:cs typeface="Calibri" pitchFamily="34" charset="-120"/>
+              </a:rPr>
+              <a:t>The final stage takes the aggregated vector and maps it to three logits — one per PAI grade. A single fully-connected layer, nothing else.</a:t>
+            </a:r>
+            <a:endParaRPr lang="en-US" sz="1350" dirty="0"/>
           </a:p>
         </p:txBody>
       </p:sp>
       <p:graphicFrame>
         <p:nvGraphicFramePr>
-          <p:cNvPr id="17" name="Chart 0" descr=""/>
-          <p:cNvGraphicFramePr/>
-          <p:nvPr/>
+          <p:cNvPr id="16" name="Table 0"/>
+          <p:cNvGraphicFramePr>
+            <a:graphicFrameLocks noGrp="1"/>
+          </p:cNvGraphicFramePr>
+          <p:nvPr>
+            <p:extLst>
+              <p:ext uri="{D42A27DB-BD31-4B8C-83A1-F6EECF244321}">
+                <p14:modId xmlns:p14="http://schemas.microsoft.com/office/powerpoint/2010/main" val="1579011935"/>
+              </p:ext>
+            </p:extLst>
+          </p:nvPr>
         </p:nvGraphicFramePr>
         <p:xfrm>
-          <a:off x="566928" y="1691640"/>
-          <a:ext cx="6309360" cy="3291840"/>
+          <a:off x="566928" y="2377440"/>
+          <a:ext cx="5943600" cy="914400"/>
         </p:xfrm>
-        <a:graphic xmlns:a="http://schemas.openxmlformats.org/drawingml/2006/main">
-          <a:graphicData uri="http://schemas.openxmlformats.org/drawingml/2006/chart">
-            <c:chart xmlns:c="http://schemas.openxmlformats.org/drawingml/2006/chart" r:id="rId1"/>
+        <a:graphic>
+          <a:graphicData uri="http://schemas.openxmlformats.org/drawingml/2006/table">
+            <a:tbl>
+              <a:tblPr/>
+              <a:tblGrid>
+                <a:gridCol w="2286000"/>
+                <a:gridCol w="2011680"/>
+                <a:gridCol w="1645920"/>
+              </a:tblGrid>
+              <a:tr h="0">
+                <a:tc>
+                  <a:txBody>
+                    <a:bodyPr/>
+                    <a:lstStyle/>
+                    <a:p>
+                      <a:pPr indent="0" marL="0">
+                        <a:buNone/>
+                      </a:pPr>
+                      <a:r>
+                        <a:rPr lang="en-US" sz="1100" b="1" dirty="0">
+                          <a:solidFill>
+                            <a:srgbClr val="FFFFFF"/>
+                          </a:solidFill>
+                          <a:latin typeface="Calibri" pitchFamily="34" charset="0"/>
+                          <a:ea typeface="Calibri" pitchFamily="34" charset="-122"/>
+                          <a:cs typeface="Calibri" pitchFamily="34" charset="-120"/>
+                        </a:rPr>
+                        <a:t>Stage</a:t>
+                      </a:r>
+                      <a:endParaRPr lang="en-US" sz="1100" dirty="0">
+                        <a:latin typeface="Calibri" charset="0"/>
+                        <a:ea typeface="Calibri" charset="0"/>
+                        <a:cs typeface="Calibri" charset="0"/>
+                      </a:endParaRPr>
+                    </a:p>
+                  </a:txBody>
+                  <a:tcPr marL="91440" marR="91440" marT="45720" marB="45720" anchor="ctr">
+                    <a:lnL w="9525" cap="flat" cmpd="sng" algn="ctr">
+                      <a:solidFill>
+                        <a:srgbClr val="D6DBDF"/>
+                      </a:solidFill>
+                      <a:prstDash val="solid"/>
+                      <a:round/>
+                      <a:headEnd type="none" w="med" len="med"/>
+                      <a:tailEnd type="none" w="med" len="med"/>
+                    </a:lnL>
+                    <a:lnR w="9525" cap="flat" cmpd="sng" algn="ctr">
+                      <a:solidFill>
+                        <a:srgbClr val="D6DBDF"/>
+                      </a:solidFill>
+                      <a:prstDash val="solid"/>
+                      <a:round/>
+                      <a:headEnd type="none" w="med" len="med"/>
+                      <a:tailEnd type="none" w="med" len="med"/>
+                    </a:lnR>
+                    <a:lnT w="9525" cap="flat" cmpd="sng" algn="ctr">
+                      <a:solidFill>
+                        <a:srgbClr val="D6DBDF"/>
+                      </a:solidFill>
+                      <a:prstDash val="solid"/>
+                      <a:round/>
+                      <a:headEnd type="none" w="med" len="med"/>
+                      <a:tailEnd type="none" w="med" len="med"/>
+                    </a:lnT>
+                    <a:lnB w="9525" cap="flat" cmpd="sng" algn="ctr">
+                      <a:solidFill>
+                        <a:srgbClr val="D6DBDF"/>
+                      </a:solidFill>
+                      <a:prstDash val="solid"/>
+                      <a:round/>
+                      <a:headEnd type="none" w="med" len="med"/>
+                      <a:tailEnd type="none" w="med" len="med"/>
+                    </a:lnB>
+                    <a:solidFill>
+                      <a:srgbClr val="0B3C49"/>
+                    </a:solidFill>
+                  </a:tcPr>
+                </a:tc>
+                <a:tc>
+                  <a:txBody>
+                    <a:bodyPr/>
+                    <a:lstStyle/>
+                    <a:p>
+                      <a:pPr indent="0" marL="0">
+                        <a:buNone/>
+                      </a:pPr>
+                      <a:r>
+                        <a:rPr lang="en-US" sz="1100" b="1" dirty="0">
+                          <a:solidFill>
+                            <a:srgbClr val="FFFFFF"/>
+                          </a:solidFill>
+                          <a:latin typeface="Calibri" pitchFamily="34" charset="0"/>
+                          <a:ea typeface="Calibri" pitchFamily="34" charset="-122"/>
+                          <a:cs typeface="Calibri" pitchFamily="34" charset="-120"/>
+                        </a:rPr>
+                        <a:t>Parameters</a:t>
+                      </a:r>
+                      <a:endParaRPr lang="en-US" sz="1100" dirty="0">
+                        <a:latin typeface="Calibri" charset="0"/>
+                        <a:ea typeface="Calibri" charset="0"/>
+                        <a:cs typeface="Calibri" charset="0"/>
+                      </a:endParaRPr>
+                    </a:p>
+                  </a:txBody>
+                  <a:tcPr marL="91440" marR="91440" marT="45720" marB="45720" anchor="ctr">
+                    <a:lnL w="9525" cap="flat" cmpd="sng" algn="ctr">
+                      <a:solidFill>
+                        <a:srgbClr val="D6DBDF"/>
+                      </a:solidFill>
+                      <a:prstDash val="solid"/>
+                      <a:round/>
+                      <a:headEnd type="none" w="med" len="med"/>
+                      <a:tailEnd type="none" w="med" len="med"/>
+                    </a:lnL>
+                    <a:lnR w="9525" cap="flat" cmpd="sng" algn="ctr">
+                      <a:solidFill>
+                        <a:srgbClr val="D6DBDF"/>
+                      </a:solidFill>
+                      <a:prstDash val="solid"/>
+                      <a:round/>
+                      <a:headEnd type="none" w="med" len="med"/>
+                      <a:tailEnd type="none" w="med" len="med"/>
+                    </a:lnR>
+                    <a:lnT w="9525" cap="flat" cmpd="sng" algn="ctr">
+                      <a:solidFill>
+                        <a:srgbClr val="D6DBDF"/>
+                      </a:solidFill>
+                      <a:prstDash val="solid"/>
+                      <a:round/>
+                      <a:headEnd type="none" w="med" len="med"/>
+                      <a:tailEnd type="none" w="med" len="med"/>
+                    </a:lnT>
+                    <a:lnB w="9525" cap="flat" cmpd="sng" algn="ctr">
+                      <a:solidFill>
+                        <a:srgbClr val="D6DBDF"/>
+                      </a:solidFill>
+                      <a:prstDash val="solid"/>
+                      <a:round/>
+                      <a:headEnd type="none" w="med" len="med"/>
+                      <a:tailEnd type="none" w="med" len="med"/>
+                    </a:lnB>
+                    <a:solidFill>
+                      <a:srgbClr val="0B3C49"/>
+                    </a:solidFill>
+                  </a:tcPr>
+                </a:tc>
+                <a:tc>
+                  <a:txBody>
+                    <a:bodyPr/>
+                    <a:lstStyle/>
+                    <a:p>
+                      <a:pPr indent="0" marL="0">
+                        <a:buNone/>
+                      </a:pPr>
+                      <a:r>
+                        <a:rPr lang="en-US" sz="1100" b="1" dirty="0">
+                          <a:solidFill>
+                            <a:srgbClr val="FFFFFF"/>
+                          </a:solidFill>
+                          <a:latin typeface="Calibri" pitchFamily="34" charset="0"/>
+                          <a:ea typeface="Calibri" pitchFamily="34" charset="-122"/>
+                          <a:cs typeface="Calibri" pitchFamily="34" charset="-120"/>
+                        </a:rPr>
+                        <a:t>Share</a:t>
+                      </a:r>
+                      <a:endParaRPr lang="en-US" sz="1100" dirty="0">
+                        <a:latin typeface="Calibri" charset="0"/>
+                        <a:ea typeface="Calibri" charset="0"/>
+                        <a:cs typeface="Calibri" charset="0"/>
+                      </a:endParaRPr>
+                    </a:p>
+                  </a:txBody>
+                  <a:tcPr marL="91440" marR="91440" marT="45720" marB="45720" anchor="ctr">
+                    <a:lnL w="9525" cap="flat" cmpd="sng" algn="ctr">
+                      <a:solidFill>
+                        <a:srgbClr val="D6DBDF"/>
+                      </a:solidFill>
+                      <a:prstDash val="solid"/>
+                      <a:round/>
+                      <a:headEnd type="none" w="med" len="med"/>
+                      <a:tailEnd type="none" w="med" len="med"/>
+                    </a:lnL>
+                    <a:lnR w="9525" cap="flat" cmpd="sng" algn="ctr">
+                      <a:solidFill>
+                        <a:srgbClr val="D6DBDF"/>
+                      </a:solidFill>
+                      <a:prstDash val="solid"/>
+                      <a:round/>
+                      <a:headEnd type="none" w="med" len="med"/>
+                      <a:tailEnd type="none" w="med" len="med"/>
+                    </a:lnR>
+                    <a:lnT w="9525" cap="flat" cmpd="sng" algn="ctr">
+                      <a:solidFill>
+                        <a:srgbClr val="D6DBDF"/>
+                      </a:solidFill>
+                      <a:prstDash val="solid"/>
+                      <a:round/>
+                      <a:headEnd type="none" w="med" len="med"/>
+                      <a:tailEnd type="none" w="med" len="med"/>
+                    </a:lnT>
+                    <a:lnB w="9525" cap="flat" cmpd="sng" algn="ctr">
+                      <a:solidFill>
+                        <a:srgbClr val="D6DBDF"/>
+                      </a:solidFill>
+                      <a:prstDash val="solid"/>
+                      <a:round/>
+                      <a:headEnd type="none" w="med" len="med"/>
+                      <a:tailEnd type="none" w="med" len="med"/>
+                    </a:lnB>
+                    <a:solidFill>
+                      <a:srgbClr val="0B3C49"/>
+                    </a:solidFill>
+                  </a:tcPr>
+                </a:tc>
+              </a:tr>
+              <a:tr h="0">
+                <a:tc>
+                  <a:txBody>
+                    <a:bodyPr/>
+                    <a:lstStyle/>
+                    <a:p>
+                      <a:pPr indent="0" marL="0">
+                        <a:buNone/>
+                      </a:pPr>
+                      <a:r>
+                        <a:rPr lang="en-US" sz="1150" dirty="0">
+                          <a:solidFill>
+                            <a:srgbClr val="111418"/>
+                          </a:solidFill>
+                          <a:latin typeface="Calibri" pitchFamily="34" charset="0"/>
+                          <a:ea typeface="Calibri" pitchFamily="34" charset="-122"/>
+                          <a:cs typeface="Calibri" pitchFamily="34" charset="-120"/>
+                        </a:rPr>
+                        <a:t>Encoder (frozen)</a:t>
+                      </a:r>
+                      <a:endParaRPr lang="en-US" sz="1150" dirty="0">
+                        <a:latin typeface="Calibri" charset="0"/>
+                        <a:ea typeface="Calibri" charset="0"/>
+                        <a:cs typeface="Calibri" charset="0"/>
+                      </a:endParaRPr>
+                    </a:p>
+                  </a:txBody>
+                  <a:tcPr marL="91440" marR="91440" marT="45720" marB="45720" anchor="ctr">
+                    <a:lnL w="9525" cap="flat" cmpd="sng" algn="ctr">
+                      <a:solidFill>
+                        <a:srgbClr val="D6DBDF"/>
+                      </a:solidFill>
+                      <a:prstDash val="solid"/>
+                      <a:round/>
+                      <a:headEnd type="none" w="med" len="med"/>
+                      <a:tailEnd type="none" w="med" len="med"/>
+                    </a:lnL>
+                    <a:lnR w="9525" cap="flat" cmpd="sng" algn="ctr">
+                      <a:solidFill>
+                        <a:srgbClr val="D6DBDF"/>
+                      </a:solidFill>
+                      <a:prstDash val="solid"/>
+                      <a:round/>
+                      <a:headEnd type="none" w="med" len="med"/>
+                      <a:tailEnd type="none" w="med" len="med"/>
+                    </a:lnR>
+                    <a:lnT w="9525" cap="flat" cmpd="sng" algn="ctr">
+                      <a:solidFill>
+                        <a:srgbClr val="D6DBDF"/>
+                      </a:solidFill>
+                      <a:prstDash val="solid"/>
+                      <a:round/>
+                      <a:headEnd type="none" w="med" len="med"/>
+                      <a:tailEnd type="none" w="med" len="med"/>
+                    </a:lnT>
+                    <a:lnB w="9525" cap="flat" cmpd="sng" algn="ctr">
+                      <a:solidFill>
+                        <a:srgbClr val="D6DBDF"/>
+                      </a:solidFill>
+                      <a:prstDash val="solid"/>
+                      <a:round/>
+                      <a:headEnd type="none" w="med" len="med"/>
+                      <a:tailEnd type="none" w="med" len="med"/>
+                    </a:lnB>
+                  </a:tcPr>
+                </a:tc>
+                <a:tc>
+                  <a:txBody>
+                    <a:bodyPr/>
+                    <a:lstStyle/>
+                    <a:p>
+                      <a:pPr algn="r" indent="0" marL="0">
+                        <a:buNone/>
+                      </a:pPr>
+                      <a:r>
+                        <a:rPr lang="en-US" sz="1150" dirty="0">
+                          <a:solidFill>
+                            <a:srgbClr val="111418"/>
+                          </a:solidFill>
+                          <a:latin typeface="Calibri" pitchFamily="34" charset="0"/>
+                          <a:ea typeface="Calibri" pitchFamily="34" charset="-122"/>
+                          <a:cs typeface="Calibri" pitchFamily="34" charset="-120"/>
+                        </a:rPr>
+                        <a:t>21,589,632</a:t>
+                      </a:r>
+                      <a:endParaRPr lang="en-US" sz="1150" dirty="0">
+                        <a:latin typeface="Calibri" charset="0"/>
+                        <a:ea typeface="Calibri" charset="0"/>
+                        <a:cs typeface="Calibri" charset="0"/>
+                      </a:endParaRPr>
+                    </a:p>
+                  </a:txBody>
+                  <a:tcPr marL="91440" marR="91440" marT="45720" marB="45720" anchor="ctr">
+                    <a:lnL w="9525" cap="flat" cmpd="sng" algn="ctr">
+                      <a:solidFill>
+                        <a:srgbClr val="D6DBDF"/>
+                      </a:solidFill>
+                      <a:prstDash val="solid"/>
+                      <a:round/>
+                      <a:headEnd type="none" w="med" len="med"/>
+                      <a:tailEnd type="none" w="med" len="med"/>
+                    </a:lnL>
+                    <a:lnR w="9525" cap="flat" cmpd="sng" algn="ctr">
+                      <a:solidFill>
+                        <a:srgbClr val="D6DBDF"/>
+                      </a:solidFill>
+                      <a:prstDash val="solid"/>
+                      <a:round/>
+                      <a:headEnd type="none" w="med" len="med"/>
+                      <a:tailEnd type="none" w="med" len="med"/>
+                    </a:lnR>
+                    <a:lnT w="9525" cap="flat" cmpd="sng" algn="ctr">
+                      <a:solidFill>
+                        <a:srgbClr val="D6DBDF"/>
+                      </a:solidFill>
+                      <a:prstDash val="solid"/>
+                      <a:round/>
+                      <a:headEnd type="none" w="med" len="med"/>
+                      <a:tailEnd type="none" w="med" len="med"/>
+                    </a:lnT>
+                    <a:lnB w="9525" cap="flat" cmpd="sng" algn="ctr">
+                      <a:solidFill>
+                        <a:srgbClr val="D6DBDF"/>
+                      </a:solidFill>
+                      <a:prstDash val="solid"/>
+                      <a:round/>
+                      <a:headEnd type="none" w="med" len="med"/>
+                      <a:tailEnd type="none" w="med" len="med"/>
+                    </a:lnB>
+                  </a:tcPr>
+                </a:tc>
+                <a:tc>
+                  <a:txBody>
+                    <a:bodyPr/>
+                    <a:lstStyle/>
+                    <a:p>
+                      <a:pPr algn="r" indent="0" marL="0">
+                        <a:buNone/>
+                      </a:pPr>
+                      <a:r>
+                        <a:rPr lang="en-US" sz="1150" dirty="0">
+                          <a:solidFill>
+                            <a:srgbClr val="58626C"/>
+                          </a:solidFill>
+                          <a:latin typeface="Calibri" pitchFamily="34" charset="0"/>
+                          <a:ea typeface="Calibri" pitchFamily="34" charset="-122"/>
+                          <a:cs typeface="Calibri" pitchFamily="34" charset="-120"/>
+                        </a:rPr>
+                        <a:t>—</a:t>
+                      </a:r>
+                      <a:endParaRPr lang="en-US" sz="1150" dirty="0">
+                        <a:latin typeface="Calibri" charset="0"/>
+                        <a:ea typeface="Calibri" charset="0"/>
+                        <a:cs typeface="Calibri" charset="0"/>
+                      </a:endParaRPr>
+                    </a:p>
+                  </a:txBody>
+                  <a:tcPr marL="91440" marR="91440" marT="45720" marB="45720" anchor="ctr">
+                    <a:lnL w="9525" cap="flat" cmpd="sng" algn="ctr">
+                      <a:solidFill>
+                        <a:srgbClr val="D6DBDF"/>
+                      </a:solidFill>
+                      <a:prstDash val="solid"/>
+                      <a:round/>
+                      <a:headEnd type="none" w="med" len="med"/>
+                      <a:tailEnd type="none" w="med" len="med"/>
+                    </a:lnL>
+                    <a:lnR w="9525" cap="flat" cmpd="sng" algn="ctr">
+                      <a:solidFill>
+                        <a:srgbClr val="D6DBDF"/>
+                      </a:solidFill>
+                      <a:prstDash val="solid"/>
+                      <a:round/>
+                      <a:headEnd type="none" w="med" len="med"/>
+                      <a:tailEnd type="none" w="med" len="med"/>
+                    </a:lnR>
+                    <a:lnT w="9525" cap="flat" cmpd="sng" algn="ctr">
+                      <a:solidFill>
+                        <a:srgbClr val="D6DBDF"/>
+                      </a:solidFill>
+                      <a:prstDash val="solid"/>
+                      <a:round/>
+                      <a:headEnd type="none" w="med" len="med"/>
+                      <a:tailEnd type="none" w="med" len="med"/>
+                    </a:lnT>
+                    <a:lnB w="9525" cap="flat" cmpd="sng" algn="ctr">
+                      <a:solidFill>
+                        <a:srgbClr val="D6DBDF"/>
+                      </a:solidFill>
+                      <a:prstDash val="solid"/>
+                      <a:round/>
+                      <a:headEnd type="none" w="med" len="med"/>
+                      <a:tailEnd type="none" w="med" len="med"/>
+                    </a:lnB>
+                  </a:tcPr>
+                </a:tc>
+              </a:tr>
+              <a:tr h="0">
+                <a:tc>
+                  <a:txBody>
+                    <a:bodyPr/>
+                    <a:lstStyle/>
+                    <a:p>
+                      <a:pPr indent="0" marL="0">
+                        <a:buNone/>
+                      </a:pPr>
+                      <a:r>
+                        <a:rPr lang="en-US" sz="1150" dirty="0">
+                          <a:solidFill>
+                            <a:srgbClr val="111418"/>
+                          </a:solidFill>
+                          <a:latin typeface="Calibri" pitchFamily="34" charset="0"/>
+                          <a:ea typeface="Calibri" pitchFamily="34" charset="-122"/>
+                          <a:cs typeface="Calibri" pitchFamily="34" charset="-120"/>
+                        </a:rPr>
+                        <a:t>Attention pooling</a:t>
+                      </a:r>
+                      <a:endParaRPr lang="en-US" sz="1150" dirty="0">
+                        <a:latin typeface="Calibri" charset="0"/>
+                        <a:ea typeface="Calibri" charset="0"/>
+                        <a:cs typeface="Calibri" charset="0"/>
+                      </a:endParaRPr>
+                    </a:p>
+                  </a:txBody>
+                  <a:tcPr marL="91440" marR="91440" marT="45720" marB="45720" anchor="ctr">
+                    <a:lnL w="9525" cap="flat" cmpd="sng" algn="ctr">
+                      <a:solidFill>
+                        <a:srgbClr val="D6DBDF"/>
+                      </a:solidFill>
+                      <a:prstDash val="solid"/>
+                      <a:round/>
+                      <a:headEnd type="none" w="med" len="med"/>
+                      <a:tailEnd type="none" w="med" len="med"/>
+                    </a:lnL>
+                    <a:lnR w="9525" cap="flat" cmpd="sng" algn="ctr">
+                      <a:solidFill>
+                        <a:srgbClr val="D6DBDF"/>
+                      </a:solidFill>
+                      <a:prstDash val="solid"/>
+                      <a:round/>
+                      <a:headEnd type="none" w="med" len="med"/>
+                      <a:tailEnd type="none" w="med" len="med"/>
+                    </a:lnR>
+                    <a:lnT w="9525" cap="flat" cmpd="sng" algn="ctr">
+                      <a:solidFill>
+                        <a:srgbClr val="D6DBDF"/>
+                      </a:solidFill>
+                      <a:prstDash val="solid"/>
+                      <a:round/>
+                      <a:headEnd type="none" w="med" len="med"/>
+                      <a:tailEnd type="none" w="med" len="med"/>
+                    </a:lnT>
+                    <a:lnB w="9525" cap="flat" cmpd="sng" algn="ctr">
+                      <a:solidFill>
+                        <a:srgbClr val="D6DBDF"/>
+                      </a:solidFill>
+                      <a:prstDash val="solid"/>
+                      <a:round/>
+                      <a:headEnd type="none" w="med" len="med"/>
+                      <a:tailEnd type="none" w="med" len="med"/>
+                    </a:lnB>
+                  </a:tcPr>
+                </a:tc>
+                <a:tc>
+                  <a:txBody>
+                    <a:bodyPr/>
+                    <a:lstStyle/>
+                    <a:p>
+                      <a:pPr algn="r" indent="0" marL="0">
+                        <a:buNone/>
+                      </a:pPr>
+                      <a:r>
+                        <a:rPr lang="en-US" sz="1150" dirty="0">
+                          <a:solidFill>
+                            <a:srgbClr val="111418"/>
+                          </a:solidFill>
+                          <a:latin typeface="Calibri" pitchFamily="34" charset="0"/>
+                          <a:ea typeface="Calibri" pitchFamily="34" charset="-122"/>
+                          <a:cs typeface="Calibri" pitchFamily="34" charset="-120"/>
+                        </a:rPr>
+                        <a:t>5,316,480</a:t>
+                      </a:r>
+                      <a:endParaRPr lang="en-US" sz="1150" dirty="0">
+                        <a:latin typeface="Calibri" charset="0"/>
+                        <a:ea typeface="Calibri" charset="0"/>
+                        <a:cs typeface="Calibri" charset="0"/>
+                      </a:endParaRPr>
+                    </a:p>
+                  </a:txBody>
+                  <a:tcPr marL="91440" marR="91440" marT="45720" marB="45720" anchor="ctr">
+                    <a:lnL w="9525" cap="flat" cmpd="sng" algn="ctr">
+                      <a:solidFill>
+                        <a:srgbClr val="D6DBDF"/>
+                      </a:solidFill>
+                      <a:prstDash val="solid"/>
+                      <a:round/>
+                      <a:headEnd type="none" w="med" len="med"/>
+                      <a:tailEnd type="none" w="med" len="med"/>
+                    </a:lnL>
+                    <a:lnR w="9525" cap="flat" cmpd="sng" algn="ctr">
+                      <a:solidFill>
+                        <a:srgbClr val="D6DBDF"/>
+                      </a:solidFill>
+                      <a:prstDash val="solid"/>
+                      <a:round/>
+                      <a:headEnd type="none" w="med" len="med"/>
+                      <a:tailEnd type="none" w="med" len="med"/>
+                    </a:lnR>
+                    <a:lnT w="9525" cap="flat" cmpd="sng" algn="ctr">
+                      <a:solidFill>
+                        <a:srgbClr val="D6DBDF"/>
+                      </a:solidFill>
+                      <a:prstDash val="solid"/>
+                      <a:round/>
+                      <a:headEnd type="none" w="med" len="med"/>
+                      <a:tailEnd type="none" w="med" len="med"/>
+                    </a:lnT>
+                    <a:lnB w="9525" cap="flat" cmpd="sng" algn="ctr">
+                      <a:solidFill>
+                        <a:srgbClr val="D6DBDF"/>
+                      </a:solidFill>
+                      <a:prstDash val="solid"/>
+                      <a:round/>
+                      <a:headEnd type="none" w="med" len="med"/>
+                      <a:tailEnd type="none" w="med" len="med"/>
+                    </a:lnB>
+                  </a:tcPr>
+                </a:tc>
+                <a:tc>
+                  <a:txBody>
+                    <a:bodyPr/>
+                    <a:lstStyle/>
+                    <a:p>
+                      <a:pPr algn="r" indent="0" marL="0">
+                        <a:buNone/>
+                      </a:pPr>
+                      <a:r>
+                        <a:rPr lang="en-US" sz="1150" dirty="0">
+                          <a:solidFill>
+                            <a:srgbClr val="111418"/>
+                          </a:solidFill>
+                          <a:latin typeface="Calibri" pitchFamily="34" charset="0"/>
+                          <a:ea typeface="Calibri" pitchFamily="34" charset="-122"/>
+                          <a:cs typeface="Calibri" pitchFamily="34" charset="-120"/>
+                        </a:rPr>
+                        <a:t>99.9 %</a:t>
+                      </a:r>
+                      <a:endParaRPr lang="en-US" sz="1150" dirty="0">
+                        <a:latin typeface="Calibri" charset="0"/>
+                        <a:ea typeface="Calibri" charset="0"/>
+                        <a:cs typeface="Calibri" charset="0"/>
+                      </a:endParaRPr>
+                    </a:p>
+                  </a:txBody>
+                  <a:tcPr marL="91440" marR="91440" marT="45720" marB="45720" anchor="ctr">
+                    <a:lnL w="9525" cap="flat" cmpd="sng" algn="ctr">
+                      <a:solidFill>
+                        <a:srgbClr val="D6DBDF"/>
+                      </a:solidFill>
+                      <a:prstDash val="solid"/>
+                      <a:round/>
+                      <a:headEnd type="none" w="med" len="med"/>
+                      <a:tailEnd type="none" w="med" len="med"/>
+                    </a:lnL>
+                    <a:lnR w="9525" cap="flat" cmpd="sng" algn="ctr">
+                      <a:solidFill>
+                        <a:srgbClr val="D6DBDF"/>
+                      </a:solidFill>
+                      <a:prstDash val="solid"/>
+                      <a:round/>
+                      <a:headEnd type="none" w="med" len="med"/>
+                      <a:tailEnd type="none" w="med" len="med"/>
+                    </a:lnR>
+                    <a:lnT w="9525" cap="flat" cmpd="sng" algn="ctr">
+                      <a:solidFill>
+                        <a:srgbClr val="D6DBDF"/>
+                      </a:solidFill>
+                      <a:prstDash val="solid"/>
+                      <a:round/>
+                      <a:headEnd type="none" w="med" len="med"/>
+                      <a:tailEnd type="none" w="med" len="med"/>
+                    </a:lnT>
+                    <a:lnB w="9525" cap="flat" cmpd="sng" algn="ctr">
+                      <a:solidFill>
+                        <a:srgbClr val="D6DBDF"/>
+                      </a:solidFill>
+                      <a:prstDash val="solid"/>
+                      <a:round/>
+                      <a:headEnd type="none" w="med" len="med"/>
+                      <a:tailEnd type="none" w="med" len="med"/>
+                    </a:lnB>
+                  </a:tcPr>
+                </a:tc>
+              </a:tr>
+              <a:tr h="0">
+                <a:tc>
+                  <a:txBody>
+                    <a:bodyPr/>
+                    <a:lstStyle/>
+                    <a:p>
+                      <a:pPr indent="0" marL="0">
+                        <a:buNone/>
+                      </a:pPr>
+                      <a:r>
+                        <a:rPr lang="en-US" sz="1150" b="1" dirty="0">
+                          <a:solidFill>
+                            <a:srgbClr val="111418"/>
+                          </a:solidFill>
+                          <a:latin typeface="Calibri" pitchFamily="34" charset="0"/>
+                          <a:ea typeface="Calibri" pitchFamily="34" charset="-122"/>
+                          <a:cs typeface="Calibri" pitchFamily="34" charset="-120"/>
+                        </a:rPr>
+                        <a:t>Classifier head</a:t>
+                      </a:r>
+                      <a:endParaRPr lang="en-US" sz="1150" dirty="0">
+                        <a:latin typeface="Calibri" charset="0"/>
+                        <a:ea typeface="Calibri" charset="0"/>
+                        <a:cs typeface="Calibri" charset="0"/>
+                      </a:endParaRPr>
+                    </a:p>
+                  </a:txBody>
+                  <a:tcPr marL="91440" marR="91440" marT="45720" marB="45720" anchor="ctr">
+                    <a:lnL w="9525" cap="flat" cmpd="sng" algn="ctr">
+                      <a:solidFill>
+                        <a:srgbClr val="D6DBDF"/>
+                      </a:solidFill>
+                      <a:prstDash val="solid"/>
+                      <a:round/>
+                      <a:headEnd type="none" w="med" len="med"/>
+                      <a:tailEnd type="none" w="med" len="med"/>
+                    </a:lnL>
+                    <a:lnR w="9525" cap="flat" cmpd="sng" algn="ctr">
+                      <a:solidFill>
+                        <a:srgbClr val="D6DBDF"/>
+                      </a:solidFill>
+                      <a:prstDash val="solid"/>
+                      <a:round/>
+                      <a:headEnd type="none" w="med" len="med"/>
+                      <a:tailEnd type="none" w="med" len="med"/>
+                    </a:lnR>
+                    <a:lnT w="9525" cap="flat" cmpd="sng" algn="ctr">
+                      <a:solidFill>
+                        <a:srgbClr val="D6DBDF"/>
+                      </a:solidFill>
+                      <a:prstDash val="solid"/>
+                      <a:round/>
+                      <a:headEnd type="none" w="med" len="med"/>
+                      <a:tailEnd type="none" w="med" len="med"/>
+                    </a:lnT>
+                    <a:lnB w="9525" cap="flat" cmpd="sng" algn="ctr">
+                      <a:solidFill>
+                        <a:srgbClr val="D6DBDF"/>
+                      </a:solidFill>
+                      <a:prstDash val="solid"/>
+                      <a:round/>
+                      <a:headEnd type="none" w="med" len="med"/>
+                      <a:tailEnd type="none" w="med" len="med"/>
+                    </a:lnB>
+                  </a:tcPr>
+                </a:tc>
+                <a:tc>
+                  <a:txBody>
+                    <a:bodyPr/>
+                    <a:lstStyle/>
+                    <a:p>
+                      <a:pPr algn="r" indent="0" marL="0">
+                        <a:buNone/>
+                      </a:pPr>
+                      <a:r>
+                        <a:rPr lang="en-US" sz="1150" b="1" dirty="0">
+                          <a:solidFill>
+                            <a:srgbClr val="1F6F43"/>
+                          </a:solidFill>
+                          <a:latin typeface="Calibri" pitchFamily="34" charset="0"/>
+                          <a:ea typeface="Calibri" pitchFamily="34" charset="-122"/>
+                          <a:cs typeface="Calibri" pitchFamily="34" charset="-120"/>
+                        </a:rPr>
+                        <a:t>3,459</a:t>
+                      </a:r>
+                      <a:endParaRPr lang="en-US" sz="1150" dirty="0">
+                        <a:latin typeface="Calibri" charset="0"/>
+                        <a:ea typeface="Calibri" charset="0"/>
+                        <a:cs typeface="Calibri" charset="0"/>
+                      </a:endParaRPr>
+                    </a:p>
+                  </a:txBody>
+                  <a:tcPr marL="91440" marR="91440" marT="45720" marB="45720" anchor="ctr">
+                    <a:lnL w="9525" cap="flat" cmpd="sng" algn="ctr">
+                      <a:solidFill>
+                        <a:srgbClr val="D6DBDF"/>
+                      </a:solidFill>
+                      <a:prstDash val="solid"/>
+                      <a:round/>
+                      <a:headEnd type="none" w="med" len="med"/>
+                      <a:tailEnd type="none" w="med" len="med"/>
+                    </a:lnL>
+                    <a:lnR w="9525" cap="flat" cmpd="sng" algn="ctr">
+                      <a:solidFill>
+                        <a:srgbClr val="D6DBDF"/>
+                      </a:solidFill>
+                      <a:prstDash val="solid"/>
+                      <a:round/>
+                      <a:headEnd type="none" w="med" len="med"/>
+                      <a:tailEnd type="none" w="med" len="med"/>
+                    </a:lnR>
+                    <a:lnT w="9525" cap="flat" cmpd="sng" algn="ctr">
+                      <a:solidFill>
+                        <a:srgbClr val="D6DBDF"/>
+                      </a:solidFill>
+                      <a:prstDash val="solid"/>
+                      <a:round/>
+                      <a:headEnd type="none" w="med" len="med"/>
+                      <a:tailEnd type="none" w="med" len="med"/>
+                    </a:lnT>
+                    <a:lnB w="9525" cap="flat" cmpd="sng" algn="ctr">
+                      <a:solidFill>
+                        <a:srgbClr val="D6DBDF"/>
+                      </a:solidFill>
+                      <a:prstDash val="solid"/>
+                      <a:round/>
+                      <a:headEnd type="none" w="med" len="med"/>
+                      <a:tailEnd type="none" w="med" len="med"/>
+                    </a:lnB>
+                  </a:tcPr>
+                </a:tc>
+                <a:tc>
+                  <a:txBody>
+                    <a:bodyPr/>
+                    <a:lstStyle/>
+                    <a:p>
+                      <a:pPr algn="r" indent="0" marL="0">
+                        <a:buNone/>
+                      </a:pPr>
+                      <a:r>
+                        <a:rPr lang="en-US" sz="1150" b="1" dirty="0">
+                          <a:solidFill>
+                            <a:srgbClr val="1F6F43"/>
+                          </a:solidFill>
+                          <a:latin typeface="Calibri" pitchFamily="34" charset="0"/>
+                          <a:ea typeface="Calibri" pitchFamily="34" charset="-122"/>
+                          <a:cs typeface="Calibri" pitchFamily="34" charset="-120"/>
+                        </a:rPr>
+                        <a:t>0.1 %</a:t>
+                      </a:r>
+                      <a:endParaRPr lang="en-US" sz="1150" dirty="0">
+                        <a:latin typeface="Calibri" charset="0"/>
+                        <a:ea typeface="Calibri" charset="0"/>
+                        <a:cs typeface="Calibri" charset="0"/>
+                      </a:endParaRPr>
+                    </a:p>
+                  </a:txBody>
+                  <a:tcPr marL="91440" marR="91440" marT="45720" marB="45720" anchor="ctr">
+                    <a:lnL w="9525" cap="flat" cmpd="sng" algn="ctr">
+                      <a:solidFill>
+                        <a:srgbClr val="D6DBDF"/>
+                      </a:solidFill>
+                      <a:prstDash val="solid"/>
+                      <a:round/>
+                      <a:headEnd type="none" w="med" len="med"/>
+                      <a:tailEnd type="none" w="med" len="med"/>
+                    </a:lnL>
+                    <a:lnR w="9525" cap="flat" cmpd="sng" algn="ctr">
+                      <a:solidFill>
+                        <a:srgbClr val="D6DBDF"/>
+                      </a:solidFill>
+                      <a:prstDash val="solid"/>
+                      <a:round/>
+                      <a:headEnd type="none" w="med" len="med"/>
+                      <a:tailEnd type="none" w="med" len="med"/>
+                    </a:lnR>
+                    <a:lnT w="9525" cap="flat" cmpd="sng" algn="ctr">
+                      <a:solidFill>
+                        <a:srgbClr val="D6DBDF"/>
+                      </a:solidFill>
+                      <a:prstDash val="solid"/>
+                      <a:round/>
+                      <a:headEnd type="none" w="med" len="med"/>
+                      <a:tailEnd type="none" w="med" len="med"/>
+                    </a:lnT>
+                    <a:lnB w="9525" cap="flat" cmpd="sng" algn="ctr">
+                      <a:solidFill>
+                        <a:srgbClr val="D6DBDF"/>
+                      </a:solidFill>
+                      <a:prstDash val="solid"/>
+                      <a:round/>
+                      <a:headEnd type="none" w="med" len="med"/>
+                      <a:tailEnd type="none" w="med" len="med"/>
+                    </a:lnB>
+                  </a:tcPr>
+                </a:tc>
+              </a:tr>
+            </a:tbl>
           </a:graphicData>
         </a:graphic>
       </p:graphicFrame>
       <p:sp>
         <p:nvSpPr>
-          <p:cNvPr id="18" name="Text 15"/>
+          <p:cNvPr id="19" name="Text 16"/>
           <p:cNvSpPr txBox="1"/>
           <p:nvPr/>
         </p:nvSpPr>
         <p:spPr>
           <a:xfrm>
-            <a:off x="566928" y="5120640"/>
-            <a:ext cx="6309360" cy="365760"/>
+            <a:off x="566928" y="4023360"/>
+            <a:ext cx="5943600" cy="365760"/>
           </a:xfrm>
           <a:prstGeom prst="rect">
             <a:avLst/>
@@ -14780,7 +15723,7 @@
               <a:buNone/>
             </a:pPr>
             <a:r>
-              <a:rPr lang="en-US" sz="1250" i="1" dirty="0">
+              <a:rPr lang="en-US" sz="1300" b="1" dirty="0">
                 <a:solidFill>
                   <a:srgbClr val="0B3C49"/>
                 </a:solidFill>
@@ -14788,44 +15731,44 @@
                 <a:ea typeface="Calibri" pitchFamily="34" charset="-122"/>
                 <a:cs typeface="Calibri" pitchFamily="34" charset="-120"/>
               </a:rPr>
-              <a:t>Same head, same encoders, same seeds — the only difference is whether bag size varies with the class.</a:t>
-            </a:r>
-            <a:endParaRPr lang="en-US" sz="1250" dirty="0"/>
+              <a:t>Of everything trained downstream, the classifier is one part in a thousand.</a:t>
+            </a:r>
+            <a:endParaRPr lang="en-US" sz="1300" dirty="0"/>
           </a:p>
         </p:txBody>
       </p:sp>
       <p:sp>
         <p:nvSpPr>
-          <p:cNvPr id="19" name="Shape 16"/>
+          <p:cNvPr id="20" name="Shape 17"/>
           <p:cNvSpPr/>
           <p:nvPr/>
         </p:nvSpPr>
         <p:spPr>
           <a:xfrm>
-            <a:off x="7086600" y="1691640"/>
-            <a:ext cx="4544568" cy="2103120"/>
+            <a:off x="6675120" y="1691640"/>
+            <a:ext cx="4956048" cy="2286000"/>
           </a:xfrm>
           <a:prstGeom prst="roundRect">
             <a:avLst>
-              <a:gd name="adj" fmla="val 3043"/>
+              <a:gd name="adj" fmla="val 2800"/>
             </a:avLst>
           </a:prstGeom>
           <a:solidFill>
-            <a:srgbClr val="FBF3F2"/>
+            <a:srgbClr val="F1F6F2"/>
           </a:solidFill>
           <a:ln/>
         </p:spPr>
       </p:sp>
       <p:sp>
         <p:nvSpPr>
-          <p:cNvPr id="20" name="Text 17"/>
+          <p:cNvPr id="21" name="Text 18"/>
           <p:cNvSpPr txBox="1"/>
           <p:nvPr/>
         </p:nvSpPr>
         <p:spPr>
           <a:xfrm>
-            <a:off x="7269480" y="1819656"/>
-            <a:ext cx="4178808" cy="274320"/>
+            <a:off x="6858000" y="1819656"/>
+            <a:ext cx="4590288" cy="274320"/>
           </a:xfrm>
           <a:prstGeom prst="rect">
             <a:avLst/>
@@ -14843,13 +15786,13 @@
             <a:r>
               <a:rPr lang="en-US" sz="1450" b="1" dirty="0">
                 <a:solidFill>
-                  <a:srgbClr val="A62B1F"/>
+                  <a:srgbClr val="1F6F43"/>
                 </a:solidFill>
                 <a:latin typeface="Cambria" pitchFamily="34" charset="0"/>
                 <a:ea typeface="Cambria" pitchFamily="34" charset="-122"/>
                 <a:cs typeface="Cambria" pitchFamily="34" charset="-120"/>
               </a:rPr>
-              <a:t>With the bias present</a:t>
+              <a:t>Small on purpose, not for lack of capacity</a:t>
             </a:r>
             <a:endParaRPr lang="en-US" sz="1450" dirty="0"/>
           </a:p>
@@ -14857,14 +15800,14 @@
       </p:sp>
       <p:sp>
         <p:nvSpPr>
-          <p:cNvPr id="21" name="Text 18"/>
+          <p:cNvPr id="22" name="Text 19"/>
           <p:cNvSpPr txBox="1"/>
           <p:nvPr/>
         </p:nvSpPr>
         <p:spPr>
           <a:xfrm>
-            <a:off x="7269480" y="2148840"/>
-            <a:ext cx="4178808" cy="1481328"/>
+            <a:off x="6858000" y="2148840"/>
+            <a:ext cx="4590288" cy="1664208"/>
           </a:xfrm>
           <a:prstGeom prst="rect">
             <a:avLst/>
@@ -14891,7 +15834,7 @@
                 <a:ea typeface="Calibri" pitchFamily="34" charset="-122"/>
                 <a:cs typeface="Calibri" pitchFamily="34" charset="-120"/>
               </a:rPr>
-              <a:t>The random encoder wins by 0.0282 (z = −5.76). The head reads position, and position encodes size.</a:t>
+              <a:t>A large head could reconstruct information the encoder had discarded, and the comparison would then measure the head, not the representation. Keeping it linear forces the answer to be already present in the frozen vector.</a:t>
             </a:r>
             <a:endParaRPr lang="en-US" sz="1200" dirty="0"/>
           </a:p>
@@ -14899,36 +15842,36 @@
       </p:sp>
       <p:sp>
         <p:nvSpPr>
-          <p:cNvPr id="22" name="Shape 19"/>
+          <p:cNvPr id="23" name="Shape 20"/>
           <p:cNvSpPr/>
           <p:nvPr/>
         </p:nvSpPr>
         <p:spPr>
           <a:xfrm>
-            <a:off x="7086600" y="3977640"/>
-            <a:ext cx="4544568" cy="2148840"/>
+            <a:off x="6675120" y="4434840"/>
+            <a:ext cx="4956048" cy="1645920"/>
           </a:xfrm>
           <a:prstGeom prst="roundRect">
             <a:avLst>
-              <a:gd name="adj" fmla="val 2979"/>
+              <a:gd name="adj" fmla="val 3889"/>
             </a:avLst>
           </a:prstGeom>
           <a:solidFill>
-            <a:srgbClr val="F1F6F2"/>
+            <a:srgbClr val="F4F6F7"/>
           </a:solidFill>
           <a:ln/>
         </p:spPr>
       </p:sp>
       <p:sp>
         <p:nvSpPr>
-          <p:cNvPr id="23" name="Text 20"/>
+          <p:cNvPr id="24" name="Text 21"/>
           <p:cNvSpPr txBox="1"/>
           <p:nvPr/>
         </p:nvSpPr>
         <p:spPr>
           <a:xfrm>
-            <a:off x="7269480" y="4105656"/>
-            <a:ext cx="4178808" cy="274320"/>
+            <a:off x="6858000" y="4562856"/>
+            <a:ext cx="4590288" cy="274320"/>
           </a:xfrm>
           <a:prstGeom prst="rect">
             <a:avLst/>
@@ -14946,13 +15889,13 @@
             <a:r>
               <a:rPr lang="en-US" sz="1450" b="1" dirty="0">
                 <a:solidFill>
-                  <a:srgbClr val="1F6F43"/>
+                  <a:srgbClr val="0B3C49"/>
                 </a:solidFill>
                 <a:latin typeface="Cambria" pitchFamily="34" charset="0"/>
                 <a:ea typeface="Cambria" pitchFamily="34" charset="-122"/>
                 <a:cs typeface="Cambria" pitchFamily="34" charset="-120"/>
               </a:rPr>
-              <a:t>With the bias removed</a:t>
+              <a:t>And what the 5 seeds change</a:t>
             </a:r>
             <a:endParaRPr lang="en-US" sz="1450" dirty="0"/>
           </a:p>
@@ -14960,14 +15903,14 @@
       </p:sp>
       <p:sp>
         <p:nvSpPr>
-          <p:cNvPr id="24" name="Text 21"/>
+          <p:cNvPr id="25" name="Text 22"/>
           <p:cNvSpPr txBox="1"/>
           <p:nvPr/>
         </p:nvSpPr>
         <p:spPr>
           <a:xfrm>
-            <a:off x="7269480" y="4434840"/>
-            <a:ext cx="4178808" cy="1527048"/>
+            <a:off x="6858000" y="4892040"/>
+            <a:ext cx="4590288" cy="1024128"/>
           </a:xfrm>
           <a:prstGeom prst="rect">
             <a:avLst/>
@@ -14994,7 +15937,7 @@
                 <a:ea typeface="Calibri" pitchFamily="34" charset="-122"/>
                 <a:cs typeface="Calibri" pitchFamily="34" charset="-120"/>
               </a:rPr>
-              <a:t>The random encoder collapses to 0.4014 while I-JEPA holds at 0.5171: +0.1158, z = +6.49, a relative gain of +28.8 %.</a:t>
+              <a:t>Head initialisation, batch order, and — for the sampling methods — which views are drawn. Not the encoder, not the split, not the test set.</a:t>
             </a:r>
             <a:endParaRPr lang="en-US" sz="1200" dirty="0"/>
           </a:p>
@@ -15065,6 +16008,817 @@
                 <a:ea typeface="Calibri" pitchFamily="34" charset="-122"/>
                 <a:cs typeface="Calibri" pitchFamily="34" charset="-120"/>
               </a:rPr>
+              <a:t>METHOD  ·  HEADS  ·  RESULT</a:t>
+            </a:r>
+            <a:endParaRPr lang="en-US" sz="1050" dirty="0"/>
+          </a:p>
+        </p:txBody>
+      </p:sp>
+      <p:sp>
+        <p:nvSpPr>
+          <p:cNvPr id="3" name="Text 1"/>
+          <p:cNvSpPr txBox="1"/>
+          <p:nvPr/>
+        </p:nvSpPr>
+        <p:spPr>
+          <a:xfrm>
+            <a:off x="566928" y="493776"/>
+            <a:ext cx="11057839" cy="566928"/>
+          </a:xfrm>
+          <a:prstGeom prst="rect">
+            <a:avLst/>
+          </a:prstGeom>
+          <a:noFill/>
+          <a:ln/>
+        </p:spPr>
+        <p:txBody>
+          <a:bodyPr wrap="square" lIns="0" tIns="0" rIns="0" bIns="0" rtlCol="0" anchor="ctr"/>
+          <a:lstStyle/>
+          <a:p>
+            <a:pPr indent="0" marL="0">
+              <a:buNone/>
+            </a:pPr>
+            <a:r>
+              <a:rPr lang="en-US" sz="2700" b="1" dirty="0">
+                <a:solidFill>
+                  <a:srgbClr val="0B3C49"/>
+                </a:solidFill>
+                <a:latin typeface="Cambria" pitchFamily="34" charset="0"/>
+                <a:ea typeface="Cambria" pitchFamily="34" charset="-122"/>
+                <a:cs typeface="Cambria" pitchFamily="34" charset="-120"/>
+              </a:rPr>
+              <a:t>Instance-level MIL isolates the encoder</a:t>
+            </a:r>
+            <a:endParaRPr lang="en-US" sz="2700" dirty="0"/>
+          </a:p>
+        </p:txBody>
+      </p:sp>
+      <p:sp>
+        <p:nvSpPr>
+          <p:cNvPr id="4" name="Shape 2"/>
+          <p:cNvSpPr/>
+          <p:nvPr/>
+        </p:nvSpPr>
+        <p:spPr>
+          <a:xfrm>
+            <a:off x="566928" y="1115568"/>
+            <a:ext cx="11057839" cy="384048"/>
+          </a:xfrm>
+          <a:prstGeom prst="rect">
+            <a:avLst/>
+          </a:prstGeom>
+          <a:solidFill>
+            <a:srgbClr val="F1F4F6"/>
+          </a:solidFill>
+          <a:ln/>
+        </p:spPr>
+      </p:sp>
+      <p:sp>
+        <p:nvSpPr>
+          <p:cNvPr id="5" name="Text 3"/>
+          <p:cNvSpPr txBox="1"/>
+          <p:nvPr/>
+        </p:nvSpPr>
+        <p:spPr>
+          <a:xfrm>
+            <a:off x="713232" y="1161288"/>
+            <a:ext cx="2554148" cy="146304"/>
+          </a:xfrm>
+          <a:prstGeom prst="rect">
+            <a:avLst/>
+          </a:prstGeom>
+          <a:noFill/>
+          <a:ln/>
+        </p:spPr>
+        <p:txBody>
+          <a:bodyPr wrap="square" lIns="0" tIns="0" rIns="0" bIns="0" rtlCol="0" anchor="ctr"/>
+          <a:lstStyle/>
+          <a:p>
+            <a:pPr indent="0" marL="0">
+              <a:buNone/>
+            </a:pPr>
+            <a:r>
+              <a:rPr lang="en-US" sz="750" b="1" spc="80" kern="0" dirty="0">
+                <a:solidFill>
+                  <a:srgbClr val="58626C"/>
+                </a:solidFill>
+                <a:latin typeface="Calibri" pitchFamily="34" charset="0"/>
+                <a:ea typeface="Calibri" pitchFamily="34" charset="-122"/>
+                <a:cs typeface="Calibri" pitchFamily="34" charset="-120"/>
+              </a:rPr>
+              <a:t>MODEL</a:t>
+            </a:r>
+            <a:endParaRPr lang="en-US" sz="750" dirty="0"/>
+          </a:p>
+        </p:txBody>
+      </p:sp>
+      <p:sp>
+        <p:nvSpPr>
+          <p:cNvPr id="6" name="Text 4"/>
+          <p:cNvSpPr txBox="1"/>
+          <p:nvPr/>
+        </p:nvSpPr>
+        <p:spPr>
+          <a:xfrm>
+            <a:off x="713232" y="1298448"/>
+            <a:ext cx="2554148" cy="173736"/>
+          </a:xfrm>
+          <a:prstGeom prst="rect">
+            <a:avLst/>
+          </a:prstGeom>
+          <a:noFill/>
+          <a:ln/>
+        </p:spPr>
+        <p:txBody>
+          <a:bodyPr wrap="square" lIns="0" tIns="0" rIns="0" bIns="0" rtlCol="0" anchor="ctr"/>
+          <a:lstStyle/>
+          <a:p>
+            <a:pPr indent="0" marL="0">
+              <a:buNone/>
+            </a:pPr>
+            <a:r>
+              <a:rPr lang="en-US" sz="1050" b="1" dirty="0">
+                <a:solidFill>
+                  <a:srgbClr val="1F6F43"/>
+                </a:solidFill>
+                <a:latin typeface="Calibri" pitchFamily="34" charset="0"/>
+                <a:ea typeface="Calibri" pitchFamily="34" charset="-122"/>
+                <a:cs typeface="Calibri" pitchFamily="34" charset="-120"/>
+              </a:rPr>
+              <a:t>I-JEPA (frozen, ep. 69)</a:t>
+            </a:r>
+            <a:endParaRPr lang="en-US" sz="1050" dirty="0"/>
+          </a:p>
+        </p:txBody>
+      </p:sp>
+      <p:sp>
+        <p:nvSpPr>
+          <p:cNvPr id="7" name="Shape 5"/>
+          <p:cNvSpPr/>
+          <p:nvPr/>
+        </p:nvSpPr>
+        <p:spPr>
+          <a:xfrm>
+            <a:off x="3303956" y="1179576"/>
+            <a:ext cx="0" cy="256032"/>
+          </a:xfrm>
+          <a:prstGeom prst="line">
+            <a:avLst/>
+          </a:prstGeom>
+          <a:noFill/>
+          <a:ln w="12700">
+            <a:solidFill>
+              <a:srgbClr val="D6DBDF"/>
+            </a:solidFill>
+            <a:prstDash val="solid"/>
+          </a:ln>
+        </p:spPr>
+      </p:sp>
+      <p:sp>
+        <p:nvSpPr>
+          <p:cNvPr id="8" name="Text 6"/>
+          <p:cNvSpPr txBox="1"/>
+          <p:nvPr/>
+        </p:nvSpPr>
+        <p:spPr>
+          <a:xfrm>
+            <a:off x="3404540" y="1161288"/>
+            <a:ext cx="2554148" cy="146304"/>
+          </a:xfrm>
+          <a:prstGeom prst="rect">
+            <a:avLst/>
+          </a:prstGeom>
+          <a:noFill/>
+          <a:ln/>
+        </p:spPr>
+        <p:txBody>
+          <a:bodyPr wrap="square" lIns="0" tIns="0" rIns="0" bIns="0" rtlCol="0" anchor="ctr"/>
+          <a:lstStyle/>
+          <a:p>
+            <a:pPr indent="0" marL="0">
+              <a:buNone/>
+            </a:pPr>
+            <a:r>
+              <a:rPr lang="en-US" sz="750" b="1" spc="80" kern="0" dirty="0">
+                <a:solidFill>
+                  <a:srgbClr val="58626C"/>
+                </a:solidFill>
+                <a:latin typeface="Calibri" pitchFamily="34" charset="0"/>
+                <a:ea typeface="Calibri" pitchFamily="34" charset="-122"/>
+                <a:cs typeface="Calibri" pitchFamily="34" charset="-120"/>
+              </a:rPr>
+              <a:t>COMPARED WITH</a:t>
+            </a:r>
+            <a:endParaRPr lang="en-US" sz="750" dirty="0"/>
+          </a:p>
+        </p:txBody>
+      </p:sp>
+      <p:sp>
+        <p:nvSpPr>
+          <p:cNvPr id="9" name="Text 7"/>
+          <p:cNvSpPr txBox="1"/>
+          <p:nvPr/>
+        </p:nvSpPr>
+        <p:spPr>
+          <a:xfrm>
+            <a:off x="3404540" y="1298448"/>
+            <a:ext cx="2554148" cy="173736"/>
+          </a:xfrm>
+          <a:prstGeom prst="rect">
+            <a:avLst/>
+          </a:prstGeom>
+          <a:noFill/>
+          <a:ln/>
+        </p:spPr>
+        <p:txBody>
+          <a:bodyPr wrap="square" lIns="0" tIns="0" rIns="0" bIns="0" rtlCol="0" anchor="ctr"/>
+          <a:lstStyle/>
+          <a:p>
+            <a:pPr indent="0" marL="0">
+              <a:buNone/>
+            </a:pPr>
+            <a:r>
+              <a:rPr lang="en-US" sz="1050" b="1" dirty="0">
+                <a:solidFill>
+                  <a:srgbClr val="A62B1F"/>
+                </a:solidFill>
+                <a:latin typeface="Calibri" pitchFamily="34" charset="0"/>
+                <a:ea typeface="Calibri" pitchFamily="34" charset="-122"/>
+                <a:cs typeface="Calibri" pitchFamily="34" charset="-120"/>
+              </a:rPr>
+              <a:t>Random ViT (frozen)</a:t>
+            </a:r>
+            <a:endParaRPr lang="en-US" sz="1050" dirty="0"/>
+          </a:p>
+        </p:txBody>
+      </p:sp>
+      <p:sp>
+        <p:nvSpPr>
+          <p:cNvPr id="10" name="Shape 8"/>
+          <p:cNvSpPr/>
+          <p:nvPr/>
+        </p:nvSpPr>
+        <p:spPr>
+          <a:xfrm>
+            <a:off x="5995264" y="1179576"/>
+            <a:ext cx="0" cy="256032"/>
+          </a:xfrm>
+          <a:prstGeom prst="line">
+            <a:avLst/>
+          </a:prstGeom>
+          <a:noFill/>
+          <a:ln w="12700">
+            <a:solidFill>
+              <a:srgbClr val="D6DBDF"/>
+            </a:solidFill>
+            <a:prstDash val="solid"/>
+          </a:ln>
+        </p:spPr>
+      </p:sp>
+      <p:sp>
+        <p:nvSpPr>
+          <p:cNvPr id="11" name="Text 9"/>
+          <p:cNvSpPr txBox="1"/>
+          <p:nvPr/>
+        </p:nvSpPr>
+        <p:spPr>
+          <a:xfrm>
+            <a:off x="6095848" y="1161288"/>
+            <a:ext cx="2554148" cy="146304"/>
+          </a:xfrm>
+          <a:prstGeom prst="rect">
+            <a:avLst/>
+          </a:prstGeom>
+          <a:noFill/>
+          <a:ln/>
+        </p:spPr>
+        <p:txBody>
+          <a:bodyPr wrap="square" lIns="0" tIns="0" rIns="0" bIns="0" rtlCol="0" anchor="ctr"/>
+          <a:lstStyle/>
+          <a:p>
+            <a:pPr indent="0" marL="0">
+              <a:buNone/>
+            </a:pPr>
+            <a:r>
+              <a:rPr lang="en-US" sz="750" b="1" spc="80" kern="0" dirty="0">
+                <a:solidFill>
+                  <a:srgbClr val="58626C"/>
+                </a:solidFill>
+                <a:latin typeface="Calibri" pitchFamily="34" charset="0"/>
+                <a:ea typeface="Calibri" pitchFamily="34" charset="-122"/>
+                <a:cs typeface="Calibri" pitchFamily="34" charset="-120"/>
+              </a:rPr>
+              <a:t>PROTOCOL</a:t>
+            </a:r>
+            <a:endParaRPr lang="en-US" sz="750" dirty="0"/>
+          </a:p>
+        </p:txBody>
+      </p:sp>
+      <p:sp>
+        <p:nvSpPr>
+          <p:cNvPr id="12" name="Text 10"/>
+          <p:cNvSpPr txBox="1"/>
+          <p:nvPr/>
+        </p:nvSpPr>
+        <p:spPr>
+          <a:xfrm>
+            <a:off x="6095848" y="1298448"/>
+            <a:ext cx="2554148" cy="173736"/>
+          </a:xfrm>
+          <a:prstGeom prst="rect">
+            <a:avLst/>
+          </a:prstGeom>
+          <a:noFill/>
+          <a:ln/>
+        </p:spPr>
+        <p:txBody>
+          <a:bodyPr wrap="square" lIns="0" tIns="0" rIns="0" bIns="0" rtlCol="0" anchor="ctr"/>
+          <a:lstStyle/>
+          <a:p>
+            <a:pPr indent="0" marL="0">
+              <a:buNone/>
+            </a:pPr>
+            <a:r>
+              <a:rPr lang="en-US" sz="1050" b="1" dirty="0">
+                <a:solidFill>
+                  <a:srgbClr val="0B3C49"/>
+                </a:solidFill>
+                <a:latin typeface="Calibri" pitchFamily="34" charset="0"/>
+                <a:ea typeface="Calibri" pitchFamily="34" charset="-122"/>
+                <a:cs typeface="Calibri" pitchFamily="34" charset="-120"/>
+              </a:rPr>
+              <a:t>Instance-level MIL head</a:t>
+            </a:r>
+            <a:endParaRPr lang="en-US" sz="1050" dirty="0"/>
+          </a:p>
+        </p:txBody>
+      </p:sp>
+      <p:sp>
+        <p:nvSpPr>
+          <p:cNvPr id="13" name="Shape 11"/>
+          <p:cNvSpPr/>
+          <p:nvPr/>
+        </p:nvSpPr>
+        <p:spPr>
+          <a:xfrm>
+            <a:off x="8686571" y="1179576"/>
+            <a:ext cx="0" cy="256032"/>
+          </a:xfrm>
+          <a:prstGeom prst="line">
+            <a:avLst/>
+          </a:prstGeom>
+          <a:noFill/>
+          <a:ln w="12700">
+            <a:solidFill>
+              <a:srgbClr val="D6DBDF"/>
+            </a:solidFill>
+            <a:prstDash val="solid"/>
+          </a:ln>
+        </p:spPr>
+      </p:sp>
+      <p:sp>
+        <p:nvSpPr>
+          <p:cNvPr id="14" name="Text 12"/>
+          <p:cNvSpPr txBox="1"/>
+          <p:nvPr/>
+        </p:nvSpPr>
+        <p:spPr>
+          <a:xfrm>
+            <a:off x="8787155" y="1161288"/>
+            <a:ext cx="2554148" cy="146304"/>
+          </a:xfrm>
+          <a:prstGeom prst="rect">
+            <a:avLst/>
+          </a:prstGeom>
+          <a:noFill/>
+          <a:ln/>
+        </p:spPr>
+        <p:txBody>
+          <a:bodyPr wrap="square" lIns="0" tIns="0" rIns="0" bIns="0" rtlCol="0" anchor="ctr"/>
+          <a:lstStyle/>
+          <a:p>
+            <a:pPr indent="0" marL="0">
+              <a:buNone/>
+            </a:pPr>
+            <a:r>
+              <a:rPr lang="en-US" sz="750" b="1" spc="80" kern="0" dirty="0">
+                <a:solidFill>
+                  <a:srgbClr val="58626C"/>
+                </a:solidFill>
+                <a:latin typeface="Calibri" pitchFamily="34" charset="0"/>
+                <a:ea typeface="Calibri" pitchFamily="34" charset="-122"/>
+                <a:cs typeface="Calibri" pitchFamily="34" charset="-120"/>
+              </a:rPr>
+              <a:t>METRIC</a:t>
+            </a:r>
+            <a:endParaRPr lang="en-US" sz="750" dirty="0"/>
+          </a:p>
+        </p:txBody>
+      </p:sp>
+      <p:sp>
+        <p:nvSpPr>
+          <p:cNvPr id="15" name="Text 13"/>
+          <p:cNvSpPr txBox="1"/>
+          <p:nvPr/>
+        </p:nvSpPr>
+        <p:spPr>
+          <a:xfrm>
+            <a:off x="8787155" y="1298448"/>
+            <a:ext cx="2554148" cy="173736"/>
+          </a:xfrm>
+          <a:prstGeom prst="rect">
+            <a:avLst/>
+          </a:prstGeom>
+          <a:noFill/>
+          <a:ln/>
+        </p:spPr>
+        <p:txBody>
+          <a:bodyPr wrap="square" lIns="0" tIns="0" rIns="0" bIns="0" rtlCol="0" anchor="ctr"/>
+          <a:lstStyle/>
+          <a:p>
+            <a:pPr indent="0" marL="0">
+              <a:buNone/>
+            </a:pPr>
+            <a:r>
+              <a:rPr lang="en-US" sz="1050" b="1" dirty="0">
+                <a:solidFill>
+                  <a:srgbClr val="0B3C49"/>
+                </a:solidFill>
+                <a:latin typeface="Calibri" pitchFamily="34" charset="0"/>
+                <a:ea typeface="Calibri" pitchFamily="34" charset="-122"/>
+                <a:cs typeface="Calibri" pitchFamily="34" charset="-120"/>
+              </a:rPr>
+              <a:t>macro-F1, test, 5 seeds</a:t>
+            </a:r>
+            <a:endParaRPr lang="en-US" sz="1050" dirty="0"/>
+          </a:p>
+        </p:txBody>
+      </p:sp>
+      <p:sp>
+        <p:nvSpPr>
+          <p:cNvPr id="16" name="Text 14"/>
+          <p:cNvSpPr txBox="1"/>
+          <p:nvPr/>
+        </p:nvSpPr>
+        <p:spPr>
+          <a:xfrm>
+            <a:off x="10618927" y="6400800"/>
+            <a:ext cx="1005840" cy="237744"/>
+          </a:xfrm>
+          <a:prstGeom prst="rect">
+            <a:avLst/>
+          </a:prstGeom>
+          <a:noFill/>
+          <a:ln/>
+        </p:spPr>
+        <p:txBody>
+          <a:bodyPr wrap="square" lIns="0" tIns="0" rIns="0" bIns="0" rtlCol="0" anchor="ctr"/>
+          <a:lstStyle/>
+          <a:p>
+            <a:pPr algn="r" indent="0" marL="0">
+              <a:buNone/>
+            </a:pPr>
+            <a:r>
+              <a:rPr lang="en-US" sz="1050" dirty="0">
+                <a:solidFill>
+                  <a:srgbClr val="58626C"/>
+                </a:solidFill>
+                <a:latin typeface="Calibri" pitchFamily="34" charset="0"/>
+                <a:ea typeface="Calibri" pitchFamily="34" charset="-122"/>
+                <a:cs typeface="Calibri" pitchFamily="34" charset="-120"/>
+              </a:rPr>
+              <a:t>16 / 26</a:t>
+            </a:r>
+            <a:endParaRPr lang="en-US" sz="1050" dirty="0"/>
+          </a:p>
+        </p:txBody>
+      </p:sp>
+      <p:graphicFrame>
+        <p:nvGraphicFramePr>
+          <p:cNvPr id="17" name="Chart 0" descr=""/>
+          <p:cNvGraphicFramePr/>
+          <p:nvPr/>
+        </p:nvGraphicFramePr>
+        <p:xfrm>
+          <a:off x="566928" y="1691640"/>
+          <a:ext cx="6309360" cy="3291840"/>
+        </p:xfrm>
+        <a:graphic xmlns:a="http://schemas.openxmlformats.org/drawingml/2006/main">
+          <a:graphicData uri="http://schemas.openxmlformats.org/drawingml/2006/chart">
+            <c:chart xmlns:c="http://schemas.openxmlformats.org/drawingml/2006/chart" r:id="rId1"/>
+          </a:graphicData>
+        </a:graphic>
+      </p:graphicFrame>
+      <p:sp>
+        <p:nvSpPr>
+          <p:cNvPr id="18" name="Text 15"/>
+          <p:cNvSpPr txBox="1"/>
+          <p:nvPr/>
+        </p:nvSpPr>
+        <p:spPr>
+          <a:xfrm>
+            <a:off x="566928" y="5120640"/>
+            <a:ext cx="6309360" cy="365760"/>
+          </a:xfrm>
+          <a:prstGeom prst="rect">
+            <a:avLst/>
+          </a:prstGeom>
+          <a:noFill/>
+          <a:ln/>
+        </p:spPr>
+        <p:txBody>
+          <a:bodyPr wrap="square" lIns="0" tIns="0" rIns="0" bIns="0" rtlCol="0" anchor="ctr"/>
+          <a:lstStyle/>
+          <a:p>
+            <a:pPr indent="0" marL="0">
+              <a:buNone/>
+            </a:pPr>
+            <a:r>
+              <a:rPr lang="en-US" sz="1250" i="1" dirty="0">
+                <a:solidFill>
+                  <a:srgbClr val="0B3C49"/>
+                </a:solidFill>
+                <a:latin typeface="Calibri" pitchFamily="34" charset="0"/>
+                <a:ea typeface="Calibri" pitchFamily="34" charset="-122"/>
+                <a:cs typeface="Calibri" pitchFamily="34" charset="-120"/>
+              </a:rPr>
+              <a:t>Same head, same encoders, same seeds — the only difference is whether bag size varies with the class.</a:t>
+            </a:r>
+            <a:endParaRPr lang="en-US" sz="1250" dirty="0"/>
+          </a:p>
+        </p:txBody>
+      </p:sp>
+      <p:sp>
+        <p:nvSpPr>
+          <p:cNvPr id="19" name="Shape 16"/>
+          <p:cNvSpPr/>
+          <p:nvPr/>
+        </p:nvSpPr>
+        <p:spPr>
+          <a:xfrm>
+            <a:off x="7086600" y="1691640"/>
+            <a:ext cx="4544568" cy="2103120"/>
+          </a:xfrm>
+          <a:prstGeom prst="roundRect">
+            <a:avLst>
+              <a:gd name="adj" fmla="val 3043"/>
+            </a:avLst>
+          </a:prstGeom>
+          <a:solidFill>
+            <a:srgbClr val="FBF3F2"/>
+          </a:solidFill>
+          <a:ln/>
+        </p:spPr>
+      </p:sp>
+      <p:sp>
+        <p:nvSpPr>
+          <p:cNvPr id="20" name="Text 17"/>
+          <p:cNvSpPr txBox="1"/>
+          <p:nvPr/>
+        </p:nvSpPr>
+        <p:spPr>
+          <a:xfrm>
+            <a:off x="7269480" y="1819656"/>
+            <a:ext cx="4178808" cy="274320"/>
+          </a:xfrm>
+          <a:prstGeom prst="rect">
+            <a:avLst/>
+          </a:prstGeom>
+          <a:noFill/>
+          <a:ln/>
+        </p:spPr>
+        <p:txBody>
+          <a:bodyPr wrap="square" lIns="0" tIns="0" rIns="0" bIns="0" rtlCol="0" anchor="ctr"/>
+          <a:lstStyle/>
+          <a:p>
+            <a:pPr indent="0" marL="0">
+              <a:buNone/>
+            </a:pPr>
+            <a:r>
+              <a:rPr lang="en-US" sz="1450" b="1" dirty="0">
+                <a:solidFill>
+                  <a:srgbClr val="A62B1F"/>
+                </a:solidFill>
+                <a:latin typeface="Cambria" pitchFamily="34" charset="0"/>
+                <a:ea typeface="Cambria" pitchFamily="34" charset="-122"/>
+                <a:cs typeface="Cambria" pitchFamily="34" charset="-120"/>
+              </a:rPr>
+              <a:t>With the bias present</a:t>
+            </a:r>
+            <a:endParaRPr lang="en-US" sz="1450" dirty="0"/>
+          </a:p>
+        </p:txBody>
+      </p:sp>
+      <p:sp>
+        <p:nvSpPr>
+          <p:cNvPr id="21" name="Text 18"/>
+          <p:cNvSpPr txBox="1"/>
+          <p:nvPr/>
+        </p:nvSpPr>
+        <p:spPr>
+          <a:xfrm>
+            <a:off x="7269480" y="2148840"/>
+            <a:ext cx="4178808" cy="1481328"/>
+          </a:xfrm>
+          <a:prstGeom prst="rect">
+            <a:avLst/>
+          </a:prstGeom>
+          <a:noFill/>
+          <a:ln/>
+        </p:spPr>
+        <p:txBody>
+          <a:bodyPr wrap="square" lIns="0" tIns="0" rIns="0" bIns="0" rtlCol="0" anchor="ctr"/>
+          <a:lstStyle/>
+          <a:p>
+            <a:pPr indent="0" marL="0">
+              <a:lnSpc>
+                <a:spcPts val="1800"/>
+              </a:lnSpc>
+              <a:buNone/>
+            </a:pPr>
+            <a:r>
+              <a:rPr lang="en-US" sz="1200" dirty="0">
+                <a:solidFill>
+                  <a:srgbClr val="111418"/>
+                </a:solidFill>
+                <a:latin typeface="Calibri" pitchFamily="34" charset="0"/>
+                <a:ea typeface="Calibri" pitchFamily="34" charset="-122"/>
+                <a:cs typeface="Calibri" pitchFamily="34" charset="-120"/>
+              </a:rPr>
+              <a:t>The random encoder wins by 0.0282 (z = −5.76). The head reads position, and position encodes size.</a:t>
+            </a:r>
+            <a:endParaRPr lang="en-US" sz="1200" dirty="0"/>
+          </a:p>
+        </p:txBody>
+      </p:sp>
+      <p:sp>
+        <p:nvSpPr>
+          <p:cNvPr id="22" name="Shape 19"/>
+          <p:cNvSpPr/>
+          <p:nvPr/>
+        </p:nvSpPr>
+        <p:spPr>
+          <a:xfrm>
+            <a:off x="7086600" y="3977640"/>
+            <a:ext cx="4544568" cy="2148840"/>
+          </a:xfrm>
+          <a:prstGeom prst="roundRect">
+            <a:avLst>
+              <a:gd name="adj" fmla="val 2979"/>
+            </a:avLst>
+          </a:prstGeom>
+          <a:solidFill>
+            <a:srgbClr val="F1F6F2"/>
+          </a:solidFill>
+          <a:ln/>
+        </p:spPr>
+      </p:sp>
+      <p:sp>
+        <p:nvSpPr>
+          <p:cNvPr id="23" name="Text 20"/>
+          <p:cNvSpPr txBox="1"/>
+          <p:nvPr/>
+        </p:nvSpPr>
+        <p:spPr>
+          <a:xfrm>
+            <a:off x="7269480" y="4105656"/>
+            <a:ext cx="4178808" cy="274320"/>
+          </a:xfrm>
+          <a:prstGeom prst="rect">
+            <a:avLst/>
+          </a:prstGeom>
+          <a:noFill/>
+          <a:ln/>
+        </p:spPr>
+        <p:txBody>
+          <a:bodyPr wrap="square" lIns="0" tIns="0" rIns="0" bIns="0" rtlCol="0" anchor="ctr"/>
+          <a:lstStyle/>
+          <a:p>
+            <a:pPr indent="0" marL="0">
+              <a:buNone/>
+            </a:pPr>
+            <a:r>
+              <a:rPr lang="en-US" sz="1450" b="1" dirty="0">
+                <a:solidFill>
+                  <a:srgbClr val="1F6F43"/>
+                </a:solidFill>
+                <a:latin typeface="Cambria" pitchFamily="34" charset="0"/>
+                <a:ea typeface="Cambria" pitchFamily="34" charset="-122"/>
+                <a:cs typeface="Cambria" pitchFamily="34" charset="-120"/>
+              </a:rPr>
+              <a:t>With the bias removed</a:t>
+            </a:r>
+            <a:endParaRPr lang="en-US" sz="1450" dirty="0"/>
+          </a:p>
+        </p:txBody>
+      </p:sp>
+      <p:sp>
+        <p:nvSpPr>
+          <p:cNvPr id="24" name="Text 21"/>
+          <p:cNvSpPr txBox="1"/>
+          <p:nvPr/>
+        </p:nvSpPr>
+        <p:spPr>
+          <a:xfrm>
+            <a:off x="7269480" y="4434840"/>
+            <a:ext cx="4178808" cy="1527048"/>
+          </a:xfrm>
+          <a:prstGeom prst="rect">
+            <a:avLst/>
+          </a:prstGeom>
+          <a:noFill/>
+          <a:ln/>
+        </p:spPr>
+        <p:txBody>
+          <a:bodyPr wrap="square" lIns="0" tIns="0" rIns="0" bIns="0" rtlCol="0" anchor="ctr"/>
+          <a:lstStyle/>
+          <a:p>
+            <a:pPr indent="0" marL="0">
+              <a:lnSpc>
+                <a:spcPts val="1800"/>
+              </a:lnSpc>
+              <a:buNone/>
+            </a:pPr>
+            <a:r>
+              <a:rPr lang="en-US" sz="1200" dirty="0">
+                <a:solidFill>
+                  <a:srgbClr val="111418"/>
+                </a:solidFill>
+                <a:latin typeface="Calibri" pitchFamily="34" charset="0"/>
+                <a:ea typeface="Calibri" pitchFamily="34" charset="-122"/>
+                <a:cs typeface="Calibri" pitchFamily="34" charset="-120"/>
+              </a:rPr>
+              <a:t>The random encoder collapses to 0.4014 while I-JEPA holds at 0.5171: +0.1158, z = +6.49, a relative gain of +28.8 %.</a:t>
+            </a:r>
+            <a:endParaRPr lang="en-US" sz="1200" dirty="0"/>
+          </a:p>
+        </p:txBody>
+      </p:sp>
+    </p:spTree>
+  </p:cSld>
+  <p:clrMapOvr>
+    <a:masterClrMapping/>
+  </p:clrMapOvr>
+</p:sld>
+</file>
+
+<file path=ppt/slides/slide17.xml><?xml version="1.0" encoding="utf-8"?>
+<p:sld xmlns:a="http://schemas.openxmlformats.org/drawingml/2006/main" xmlns:r="http://schemas.openxmlformats.org/officeDocument/2006/relationships" xmlns:p="http://schemas.openxmlformats.org/presentationml/2006/main">
+  <p:cSld name="Slide 17">
+    <p:bg>
+      <p:bgPr>
+        <a:solidFill>
+          <a:srgbClr val="FFFFFF"/>
+        </a:solidFill>
+      </p:bgPr>
+    </p:bg>
+    <p:spTree>
+      <p:nvGrpSpPr>
+        <p:cNvPr id="1" name=""/>
+        <p:cNvGrpSpPr/>
+        <p:nvPr/>
+      </p:nvGrpSpPr>
+      <p:grpSpPr>
+        <a:xfrm>
+          <a:off x="0" y="0"/>
+          <a:ext cx="0" cy="0"/>
+          <a:chOff x="0" y="0"/>
+          <a:chExt cx="0" cy="0"/>
+        </a:xfrm>
+      </p:grpSpPr>
+      <p:sp>
+        <p:nvSpPr>
+          <p:cNvPr id="2" name="Text 0"/>
+          <p:cNvSpPr txBox="1"/>
+          <p:nvPr/>
+        </p:nvSpPr>
+        <p:spPr>
+          <a:xfrm>
+            <a:off x="566928" y="256032"/>
+            <a:ext cx="9601200" cy="219456"/>
+          </a:xfrm>
+          <a:prstGeom prst="rect">
+            <a:avLst/>
+          </a:prstGeom>
+          <a:noFill/>
+          <a:ln/>
+        </p:spPr>
+        <p:txBody>
+          <a:bodyPr wrap="square" lIns="0" tIns="0" rIns="0" bIns="0" rtlCol="0" anchor="ctr"/>
+          <a:lstStyle/>
+          <a:p>
+            <a:pPr indent="0" marL="0">
+              <a:buNone/>
+            </a:pPr>
+            <a:r>
+              <a:rPr lang="en-US" sz="1050" b="1" spc="140" kern="0" dirty="0">
+                <a:solidFill>
+                  <a:srgbClr val="1C7293"/>
+                </a:solidFill>
+                <a:latin typeface="Calibri" pitchFamily="34" charset="0"/>
+                <a:ea typeface="Calibri" pitchFamily="34" charset="-122"/>
+                <a:cs typeface="Calibri" pitchFamily="34" charset="-120"/>
+              </a:rPr>
               <a:t>METHOD  ·  NOVELTY</a:t>
             </a:r>
             <a:endParaRPr lang="en-US" sz="1050" dirty="0"/>
@@ -15544,7 +17298,7 @@
                 <a:ea typeface="Calibri" pitchFamily="34" charset="-122"/>
                 <a:cs typeface="Calibri" pitchFamily="34" charset="-120"/>
               </a:rPr>
-              <a:t>16 / 25</a:t>
+              <a:t>17 / 26</a:t>
             </a:r>
             <a:endParaRPr lang="en-US" sz="1050" dirty="0"/>
           </a:p>
@@ -15594,7 +17348,7 @@
       </p:sp>
       <p:graphicFrame>
         <p:nvGraphicFramePr>
-          <p:cNvPr id="17" name="Table 0"/>
+          <p:cNvPr id="18" name="Table 0"/>
           <p:cNvGraphicFramePr>
             <a:graphicFrameLocks noGrp="1"/>
           </p:cNvGraphicFramePr>
@@ -17297,9 +19051,9 @@
 </p:sld>
 </file>
 
-<file path=ppt/slides/slide17.xml><?xml version="1.0" encoding="utf-8"?>
+<file path=ppt/slides/slide18.xml><?xml version="1.0" encoding="utf-8"?>
 <p:sld xmlns:a="http://schemas.openxmlformats.org/drawingml/2006/main" xmlns:r="http://schemas.openxmlformats.org/officeDocument/2006/relationships" xmlns:p="http://schemas.openxmlformats.org/presentationml/2006/main">
-  <p:cSld name="Slide 17">
+  <p:cSld name="Slide 18">
     <p:bg>
       <p:bgPr>
         <a:solidFill>
@@ -17833,7 +19587,7 @@
                 <a:ea typeface="Calibri" pitchFamily="34" charset="-122"/>
                 <a:cs typeface="Calibri" pitchFamily="34" charset="-120"/>
               </a:rPr>
-              <a:t>17 / 25</a:t>
+              <a:t>18 / 26</a:t>
             </a:r>
             <a:endParaRPr lang="en-US" sz="1050" dirty="0"/>
           </a:p>
@@ -17841,7 +19595,7 @@
       </p:sp>
       <p:graphicFrame>
         <p:nvGraphicFramePr>
-          <p:cNvPr id="18" name="Table 0"/>
+          <p:cNvPr id="19" name="Table 0"/>
           <p:cNvGraphicFramePr>
             <a:graphicFrameLocks noGrp="1"/>
           </p:cNvGraphicFramePr>
@@ -19608,9 +21362,9 @@
 </p:sld>
 </file>
 
-<file path=ppt/slides/slide18.xml><?xml version="1.0" encoding="utf-8"?>
+<file path=ppt/slides/slide19.xml><?xml version="1.0" encoding="utf-8"?>
 <p:sld xmlns:a="http://schemas.openxmlformats.org/drawingml/2006/main" xmlns:r="http://schemas.openxmlformats.org/officeDocument/2006/relationships" xmlns:p="http://schemas.openxmlformats.org/presentationml/2006/main">
-  <p:cSld name="Slide 18">
+  <p:cSld name="Slide 19">
     <p:bg>
       <p:bgPr>
         <a:solidFill>
@@ -20144,7 +21898,7 @@
                 <a:ea typeface="Calibri" pitchFamily="34" charset="-122"/>
                 <a:cs typeface="Calibri" pitchFamily="34" charset="-120"/>
               </a:rPr>
-              <a:t>18 / 25</a:t>
+              <a:t>19 / 26</a:t>
             </a:r>
             <a:endParaRPr lang="en-US" sz="1050" dirty="0"/>
           </a:p>
@@ -20194,7 +21948,7 @@
       </p:sp>
       <p:graphicFrame>
         <p:nvGraphicFramePr>
-          <p:cNvPr id="19" name="Table 0"/>
+          <p:cNvPr id="20" name="Table 0"/>
           <p:cNvGraphicFramePr>
             <a:graphicFrameLocks noGrp="1"/>
           </p:cNvGraphicFramePr>
@@ -21802,9 +23556,9 @@
 </p:sld>
 </file>
 
-<file path=ppt/slides/slide19.xml><?xml version="1.0" encoding="utf-8"?>
+<file path=ppt/slides/slide2.xml><?xml version="1.0" encoding="utf-8"?>
 <p:sld xmlns:a="http://schemas.openxmlformats.org/drawingml/2006/main" xmlns:r="http://schemas.openxmlformats.org/officeDocument/2006/relationships" xmlns:p="http://schemas.openxmlformats.org/presentationml/2006/main">
-  <p:cSld name="Slide 19">
+  <p:cSld name="Slide 2">
     <p:bg>
       <p:bgPr>
         <a:solidFill>
@@ -21859,6 +23613,1042 @@
                 <a:ea typeface="Calibri" pitchFamily="34" charset="-122"/>
                 <a:cs typeface="Calibri" pitchFamily="34" charset="-120"/>
               </a:rPr>
+              <a:t>WHERE WE ARE GOING</a:t>
+            </a:r>
+            <a:endParaRPr lang="en-US" sz="1050" dirty="0"/>
+          </a:p>
+        </p:txBody>
+      </p:sp>
+      <p:sp>
+        <p:nvSpPr>
+          <p:cNvPr id="3" name="Text 1"/>
+          <p:cNvSpPr txBox="1"/>
+          <p:nvPr/>
+        </p:nvSpPr>
+        <p:spPr>
+          <a:xfrm>
+            <a:off x="566928" y="493776"/>
+            <a:ext cx="11057839" cy="566928"/>
+          </a:xfrm>
+          <a:prstGeom prst="rect">
+            <a:avLst/>
+          </a:prstGeom>
+          <a:noFill/>
+          <a:ln/>
+        </p:spPr>
+        <p:txBody>
+          <a:bodyPr wrap="square" lIns="0" tIns="0" rIns="0" bIns="0" rtlCol="0" anchor="ctr"/>
+          <a:lstStyle/>
+          <a:p>
+            <a:pPr indent="0" marL="0">
+              <a:buNone/>
+            </a:pPr>
+            <a:r>
+              <a:rPr lang="en-US" sz="2700" b="1" dirty="0">
+                <a:solidFill>
+                  <a:srgbClr val="0B3C49"/>
+                </a:solidFill>
+                <a:latin typeface="Cambria" pitchFamily="34" charset="0"/>
+                <a:ea typeface="Cambria" pitchFamily="34" charset="-122"/>
+                <a:cs typeface="Cambria" pitchFamily="34" charset="-120"/>
+              </a:rPr>
+              <a:t>Outline</a:t>
+            </a:r>
+            <a:endParaRPr lang="en-US" sz="2700" dirty="0"/>
+          </a:p>
+        </p:txBody>
+      </p:sp>
+      <p:sp>
+        <p:nvSpPr>
+          <p:cNvPr id="4" name="Text 2"/>
+          <p:cNvSpPr txBox="1"/>
+          <p:nvPr/>
+        </p:nvSpPr>
+        <p:spPr>
+          <a:xfrm>
+            <a:off x="10618927" y="6400800"/>
+            <a:ext cx="1005840" cy="237744"/>
+          </a:xfrm>
+          <a:prstGeom prst="rect">
+            <a:avLst/>
+          </a:prstGeom>
+          <a:noFill/>
+          <a:ln/>
+        </p:spPr>
+        <p:txBody>
+          <a:bodyPr wrap="square" lIns="0" tIns="0" rIns="0" bIns="0" rtlCol="0" anchor="ctr"/>
+          <a:lstStyle/>
+          <a:p>
+            <a:pPr algn="r" indent="0" marL="0">
+              <a:buNone/>
+            </a:pPr>
+            <a:r>
+              <a:rPr lang="en-US" sz="1050" dirty="0">
+                <a:solidFill>
+                  <a:srgbClr val="58626C"/>
+                </a:solidFill>
+                <a:latin typeface="Calibri" pitchFamily="34" charset="0"/>
+                <a:ea typeface="Calibri" pitchFamily="34" charset="-122"/>
+                <a:cs typeface="Calibri" pitchFamily="34" charset="-120"/>
+              </a:rPr>
+              <a:t>2 / 26</a:t>
+            </a:r>
+            <a:endParaRPr lang="en-US" sz="1050" dirty="0"/>
+          </a:p>
+        </p:txBody>
+      </p:sp>
+      <p:sp>
+        <p:nvSpPr>
+          <p:cNvPr id="5" name="Shape 3"/>
+          <p:cNvSpPr/>
+          <p:nvPr/>
+        </p:nvSpPr>
+        <p:spPr>
+          <a:xfrm>
+            <a:off x="566928" y="1399032"/>
+            <a:ext cx="310896" cy="310896"/>
+          </a:xfrm>
+          <a:prstGeom prst="ellipse">
+            <a:avLst/>
+          </a:prstGeom>
+          <a:solidFill>
+            <a:srgbClr val="A62B1F"/>
+          </a:solidFill>
+          <a:ln/>
+        </p:spPr>
+      </p:sp>
+      <p:sp>
+        <p:nvSpPr>
+          <p:cNvPr id="6" name="Text 4"/>
+          <p:cNvSpPr txBox="1"/>
+          <p:nvPr/>
+        </p:nvSpPr>
+        <p:spPr>
+          <a:xfrm>
+            <a:off x="566928" y="1399032"/>
+            <a:ext cx="310896" cy="310896"/>
+          </a:xfrm>
+          <a:prstGeom prst="rect">
+            <a:avLst/>
+          </a:prstGeom>
+          <a:noFill/>
+          <a:ln/>
+        </p:spPr>
+        <p:txBody>
+          <a:bodyPr wrap="square" lIns="0" tIns="0" rIns="0" bIns="0" rtlCol="0" anchor="ctr"/>
+          <a:lstStyle/>
+          <a:p>
+            <a:pPr algn="ctr" indent="0" marL="0">
+              <a:buNone/>
+            </a:pPr>
+            <a:r>
+              <a:rPr lang="en-US" sz="1200" b="1" dirty="0">
+                <a:solidFill>
+                  <a:srgbClr val="FFFFFF"/>
+                </a:solidFill>
+                <a:latin typeface="Calibri" pitchFamily="34" charset="0"/>
+                <a:ea typeface="Calibri" pitchFamily="34" charset="-122"/>
+                <a:cs typeface="Calibri" pitchFamily="34" charset="-120"/>
+              </a:rPr>
+              <a:t>1</a:t>
+            </a:r>
+            <a:endParaRPr lang="en-US" sz="1200" dirty="0"/>
+          </a:p>
+        </p:txBody>
+      </p:sp>
+      <p:sp>
+        <p:nvSpPr>
+          <p:cNvPr id="7" name="Text 5"/>
+          <p:cNvSpPr txBox="1"/>
+          <p:nvPr/>
+        </p:nvSpPr>
+        <p:spPr>
+          <a:xfrm>
+            <a:off x="1024128" y="1371600"/>
+            <a:ext cx="10424160" cy="365760"/>
+          </a:xfrm>
+          <a:prstGeom prst="rect">
+            <a:avLst/>
+          </a:prstGeom>
+          <a:noFill/>
+          <a:ln/>
+        </p:spPr>
+        <p:txBody>
+          <a:bodyPr wrap="square" lIns="0" tIns="0" rIns="0" bIns="0" rtlCol="0" anchor="ctr"/>
+          <a:lstStyle/>
+          <a:p>
+            <a:pPr indent="0" marL="0">
+              <a:buNone/>
+            </a:pPr>
+            <a:r>
+              <a:rPr lang="en-US" sz="1500" b="1" dirty="0">
+                <a:solidFill>
+                  <a:srgbClr val="0B3C49"/>
+                </a:solidFill>
+                <a:latin typeface="Calibri" pitchFamily="34" charset="0"/>
+                <a:ea typeface="Calibri" pitchFamily="34" charset="-122"/>
+                <a:cs typeface="Calibri" pitchFamily="34" charset="-120"/>
+              </a:rPr>
+              <a:t>The problem is geometric   </a:t>
+            </a:r>
+            <a:pPr indent="0" marL="0">
+              <a:buNone/>
+            </a:pPr>
+            <a:r>
+              <a:rPr lang="en-US" sz="1250" dirty="0">
+                <a:solidFill>
+                  <a:srgbClr val="58626C"/>
+                </a:solidFill>
+                <a:latin typeface="Calibri" pitchFamily="34" charset="0"/>
+                <a:ea typeface="Calibri" pitchFamily="34" charset="-122"/>
+                <a:cs typeface="Calibri" pitchFamily="34" charset="-120"/>
+              </a:rPr>
+              <a:t>PAI grade is defined by lesion size</a:t>
+            </a:r>
+            <a:endParaRPr lang="en-US" sz="1500" dirty="0"/>
+          </a:p>
+        </p:txBody>
+      </p:sp>
+      <p:sp>
+        <p:nvSpPr>
+          <p:cNvPr id="8" name="Shape 6"/>
+          <p:cNvSpPr/>
+          <p:nvPr/>
+        </p:nvSpPr>
+        <p:spPr>
+          <a:xfrm>
+            <a:off x="566928" y="1947672"/>
+            <a:ext cx="310896" cy="310896"/>
+          </a:xfrm>
+          <a:prstGeom prst="ellipse">
+            <a:avLst/>
+          </a:prstGeom>
+          <a:solidFill>
+            <a:srgbClr val="A62B1F"/>
+          </a:solidFill>
+          <a:ln/>
+        </p:spPr>
+      </p:sp>
+      <p:sp>
+        <p:nvSpPr>
+          <p:cNvPr id="9" name="Text 7"/>
+          <p:cNvSpPr txBox="1"/>
+          <p:nvPr/>
+        </p:nvSpPr>
+        <p:spPr>
+          <a:xfrm>
+            <a:off x="566928" y="1947672"/>
+            <a:ext cx="310896" cy="310896"/>
+          </a:xfrm>
+          <a:prstGeom prst="rect">
+            <a:avLst/>
+          </a:prstGeom>
+          <a:noFill/>
+          <a:ln/>
+        </p:spPr>
+        <p:txBody>
+          <a:bodyPr wrap="square" lIns="0" tIns="0" rIns="0" bIns="0" rtlCol="0" anchor="ctr"/>
+          <a:lstStyle/>
+          <a:p>
+            <a:pPr algn="ctr" indent="0" marL="0">
+              <a:buNone/>
+            </a:pPr>
+            <a:r>
+              <a:rPr lang="en-US" sz="1200" b="1" dirty="0">
+                <a:solidFill>
+                  <a:srgbClr val="FFFFFF"/>
+                </a:solidFill>
+                <a:latin typeface="Calibri" pitchFamily="34" charset="0"/>
+                <a:ea typeface="Calibri" pitchFamily="34" charset="-122"/>
+                <a:cs typeface="Calibri" pitchFamily="34" charset="-120"/>
+              </a:rPr>
+              <a:t>2</a:t>
+            </a:r>
+            <a:endParaRPr lang="en-US" sz="1200" dirty="0"/>
+          </a:p>
+        </p:txBody>
+      </p:sp>
+      <p:sp>
+        <p:nvSpPr>
+          <p:cNvPr id="10" name="Text 8"/>
+          <p:cNvSpPr txBox="1"/>
+          <p:nvPr/>
+        </p:nvSpPr>
+        <p:spPr>
+          <a:xfrm>
+            <a:off x="1024128" y="1920240"/>
+            <a:ext cx="10424160" cy="365760"/>
+          </a:xfrm>
+          <a:prstGeom prst="rect">
+            <a:avLst/>
+          </a:prstGeom>
+          <a:noFill/>
+          <a:ln/>
+        </p:spPr>
+        <p:txBody>
+          <a:bodyPr wrap="square" lIns="0" tIns="0" rIns="0" bIns="0" rtlCol="0" anchor="ctr"/>
+          <a:lstStyle/>
+          <a:p>
+            <a:pPr indent="0" marL="0">
+              <a:buNone/>
+            </a:pPr>
+            <a:r>
+              <a:rPr lang="en-US" sz="1500" b="1" dirty="0">
+                <a:solidFill>
+                  <a:srgbClr val="0B3C49"/>
+                </a:solidFill>
+                <a:latin typeface="Calibri" pitchFamily="34" charset="0"/>
+                <a:ea typeface="Calibri" pitchFamily="34" charset="-122"/>
+                <a:cs typeface="Calibri" pitchFamily="34" charset="-120"/>
+              </a:rPr>
+              <a:t>Therefore: bag-size bias   </a:t>
+            </a:r>
+            <a:pPr indent="0" marL="0">
+              <a:buNone/>
+            </a:pPr>
+            <a:r>
+              <a:rPr lang="en-US" sz="1250" dirty="0">
+                <a:solidFill>
+                  <a:srgbClr val="58626C"/>
+                </a:solidFill>
+                <a:latin typeface="Calibri" pitchFamily="34" charset="0"/>
+                <a:ea typeface="Calibri" pitchFamily="34" charset="-122"/>
+                <a:cs typeface="Calibri" pitchFamily="34" charset="-120"/>
+              </a:rPr>
+              <a:t>The assignment's protocol lets the label leak through token count</a:t>
+            </a:r>
+            <a:endParaRPr lang="en-US" sz="1500" dirty="0"/>
+          </a:p>
+        </p:txBody>
+      </p:sp>
+      <p:sp>
+        <p:nvSpPr>
+          <p:cNvPr id="11" name="Shape 9"/>
+          <p:cNvSpPr/>
+          <p:nvPr/>
+        </p:nvSpPr>
+        <p:spPr>
+          <a:xfrm>
+            <a:off x="566928" y="2496312"/>
+            <a:ext cx="310896" cy="310896"/>
+          </a:xfrm>
+          <a:prstGeom prst="ellipse">
+            <a:avLst/>
+          </a:prstGeom>
+          <a:solidFill>
+            <a:srgbClr val="1F6F43"/>
+          </a:solidFill>
+          <a:ln/>
+        </p:spPr>
+      </p:sp>
+      <p:sp>
+        <p:nvSpPr>
+          <p:cNvPr id="12" name="Text 10"/>
+          <p:cNvSpPr txBox="1"/>
+          <p:nvPr/>
+        </p:nvSpPr>
+        <p:spPr>
+          <a:xfrm>
+            <a:off x="566928" y="2496312"/>
+            <a:ext cx="310896" cy="310896"/>
+          </a:xfrm>
+          <a:prstGeom prst="rect">
+            <a:avLst/>
+          </a:prstGeom>
+          <a:noFill/>
+          <a:ln/>
+        </p:spPr>
+        <p:txBody>
+          <a:bodyPr wrap="square" lIns="0" tIns="0" rIns="0" bIns="0" rtlCol="0" anchor="ctr"/>
+          <a:lstStyle/>
+          <a:p>
+            <a:pPr algn="ctr" indent="0" marL="0">
+              <a:buNone/>
+            </a:pPr>
+            <a:r>
+              <a:rPr lang="en-US" sz="1200" b="1" dirty="0">
+                <a:solidFill>
+                  <a:srgbClr val="FFFFFF"/>
+                </a:solidFill>
+                <a:latin typeface="Calibri" pitchFamily="34" charset="0"/>
+                <a:ea typeface="Calibri" pitchFamily="34" charset="-122"/>
+                <a:cs typeface="Calibri" pitchFamily="34" charset="-120"/>
+              </a:rPr>
+              <a:t>3</a:t>
+            </a:r>
+            <a:endParaRPr lang="en-US" sz="1200" dirty="0"/>
+          </a:p>
+        </p:txBody>
+      </p:sp>
+      <p:sp>
+        <p:nvSpPr>
+          <p:cNvPr id="13" name="Text 11"/>
+          <p:cNvSpPr txBox="1"/>
+          <p:nvPr/>
+        </p:nvSpPr>
+        <p:spPr>
+          <a:xfrm>
+            <a:off x="1024128" y="2468880"/>
+            <a:ext cx="10424160" cy="365760"/>
+          </a:xfrm>
+          <a:prstGeom prst="rect">
+            <a:avLst/>
+          </a:prstGeom>
+          <a:noFill/>
+          <a:ln/>
+        </p:spPr>
+        <p:txBody>
+          <a:bodyPr wrap="square" lIns="0" tIns="0" rIns="0" bIns="0" rtlCol="0" anchor="ctr"/>
+          <a:lstStyle/>
+          <a:p>
+            <a:pPr indent="0" marL="0">
+              <a:buNone/>
+            </a:pPr>
+            <a:r>
+              <a:rPr lang="en-US" sz="1500" b="1" dirty="0">
+                <a:solidFill>
+                  <a:srgbClr val="0B3C49"/>
+                </a:solidFill>
+                <a:latin typeface="Calibri" pitchFamily="34" charset="0"/>
+                <a:ea typeface="Calibri" pitchFamily="34" charset="-122"/>
+                <a:cs typeface="Calibri" pitchFamily="34" charset="-120"/>
+              </a:rPr>
+              <a:t>Removing the bias   </a:t>
+            </a:r>
+            <a:pPr indent="0" marL="0">
+              <a:buNone/>
+            </a:pPr>
+            <a:r>
+              <a:rPr lang="en-US" sz="1250" dirty="0">
+                <a:solidFill>
+                  <a:srgbClr val="58626C"/>
+                </a:solidFill>
+                <a:latin typeface="Calibri" pitchFamily="34" charset="0"/>
+                <a:ea typeface="Calibri" pitchFamily="34" charset="-122"/>
+                <a:cs typeface="Calibri" pitchFamily="34" charset="-120"/>
+              </a:rPr>
+              <a:t>Fixed-count protocol + a two-factor control</a:t>
+            </a:r>
+            <a:endParaRPr lang="en-US" sz="1500" dirty="0"/>
+          </a:p>
+        </p:txBody>
+      </p:sp>
+      <p:sp>
+        <p:nvSpPr>
+          <p:cNvPr id="14" name="Shape 12"/>
+          <p:cNvSpPr/>
+          <p:nvPr/>
+        </p:nvSpPr>
+        <p:spPr>
+          <a:xfrm>
+            <a:off x="566928" y="3044952"/>
+            <a:ext cx="310896" cy="310896"/>
+          </a:xfrm>
+          <a:prstGeom prst="ellipse">
+            <a:avLst/>
+          </a:prstGeom>
+          <a:solidFill>
+            <a:srgbClr val="1C7293"/>
+          </a:solidFill>
+          <a:ln/>
+        </p:spPr>
+      </p:sp>
+      <p:sp>
+        <p:nvSpPr>
+          <p:cNvPr id="15" name="Text 13"/>
+          <p:cNvSpPr txBox="1"/>
+          <p:nvPr/>
+        </p:nvSpPr>
+        <p:spPr>
+          <a:xfrm>
+            <a:off x="566928" y="3044952"/>
+            <a:ext cx="310896" cy="310896"/>
+          </a:xfrm>
+          <a:prstGeom prst="rect">
+            <a:avLst/>
+          </a:prstGeom>
+          <a:noFill/>
+          <a:ln/>
+        </p:spPr>
+        <p:txBody>
+          <a:bodyPr wrap="square" lIns="0" tIns="0" rIns="0" bIns="0" rtlCol="0" anchor="ctr"/>
+          <a:lstStyle/>
+          <a:p>
+            <a:pPr algn="ctr" indent="0" marL="0">
+              <a:buNone/>
+            </a:pPr>
+            <a:r>
+              <a:rPr lang="en-US" sz="1200" b="1" dirty="0">
+                <a:solidFill>
+                  <a:srgbClr val="FFFFFF"/>
+                </a:solidFill>
+                <a:latin typeface="Calibri" pitchFamily="34" charset="0"/>
+                <a:ea typeface="Calibri" pitchFamily="34" charset="-122"/>
+                <a:cs typeface="Calibri" pitchFamily="34" charset="-120"/>
+              </a:rPr>
+              <a:t>4</a:t>
+            </a:r>
+            <a:endParaRPr lang="en-US" sz="1200" dirty="0"/>
+          </a:p>
+        </p:txBody>
+      </p:sp>
+      <p:sp>
+        <p:nvSpPr>
+          <p:cNvPr id="16" name="Text 14"/>
+          <p:cNvSpPr txBox="1"/>
+          <p:nvPr/>
+        </p:nvSpPr>
+        <p:spPr>
+          <a:xfrm>
+            <a:off x="1024128" y="3017520"/>
+            <a:ext cx="10424160" cy="365760"/>
+          </a:xfrm>
+          <a:prstGeom prst="rect">
+            <a:avLst/>
+          </a:prstGeom>
+          <a:noFill/>
+          <a:ln/>
+        </p:spPr>
+        <p:txBody>
+          <a:bodyPr wrap="square" lIns="0" tIns="0" rIns="0" bIns="0" rtlCol="0" anchor="ctr"/>
+          <a:lstStyle/>
+          <a:p>
+            <a:pPr indent="0" marL="0">
+              <a:buNone/>
+            </a:pPr>
+            <a:r>
+              <a:rPr lang="en-US" sz="1500" b="1" dirty="0">
+                <a:solidFill>
+                  <a:srgbClr val="0B3C49"/>
+                </a:solidFill>
+                <a:latin typeface="Calibri" pitchFamily="34" charset="0"/>
+                <a:ea typeface="Calibri" pitchFamily="34" charset="-122"/>
+                <a:cs typeface="Calibri" pitchFamily="34" charset="-120"/>
+              </a:rPr>
+              <a:t>Classification heads   </a:t>
+            </a:r>
+            <a:pPr indent="0" marL="0">
+              <a:buNone/>
+            </a:pPr>
+            <a:r>
+              <a:rPr lang="en-US" sz="1250" dirty="0">
+                <a:solidFill>
+                  <a:srgbClr val="58626C"/>
+                </a:solidFill>
+                <a:latin typeface="Calibri" pitchFamily="34" charset="0"/>
+                <a:ea typeface="Calibri" pitchFamily="34" charset="-122"/>
+                <a:cs typeface="Calibri" pitchFamily="34" charset="-120"/>
+              </a:rPr>
+              <a:t>Flat, attention pooling, instance-level MIL</a:t>
+            </a:r>
+            <a:endParaRPr lang="en-US" sz="1500" dirty="0"/>
+          </a:p>
+        </p:txBody>
+      </p:sp>
+      <p:sp>
+        <p:nvSpPr>
+          <p:cNvPr id="17" name="Shape 15"/>
+          <p:cNvSpPr/>
+          <p:nvPr/>
+        </p:nvSpPr>
+        <p:spPr>
+          <a:xfrm>
+            <a:off x="566928" y="3593592"/>
+            <a:ext cx="310896" cy="310896"/>
+          </a:xfrm>
+          <a:prstGeom prst="ellipse">
+            <a:avLst/>
+          </a:prstGeom>
+          <a:solidFill>
+            <a:srgbClr val="1C7293"/>
+          </a:solidFill>
+          <a:ln/>
+        </p:spPr>
+      </p:sp>
+      <p:sp>
+        <p:nvSpPr>
+          <p:cNvPr id="18" name="Text 16"/>
+          <p:cNvSpPr txBox="1"/>
+          <p:nvPr/>
+        </p:nvSpPr>
+        <p:spPr>
+          <a:xfrm>
+            <a:off x="566928" y="3593592"/>
+            <a:ext cx="310896" cy="310896"/>
+          </a:xfrm>
+          <a:prstGeom prst="rect">
+            <a:avLst/>
+          </a:prstGeom>
+          <a:noFill/>
+          <a:ln/>
+        </p:spPr>
+        <p:txBody>
+          <a:bodyPr wrap="square" lIns="0" tIns="0" rIns="0" bIns="0" rtlCol="0" anchor="ctr"/>
+          <a:lstStyle/>
+          <a:p>
+            <a:pPr algn="ctr" indent="0" marL="0">
+              <a:buNone/>
+            </a:pPr>
+            <a:r>
+              <a:rPr lang="en-US" sz="1200" b="1" dirty="0">
+                <a:solidFill>
+                  <a:srgbClr val="FFFFFF"/>
+                </a:solidFill>
+                <a:latin typeface="Calibri" pitchFamily="34" charset="0"/>
+                <a:ea typeface="Calibri" pitchFamily="34" charset="-122"/>
+                <a:cs typeface="Calibri" pitchFamily="34" charset="-120"/>
+              </a:rPr>
+              <a:t>5</a:t>
+            </a:r>
+            <a:endParaRPr lang="en-US" sz="1200" dirty="0"/>
+          </a:p>
+        </p:txBody>
+      </p:sp>
+      <p:sp>
+        <p:nvSpPr>
+          <p:cNvPr id="19" name="Text 17"/>
+          <p:cNvSpPr txBox="1"/>
+          <p:nvPr/>
+        </p:nvSpPr>
+        <p:spPr>
+          <a:xfrm>
+            <a:off x="1024128" y="3566160"/>
+            <a:ext cx="10424160" cy="365760"/>
+          </a:xfrm>
+          <a:prstGeom prst="rect">
+            <a:avLst/>
+          </a:prstGeom>
+          <a:noFill/>
+          <a:ln/>
+        </p:spPr>
+        <p:txBody>
+          <a:bodyPr wrap="square" lIns="0" tIns="0" rIns="0" bIns="0" rtlCol="0" anchor="ctr"/>
+          <a:lstStyle/>
+          <a:p>
+            <a:pPr indent="0" marL="0">
+              <a:buNone/>
+            </a:pPr>
+            <a:r>
+              <a:rPr lang="en-US" sz="1500" b="1" dirty="0">
+                <a:solidFill>
+                  <a:srgbClr val="0B3C49"/>
+                </a:solidFill>
+                <a:latin typeface="Calibri" pitchFamily="34" charset="0"/>
+                <a:ea typeface="Calibri" pitchFamily="34" charset="-122"/>
+                <a:cs typeface="Calibri" pitchFamily="34" charset="-120"/>
+              </a:rPr>
+              <a:t>Our novelty   </a:t>
+            </a:r>
+            <a:pPr indent="0" marL="0">
+              <a:buNone/>
+            </a:pPr>
+            <a:r>
+              <a:rPr lang="en-US" sz="1250" dirty="0">
+                <a:solidFill>
+                  <a:srgbClr val="58626C"/>
+                </a:solidFill>
+                <a:latin typeface="Calibri" pitchFamily="34" charset="0"/>
+                <a:ea typeface="Calibri" pitchFamily="34" charset="-122"/>
+                <a:cs typeface="Calibri" pitchFamily="34" charset="-120"/>
+              </a:rPr>
+              <a:t>Balanced token sampling — rebalancing inside latent space</a:t>
+            </a:r>
+            <a:endParaRPr lang="en-US" sz="1500" dirty="0"/>
+          </a:p>
+        </p:txBody>
+      </p:sp>
+      <p:sp>
+        <p:nvSpPr>
+          <p:cNvPr id="20" name="Shape 18"/>
+          <p:cNvSpPr/>
+          <p:nvPr/>
+        </p:nvSpPr>
+        <p:spPr>
+          <a:xfrm>
+            <a:off x="566928" y="4142232"/>
+            <a:ext cx="310896" cy="310896"/>
+          </a:xfrm>
+          <a:prstGeom prst="ellipse">
+            <a:avLst/>
+          </a:prstGeom>
+          <a:solidFill>
+            <a:srgbClr val="1F6F43"/>
+          </a:solidFill>
+          <a:ln/>
+        </p:spPr>
+      </p:sp>
+      <p:sp>
+        <p:nvSpPr>
+          <p:cNvPr id="21" name="Text 19"/>
+          <p:cNvSpPr txBox="1"/>
+          <p:nvPr/>
+        </p:nvSpPr>
+        <p:spPr>
+          <a:xfrm>
+            <a:off x="566928" y="4142232"/>
+            <a:ext cx="310896" cy="310896"/>
+          </a:xfrm>
+          <a:prstGeom prst="rect">
+            <a:avLst/>
+          </a:prstGeom>
+          <a:noFill/>
+          <a:ln/>
+        </p:spPr>
+        <p:txBody>
+          <a:bodyPr wrap="square" lIns="0" tIns="0" rIns="0" bIns="0" rtlCol="0" anchor="ctr"/>
+          <a:lstStyle/>
+          <a:p>
+            <a:pPr algn="ctr" indent="0" marL="0">
+              <a:buNone/>
+            </a:pPr>
+            <a:r>
+              <a:rPr lang="en-US" sz="1200" b="1" dirty="0">
+                <a:solidFill>
+                  <a:srgbClr val="FFFFFF"/>
+                </a:solidFill>
+                <a:latin typeface="Calibri" pitchFamily="34" charset="0"/>
+                <a:ea typeface="Calibri" pitchFamily="34" charset="-122"/>
+                <a:cs typeface="Calibri" pitchFamily="34" charset="-120"/>
+              </a:rPr>
+              <a:t>6</a:t>
+            </a:r>
+            <a:endParaRPr lang="en-US" sz="1200" dirty="0"/>
+          </a:p>
+        </p:txBody>
+      </p:sp>
+      <p:sp>
+        <p:nvSpPr>
+          <p:cNvPr id="22" name="Text 20"/>
+          <p:cNvSpPr txBox="1"/>
+          <p:nvPr/>
+        </p:nvSpPr>
+        <p:spPr>
+          <a:xfrm>
+            <a:off x="1024128" y="4114800"/>
+            <a:ext cx="10424160" cy="365760"/>
+          </a:xfrm>
+          <a:prstGeom prst="rect">
+            <a:avLst/>
+          </a:prstGeom>
+          <a:noFill/>
+          <a:ln/>
+        </p:spPr>
+        <p:txBody>
+          <a:bodyPr wrap="square" lIns="0" tIns="0" rIns="0" bIns="0" rtlCol="0" anchor="ctr"/>
+          <a:lstStyle/>
+          <a:p>
+            <a:pPr indent="0" marL="0">
+              <a:buNone/>
+            </a:pPr>
+            <a:r>
+              <a:rPr lang="en-US" sz="1500" b="1" dirty="0">
+                <a:solidFill>
+                  <a:srgbClr val="0B3C49"/>
+                </a:solidFill>
+                <a:latin typeface="Calibri" pitchFamily="34" charset="0"/>
+                <a:ea typeface="Calibri" pitchFamily="34" charset="-122"/>
+                <a:cs typeface="Calibri" pitchFamily="34" charset="-120"/>
+              </a:rPr>
+              <a:t>Results   </a:t>
+            </a:r>
+            <a:pPr indent="0" marL="0">
+              <a:buNone/>
+            </a:pPr>
+            <a:r>
+              <a:rPr lang="en-US" sz="1250" dirty="0">
+                <a:solidFill>
+                  <a:srgbClr val="58626C"/>
+                </a:solidFill>
+                <a:latin typeface="Calibri" pitchFamily="34" charset="0"/>
+                <a:ea typeface="Calibri" pitchFamily="34" charset="-122"/>
+                <a:cs typeface="Calibri" pitchFamily="34" charset="-120"/>
+              </a:rPr>
+              <a:t>What the frozen encoder is actually worth</a:t>
+            </a:r>
+            <a:endParaRPr lang="en-US" sz="1500" dirty="0"/>
+          </a:p>
+        </p:txBody>
+      </p:sp>
+      <p:sp>
+        <p:nvSpPr>
+          <p:cNvPr id="23" name="Shape 21"/>
+          <p:cNvSpPr/>
+          <p:nvPr/>
+        </p:nvSpPr>
+        <p:spPr>
+          <a:xfrm>
+            <a:off x="566928" y="4690872"/>
+            <a:ext cx="310896" cy="310896"/>
+          </a:xfrm>
+          <a:prstGeom prst="ellipse">
+            <a:avLst/>
+          </a:prstGeom>
+          <a:solidFill>
+            <a:srgbClr val="0B3C49"/>
+          </a:solidFill>
+          <a:ln/>
+        </p:spPr>
+      </p:sp>
+      <p:sp>
+        <p:nvSpPr>
+          <p:cNvPr id="24" name="Text 22"/>
+          <p:cNvSpPr txBox="1"/>
+          <p:nvPr/>
+        </p:nvSpPr>
+        <p:spPr>
+          <a:xfrm>
+            <a:off x="566928" y="4690872"/>
+            <a:ext cx="310896" cy="310896"/>
+          </a:xfrm>
+          <a:prstGeom prst="rect">
+            <a:avLst/>
+          </a:prstGeom>
+          <a:noFill/>
+          <a:ln/>
+        </p:spPr>
+        <p:txBody>
+          <a:bodyPr wrap="square" lIns="0" tIns="0" rIns="0" bIns="0" rtlCol="0" anchor="ctr"/>
+          <a:lstStyle/>
+          <a:p>
+            <a:pPr algn="ctr" indent="0" marL="0">
+              <a:buNone/>
+            </a:pPr>
+            <a:r>
+              <a:rPr lang="en-US" sz="1200" b="1" dirty="0">
+                <a:solidFill>
+                  <a:srgbClr val="FFFFFF"/>
+                </a:solidFill>
+                <a:latin typeface="Calibri" pitchFamily="34" charset="0"/>
+                <a:ea typeface="Calibri" pitchFamily="34" charset="-122"/>
+                <a:cs typeface="Calibri" pitchFamily="34" charset="-120"/>
+              </a:rPr>
+              <a:t>7</a:t>
+            </a:r>
+            <a:endParaRPr lang="en-US" sz="1200" dirty="0"/>
+          </a:p>
+        </p:txBody>
+      </p:sp>
+      <p:sp>
+        <p:nvSpPr>
+          <p:cNvPr id="25" name="Text 23"/>
+          <p:cNvSpPr txBox="1"/>
+          <p:nvPr/>
+        </p:nvSpPr>
+        <p:spPr>
+          <a:xfrm>
+            <a:off x="1024128" y="4663440"/>
+            <a:ext cx="10424160" cy="365760"/>
+          </a:xfrm>
+          <a:prstGeom prst="rect">
+            <a:avLst/>
+          </a:prstGeom>
+          <a:noFill/>
+          <a:ln/>
+        </p:spPr>
+        <p:txBody>
+          <a:bodyPr wrap="square" lIns="0" tIns="0" rIns="0" bIns="0" rtlCol="0" anchor="ctr"/>
+          <a:lstStyle/>
+          <a:p>
+            <a:pPr indent="0" marL="0">
+              <a:buNone/>
+            </a:pPr>
+            <a:r>
+              <a:rPr lang="en-US" sz="1500" b="1" dirty="0">
+                <a:solidFill>
+                  <a:srgbClr val="0B3C49"/>
+                </a:solidFill>
+                <a:latin typeface="Calibri" pitchFamily="34" charset="0"/>
+                <a:ea typeface="Calibri" pitchFamily="34" charset="-122"/>
+                <a:cs typeface="Calibri" pitchFamily="34" charset="-120"/>
+              </a:rPr>
+              <a:t>Conclusions   </a:t>
+            </a:r>
+            <a:pPr indent="0" marL="0">
+              <a:buNone/>
+            </a:pPr>
+            <a:r>
+              <a:rPr lang="en-US" sz="1250" dirty="0">
+                <a:solidFill>
+                  <a:srgbClr val="58626C"/>
+                </a:solidFill>
+                <a:latin typeface="Calibri" pitchFamily="34" charset="0"/>
+                <a:ea typeface="Calibri" pitchFamily="34" charset="-122"/>
+                <a:cs typeface="Calibri" pitchFamily="34" charset="-120"/>
+              </a:rPr>
+              <a:t>Findings, declared limits, future work</a:t>
+            </a:r>
+            <a:endParaRPr lang="en-US" sz="1500" dirty="0"/>
+          </a:p>
+        </p:txBody>
+      </p:sp>
+      <p:sp>
+        <p:nvSpPr>
+          <p:cNvPr id="26" name="Shape 24"/>
+          <p:cNvSpPr/>
+          <p:nvPr/>
+        </p:nvSpPr>
+        <p:spPr>
+          <a:xfrm>
+            <a:off x="566928" y="5349240"/>
+            <a:ext cx="11057839" cy="914400"/>
+          </a:xfrm>
+          <a:prstGeom prst="roundRect">
+            <a:avLst>
+              <a:gd name="adj" fmla="val 7000"/>
+            </a:avLst>
+          </a:prstGeom>
+          <a:solidFill>
+            <a:srgbClr val="F1F4F6"/>
+          </a:solidFill>
+          <a:ln/>
+        </p:spPr>
+      </p:sp>
+      <p:sp>
+        <p:nvSpPr>
+          <p:cNvPr id="27" name="Text 25"/>
+          <p:cNvSpPr txBox="1"/>
+          <p:nvPr/>
+        </p:nvSpPr>
+        <p:spPr>
+          <a:xfrm>
+            <a:off x="749808" y="5477256"/>
+            <a:ext cx="10692079" cy="274320"/>
+          </a:xfrm>
+          <a:prstGeom prst="rect">
+            <a:avLst/>
+          </a:prstGeom>
+          <a:noFill/>
+          <a:ln/>
+        </p:spPr>
+        <p:txBody>
+          <a:bodyPr wrap="square" lIns="0" tIns="0" rIns="0" bIns="0" rtlCol="0" anchor="ctr"/>
+          <a:lstStyle/>
+          <a:p>
+            <a:pPr indent="0" marL="0">
+              <a:buNone/>
+            </a:pPr>
+            <a:r>
+              <a:rPr lang="en-US" sz="1450" b="1" dirty="0">
+                <a:solidFill>
+                  <a:srgbClr val="0B3C49"/>
+                </a:solidFill>
+                <a:latin typeface="Cambria" pitchFamily="34" charset="0"/>
+                <a:ea typeface="Cambria" pitchFamily="34" charset="-122"/>
+                <a:cs typeface="Cambria" pitchFamily="34" charset="-120"/>
+              </a:rPr>
+              <a:t>How to read every result slide</a:t>
+            </a:r>
+            <a:endParaRPr lang="en-US" sz="1450" dirty="0"/>
+          </a:p>
+        </p:txBody>
+      </p:sp>
+      <p:sp>
+        <p:nvSpPr>
+          <p:cNvPr id="28" name="Text 26"/>
+          <p:cNvSpPr txBox="1"/>
+          <p:nvPr/>
+        </p:nvSpPr>
+        <p:spPr>
+          <a:xfrm>
+            <a:off x="749808" y="5806440"/>
+            <a:ext cx="10692079" cy="292608"/>
+          </a:xfrm>
+          <a:prstGeom prst="rect">
+            <a:avLst/>
+          </a:prstGeom>
+          <a:noFill/>
+          <a:ln/>
+        </p:spPr>
+        <p:txBody>
+          <a:bodyPr wrap="square" lIns="0" tIns="0" rIns="0" bIns="0" rtlCol="0" anchor="ctr"/>
+          <a:lstStyle/>
+          <a:p>
+            <a:pPr indent="0" marL="0">
+              <a:lnSpc>
+                <a:spcPts val="1800"/>
+              </a:lnSpc>
+              <a:buNone/>
+            </a:pPr>
+            <a:r>
+              <a:rPr lang="en-US" sz="1200" dirty="0">
+                <a:solidFill>
+                  <a:srgbClr val="111418"/>
+                </a:solidFill>
+                <a:latin typeface="Calibri" pitchFamily="34" charset="0"/>
+                <a:ea typeface="Calibri" pitchFamily="34" charset="-122"/>
+                <a:cs typeface="Calibri" pitchFamily="34" charset="-120"/>
+              </a:rPr>
+              <a:t>Each analytical slide opens with the same strip: which MODEL, what it is COMPARED WITH, under which PROTOCOL, on which METRIC. Nine protocols and four related metrics appear in this work — the strip tells you at a glance which pair you are looking at.</a:t>
+            </a:r>
+            <a:endParaRPr lang="en-US" sz="1200" dirty="0"/>
+          </a:p>
+        </p:txBody>
+      </p:sp>
+    </p:spTree>
+  </p:cSld>
+  <p:clrMapOvr>
+    <a:masterClrMapping/>
+  </p:clrMapOvr>
+</p:sld>
+</file>
+
+<file path=ppt/slides/slide20.xml><?xml version="1.0" encoding="utf-8"?>
+<p:sld xmlns:a="http://schemas.openxmlformats.org/drawingml/2006/main" xmlns:r="http://schemas.openxmlformats.org/officeDocument/2006/relationships" xmlns:p="http://schemas.openxmlformats.org/presentationml/2006/main">
+  <p:cSld name="Slide 20">
+    <p:bg>
+      <p:bgPr>
+        <a:solidFill>
+          <a:srgbClr val="FFFFFF"/>
+        </a:solidFill>
+      </p:bgPr>
+    </p:bg>
+    <p:spTree>
+      <p:nvGrpSpPr>
+        <p:cNvPr id="1" name=""/>
+        <p:cNvGrpSpPr/>
+        <p:nvPr/>
+      </p:nvGrpSpPr>
+      <p:grpSpPr>
+        <a:xfrm>
+          <a:off x="0" y="0"/>
+          <a:ext cx="0" cy="0"/>
+          <a:chOff x="0" y="0"/>
+          <a:chExt cx="0" cy="0"/>
+        </a:xfrm>
+      </p:grpSpPr>
+      <p:sp>
+        <p:nvSpPr>
+          <p:cNvPr id="2" name="Text 0"/>
+          <p:cNvSpPr txBox="1"/>
+          <p:nvPr/>
+        </p:nvSpPr>
+        <p:spPr>
+          <a:xfrm>
+            <a:off x="566928" y="256032"/>
+            <a:ext cx="9601200" cy="219456"/>
+          </a:xfrm>
+          <a:prstGeom prst="rect">
+            <a:avLst/>
+          </a:prstGeom>
+          <a:noFill/>
+          <a:ln/>
+        </p:spPr>
+        <p:txBody>
+          <a:bodyPr wrap="square" lIns="0" tIns="0" rIns="0" bIns="0" rtlCol="0" anchor="ctr"/>
+          <a:lstStyle/>
+          <a:p>
+            <a:pPr indent="0" marL="0">
+              <a:buNone/>
+            </a:pPr>
+            <a:r>
+              <a:rPr lang="en-US" sz="1050" b="1" spc="140" kern="0" dirty="0">
+                <a:solidFill>
+                  <a:srgbClr val="1C7293"/>
+                </a:solidFill>
+                <a:latin typeface="Calibri" pitchFamily="34" charset="0"/>
+                <a:ea typeface="Calibri" pitchFamily="34" charset="-122"/>
+                <a:cs typeface="Calibri" pitchFamily="34" charset="-120"/>
+              </a:rPr>
               <a:t>RESULTS  ·  OBJECTIVE 2</a:t>
             </a:r>
             <a:endParaRPr lang="en-US" sz="1050" dirty="0"/>
@@ -22338,7 +25128,7 @@
                 <a:ea typeface="Calibri" pitchFamily="34" charset="-122"/>
                 <a:cs typeface="Calibri" pitchFamily="34" charset="-120"/>
               </a:rPr>
-              <a:t>19 / 25</a:t>
+              <a:t>20 / 26</a:t>
             </a:r>
             <a:endParaRPr lang="en-US" sz="1050" dirty="0"/>
           </a:p>
@@ -22401,7 +25191,7 @@
       </p:sp>
       <p:graphicFrame>
         <p:nvGraphicFramePr>
-          <p:cNvPr id="20" name="Table 0"/>
+          <p:cNvPr id="21" name="Table 0"/>
           <p:cNvGraphicFramePr>
             <a:graphicFrameLocks noGrp="1"/>
           </p:cNvGraphicFramePr>
@@ -23732,9 +26522,9 @@
 </p:sld>
 </file>
 
-<file path=ppt/slides/slide2.xml><?xml version="1.0" encoding="utf-8"?>
+<file path=ppt/slides/slide21.xml><?xml version="1.0" encoding="utf-8"?>
 <p:sld xmlns:a="http://schemas.openxmlformats.org/drawingml/2006/main" xmlns:r="http://schemas.openxmlformats.org/officeDocument/2006/relationships" xmlns:p="http://schemas.openxmlformats.org/presentationml/2006/main">
-  <p:cSld name="Slide 2">
+  <p:cSld name="Slide 21">
     <p:bg>
       <p:bgPr>
         <a:solidFill>
@@ -23789,1042 +26579,6 @@
                 <a:ea typeface="Calibri" pitchFamily="34" charset="-122"/>
                 <a:cs typeface="Calibri" pitchFamily="34" charset="-120"/>
               </a:rPr>
-              <a:t>WHERE WE ARE GOING</a:t>
-            </a:r>
-            <a:endParaRPr lang="en-US" sz="1050" dirty="0"/>
-          </a:p>
-        </p:txBody>
-      </p:sp>
-      <p:sp>
-        <p:nvSpPr>
-          <p:cNvPr id="3" name="Text 1"/>
-          <p:cNvSpPr txBox="1"/>
-          <p:nvPr/>
-        </p:nvSpPr>
-        <p:spPr>
-          <a:xfrm>
-            <a:off x="566928" y="493776"/>
-            <a:ext cx="11057839" cy="566928"/>
-          </a:xfrm>
-          <a:prstGeom prst="rect">
-            <a:avLst/>
-          </a:prstGeom>
-          <a:noFill/>
-          <a:ln/>
-        </p:spPr>
-        <p:txBody>
-          <a:bodyPr wrap="square" lIns="0" tIns="0" rIns="0" bIns="0" rtlCol="0" anchor="ctr"/>
-          <a:lstStyle/>
-          <a:p>
-            <a:pPr indent="0" marL="0">
-              <a:buNone/>
-            </a:pPr>
-            <a:r>
-              <a:rPr lang="en-US" sz="2700" b="1" dirty="0">
-                <a:solidFill>
-                  <a:srgbClr val="0B3C49"/>
-                </a:solidFill>
-                <a:latin typeface="Cambria" pitchFamily="34" charset="0"/>
-                <a:ea typeface="Cambria" pitchFamily="34" charset="-122"/>
-                <a:cs typeface="Cambria" pitchFamily="34" charset="-120"/>
-              </a:rPr>
-              <a:t>Outline</a:t>
-            </a:r>
-            <a:endParaRPr lang="en-US" sz="2700" dirty="0"/>
-          </a:p>
-        </p:txBody>
-      </p:sp>
-      <p:sp>
-        <p:nvSpPr>
-          <p:cNvPr id="4" name="Text 2"/>
-          <p:cNvSpPr txBox="1"/>
-          <p:nvPr/>
-        </p:nvSpPr>
-        <p:spPr>
-          <a:xfrm>
-            <a:off x="10618927" y="6400800"/>
-            <a:ext cx="1005840" cy="237744"/>
-          </a:xfrm>
-          <a:prstGeom prst="rect">
-            <a:avLst/>
-          </a:prstGeom>
-          <a:noFill/>
-          <a:ln/>
-        </p:spPr>
-        <p:txBody>
-          <a:bodyPr wrap="square" lIns="0" tIns="0" rIns="0" bIns="0" rtlCol="0" anchor="ctr"/>
-          <a:lstStyle/>
-          <a:p>
-            <a:pPr algn="r" indent="0" marL="0">
-              <a:buNone/>
-            </a:pPr>
-            <a:r>
-              <a:rPr lang="en-US" sz="1050" dirty="0">
-                <a:solidFill>
-                  <a:srgbClr val="58626C"/>
-                </a:solidFill>
-                <a:latin typeface="Calibri" pitchFamily="34" charset="0"/>
-                <a:ea typeface="Calibri" pitchFamily="34" charset="-122"/>
-                <a:cs typeface="Calibri" pitchFamily="34" charset="-120"/>
-              </a:rPr>
-              <a:t>2 / 25</a:t>
-            </a:r>
-            <a:endParaRPr lang="en-US" sz="1050" dirty="0"/>
-          </a:p>
-        </p:txBody>
-      </p:sp>
-      <p:sp>
-        <p:nvSpPr>
-          <p:cNvPr id="5" name="Shape 3"/>
-          <p:cNvSpPr/>
-          <p:nvPr/>
-        </p:nvSpPr>
-        <p:spPr>
-          <a:xfrm>
-            <a:off x="566928" y="1399032"/>
-            <a:ext cx="310896" cy="310896"/>
-          </a:xfrm>
-          <a:prstGeom prst="ellipse">
-            <a:avLst/>
-          </a:prstGeom>
-          <a:solidFill>
-            <a:srgbClr val="A62B1F"/>
-          </a:solidFill>
-          <a:ln/>
-        </p:spPr>
-      </p:sp>
-      <p:sp>
-        <p:nvSpPr>
-          <p:cNvPr id="6" name="Text 4"/>
-          <p:cNvSpPr txBox="1"/>
-          <p:nvPr/>
-        </p:nvSpPr>
-        <p:spPr>
-          <a:xfrm>
-            <a:off x="566928" y="1399032"/>
-            <a:ext cx="310896" cy="310896"/>
-          </a:xfrm>
-          <a:prstGeom prst="rect">
-            <a:avLst/>
-          </a:prstGeom>
-          <a:noFill/>
-          <a:ln/>
-        </p:spPr>
-        <p:txBody>
-          <a:bodyPr wrap="square" lIns="0" tIns="0" rIns="0" bIns="0" rtlCol="0" anchor="ctr"/>
-          <a:lstStyle/>
-          <a:p>
-            <a:pPr algn="ctr" indent="0" marL="0">
-              <a:buNone/>
-            </a:pPr>
-            <a:r>
-              <a:rPr lang="en-US" sz="1200" b="1" dirty="0">
-                <a:solidFill>
-                  <a:srgbClr val="FFFFFF"/>
-                </a:solidFill>
-                <a:latin typeface="Calibri" pitchFamily="34" charset="0"/>
-                <a:ea typeface="Calibri" pitchFamily="34" charset="-122"/>
-                <a:cs typeface="Calibri" pitchFamily="34" charset="-120"/>
-              </a:rPr>
-              <a:t>1</a:t>
-            </a:r>
-            <a:endParaRPr lang="en-US" sz="1200" dirty="0"/>
-          </a:p>
-        </p:txBody>
-      </p:sp>
-      <p:sp>
-        <p:nvSpPr>
-          <p:cNvPr id="7" name="Text 5"/>
-          <p:cNvSpPr txBox="1"/>
-          <p:nvPr/>
-        </p:nvSpPr>
-        <p:spPr>
-          <a:xfrm>
-            <a:off x="1024128" y="1371600"/>
-            <a:ext cx="10424160" cy="365760"/>
-          </a:xfrm>
-          <a:prstGeom prst="rect">
-            <a:avLst/>
-          </a:prstGeom>
-          <a:noFill/>
-          <a:ln/>
-        </p:spPr>
-        <p:txBody>
-          <a:bodyPr wrap="square" lIns="0" tIns="0" rIns="0" bIns="0" rtlCol="0" anchor="ctr"/>
-          <a:lstStyle/>
-          <a:p>
-            <a:pPr indent="0" marL="0">
-              <a:buNone/>
-            </a:pPr>
-            <a:r>
-              <a:rPr lang="en-US" sz="1500" b="1" dirty="0">
-                <a:solidFill>
-                  <a:srgbClr val="0B3C49"/>
-                </a:solidFill>
-                <a:latin typeface="Calibri" pitchFamily="34" charset="0"/>
-                <a:ea typeface="Calibri" pitchFamily="34" charset="-122"/>
-                <a:cs typeface="Calibri" pitchFamily="34" charset="-120"/>
-              </a:rPr>
-              <a:t>The problem is geometric   </a:t>
-            </a:r>
-            <a:pPr indent="0" marL="0">
-              <a:buNone/>
-            </a:pPr>
-            <a:r>
-              <a:rPr lang="en-US" sz="1250" dirty="0">
-                <a:solidFill>
-                  <a:srgbClr val="58626C"/>
-                </a:solidFill>
-                <a:latin typeface="Calibri" pitchFamily="34" charset="0"/>
-                <a:ea typeface="Calibri" pitchFamily="34" charset="-122"/>
-                <a:cs typeface="Calibri" pitchFamily="34" charset="-120"/>
-              </a:rPr>
-              <a:t>PAI grade is defined by lesion size</a:t>
-            </a:r>
-            <a:endParaRPr lang="en-US" sz="1500" dirty="0"/>
-          </a:p>
-        </p:txBody>
-      </p:sp>
-      <p:sp>
-        <p:nvSpPr>
-          <p:cNvPr id="8" name="Shape 6"/>
-          <p:cNvSpPr/>
-          <p:nvPr/>
-        </p:nvSpPr>
-        <p:spPr>
-          <a:xfrm>
-            <a:off x="566928" y="1947672"/>
-            <a:ext cx="310896" cy="310896"/>
-          </a:xfrm>
-          <a:prstGeom prst="ellipse">
-            <a:avLst/>
-          </a:prstGeom>
-          <a:solidFill>
-            <a:srgbClr val="A62B1F"/>
-          </a:solidFill>
-          <a:ln/>
-        </p:spPr>
-      </p:sp>
-      <p:sp>
-        <p:nvSpPr>
-          <p:cNvPr id="9" name="Text 7"/>
-          <p:cNvSpPr txBox="1"/>
-          <p:nvPr/>
-        </p:nvSpPr>
-        <p:spPr>
-          <a:xfrm>
-            <a:off x="566928" y="1947672"/>
-            <a:ext cx="310896" cy="310896"/>
-          </a:xfrm>
-          <a:prstGeom prst="rect">
-            <a:avLst/>
-          </a:prstGeom>
-          <a:noFill/>
-          <a:ln/>
-        </p:spPr>
-        <p:txBody>
-          <a:bodyPr wrap="square" lIns="0" tIns="0" rIns="0" bIns="0" rtlCol="0" anchor="ctr"/>
-          <a:lstStyle/>
-          <a:p>
-            <a:pPr algn="ctr" indent="0" marL="0">
-              <a:buNone/>
-            </a:pPr>
-            <a:r>
-              <a:rPr lang="en-US" sz="1200" b="1" dirty="0">
-                <a:solidFill>
-                  <a:srgbClr val="FFFFFF"/>
-                </a:solidFill>
-                <a:latin typeface="Calibri" pitchFamily="34" charset="0"/>
-                <a:ea typeface="Calibri" pitchFamily="34" charset="-122"/>
-                <a:cs typeface="Calibri" pitchFamily="34" charset="-120"/>
-              </a:rPr>
-              <a:t>2</a:t>
-            </a:r>
-            <a:endParaRPr lang="en-US" sz="1200" dirty="0"/>
-          </a:p>
-        </p:txBody>
-      </p:sp>
-      <p:sp>
-        <p:nvSpPr>
-          <p:cNvPr id="10" name="Text 8"/>
-          <p:cNvSpPr txBox="1"/>
-          <p:nvPr/>
-        </p:nvSpPr>
-        <p:spPr>
-          <a:xfrm>
-            <a:off x="1024128" y="1920240"/>
-            <a:ext cx="10424160" cy="365760"/>
-          </a:xfrm>
-          <a:prstGeom prst="rect">
-            <a:avLst/>
-          </a:prstGeom>
-          <a:noFill/>
-          <a:ln/>
-        </p:spPr>
-        <p:txBody>
-          <a:bodyPr wrap="square" lIns="0" tIns="0" rIns="0" bIns="0" rtlCol="0" anchor="ctr"/>
-          <a:lstStyle/>
-          <a:p>
-            <a:pPr indent="0" marL="0">
-              <a:buNone/>
-            </a:pPr>
-            <a:r>
-              <a:rPr lang="en-US" sz="1500" b="1" dirty="0">
-                <a:solidFill>
-                  <a:srgbClr val="0B3C49"/>
-                </a:solidFill>
-                <a:latin typeface="Calibri" pitchFamily="34" charset="0"/>
-                <a:ea typeface="Calibri" pitchFamily="34" charset="-122"/>
-                <a:cs typeface="Calibri" pitchFamily="34" charset="-120"/>
-              </a:rPr>
-              <a:t>Therefore: bag-size bias   </a:t>
-            </a:r>
-            <a:pPr indent="0" marL="0">
-              <a:buNone/>
-            </a:pPr>
-            <a:r>
-              <a:rPr lang="en-US" sz="1250" dirty="0">
-                <a:solidFill>
-                  <a:srgbClr val="58626C"/>
-                </a:solidFill>
-                <a:latin typeface="Calibri" pitchFamily="34" charset="0"/>
-                <a:ea typeface="Calibri" pitchFamily="34" charset="-122"/>
-                <a:cs typeface="Calibri" pitchFamily="34" charset="-120"/>
-              </a:rPr>
-              <a:t>The assignment's protocol lets the label leak through token count</a:t>
-            </a:r>
-            <a:endParaRPr lang="en-US" sz="1500" dirty="0"/>
-          </a:p>
-        </p:txBody>
-      </p:sp>
-      <p:sp>
-        <p:nvSpPr>
-          <p:cNvPr id="11" name="Shape 9"/>
-          <p:cNvSpPr/>
-          <p:nvPr/>
-        </p:nvSpPr>
-        <p:spPr>
-          <a:xfrm>
-            <a:off x="566928" y="2496312"/>
-            <a:ext cx="310896" cy="310896"/>
-          </a:xfrm>
-          <a:prstGeom prst="ellipse">
-            <a:avLst/>
-          </a:prstGeom>
-          <a:solidFill>
-            <a:srgbClr val="1F6F43"/>
-          </a:solidFill>
-          <a:ln/>
-        </p:spPr>
-      </p:sp>
-      <p:sp>
-        <p:nvSpPr>
-          <p:cNvPr id="12" name="Text 10"/>
-          <p:cNvSpPr txBox="1"/>
-          <p:nvPr/>
-        </p:nvSpPr>
-        <p:spPr>
-          <a:xfrm>
-            <a:off x="566928" y="2496312"/>
-            <a:ext cx="310896" cy="310896"/>
-          </a:xfrm>
-          <a:prstGeom prst="rect">
-            <a:avLst/>
-          </a:prstGeom>
-          <a:noFill/>
-          <a:ln/>
-        </p:spPr>
-        <p:txBody>
-          <a:bodyPr wrap="square" lIns="0" tIns="0" rIns="0" bIns="0" rtlCol="0" anchor="ctr"/>
-          <a:lstStyle/>
-          <a:p>
-            <a:pPr algn="ctr" indent="0" marL="0">
-              <a:buNone/>
-            </a:pPr>
-            <a:r>
-              <a:rPr lang="en-US" sz="1200" b="1" dirty="0">
-                <a:solidFill>
-                  <a:srgbClr val="FFFFFF"/>
-                </a:solidFill>
-                <a:latin typeface="Calibri" pitchFamily="34" charset="0"/>
-                <a:ea typeface="Calibri" pitchFamily="34" charset="-122"/>
-                <a:cs typeface="Calibri" pitchFamily="34" charset="-120"/>
-              </a:rPr>
-              <a:t>3</a:t>
-            </a:r>
-            <a:endParaRPr lang="en-US" sz="1200" dirty="0"/>
-          </a:p>
-        </p:txBody>
-      </p:sp>
-      <p:sp>
-        <p:nvSpPr>
-          <p:cNvPr id="13" name="Text 11"/>
-          <p:cNvSpPr txBox="1"/>
-          <p:nvPr/>
-        </p:nvSpPr>
-        <p:spPr>
-          <a:xfrm>
-            <a:off x="1024128" y="2468880"/>
-            <a:ext cx="10424160" cy="365760"/>
-          </a:xfrm>
-          <a:prstGeom prst="rect">
-            <a:avLst/>
-          </a:prstGeom>
-          <a:noFill/>
-          <a:ln/>
-        </p:spPr>
-        <p:txBody>
-          <a:bodyPr wrap="square" lIns="0" tIns="0" rIns="0" bIns="0" rtlCol="0" anchor="ctr"/>
-          <a:lstStyle/>
-          <a:p>
-            <a:pPr indent="0" marL="0">
-              <a:buNone/>
-            </a:pPr>
-            <a:r>
-              <a:rPr lang="en-US" sz="1500" b="1" dirty="0">
-                <a:solidFill>
-                  <a:srgbClr val="0B3C49"/>
-                </a:solidFill>
-                <a:latin typeface="Calibri" pitchFamily="34" charset="0"/>
-                <a:ea typeface="Calibri" pitchFamily="34" charset="-122"/>
-                <a:cs typeface="Calibri" pitchFamily="34" charset="-120"/>
-              </a:rPr>
-              <a:t>Removing the bias   </a:t>
-            </a:r>
-            <a:pPr indent="0" marL="0">
-              <a:buNone/>
-            </a:pPr>
-            <a:r>
-              <a:rPr lang="en-US" sz="1250" dirty="0">
-                <a:solidFill>
-                  <a:srgbClr val="58626C"/>
-                </a:solidFill>
-                <a:latin typeface="Calibri" pitchFamily="34" charset="0"/>
-                <a:ea typeface="Calibri" pitchFamily="34" charset="-122"/>
-                <a:cs typeface="Calibri" pitchFamily="34" charset="-120"/>
-              </a:rPr>
-              <a:t>Fixed-count protocol + a two-factor control</a:t>
-            </a:r>
-            <a:endParaRPr lang="en-US" sz="1500" dirty="0"/>
-          </a:p>
-        </p:txBody>
-      </p:sp>
-      <p:sp>
-        <p:nvSpPr>
-          <p:cNvPr id="14" name="Shape 12"/>
-          <p:cNvSpPr/>
-          <p:nvPr/>
-        </p:nvSpPr>
-        <p:spPr>
-          <a:xfrm>
-            <a:off x="566928" y="3044952"/>
-            <a:ext cx="310896" cy="310896"/>
-          </a:xfrm>
-          <a:prstGeom prst="ellipse">
-            <a:avLst/>
-          </a:prstGeom>
-          <a:solidFill>
-            <a:srgbClr val="1C7293"/>
-          </a:solidFill>
-          <a:ln/>
-        </p:spPr>
-      </p:sp>
-      <p:sp>
-        <p:nvSpPr>
-          <p:cNvPr id="15" name="Text 13"/>
-          <p:cNvSpPr txBox="1"/>
-          <p:nvPr/>
-        </p:nvSpPr>
-        <p:spPr>
-          <a:xfrm>
-            <a:off x="566928" y="3044952"/>
-            <a:ext cx="310896" cy="310896"/>
-          </a:xfrm>
-          <a:prstGeom prst="rect">
-            <a:avLst/>
-          </a:prstGeom>
-          <a:noFill/>
-          <a:ln/>
-        </p:spPr>
-        <p:txBody>
-          <a:bodyPr wrap="square" lIns="0" tIns="0" rIns="0" bIns="0" rtlCol="0" anchor="ctr"/>
-          <a:lstStyle/>
-          <a:p>
-            <a:pPr algn="ctr" indent="0" marL="0">
-              <a:buNone/>
-            </a:pPr>
-            <a:r>
-              <a:rPr lang="en-US" sz="1200" b="1" dirty="0">
-                <a:solidFill>
-                  <a:srgbClr val="FFFFFF"/>
-                </a:solidFill>
-                <a:latin typeface="Calibri" pitchFamily="34" charset="0"/>
-                <a:ea typeface="Calibri" pitchFamily="34" charset="-122"/>
-                <a:cs typeface="Calibri" pitchFamily="34" charset="-120"/>
-              </a:rPr>
-              <a:t>4</a:t>
-            </a:r>
-            <a:endParaRPr lang="en-US" sz="1200" dirty="0"/>
-          </a:p>
-        </p:txBody>
-      </p:sp>
-      <p:sp>
-        <p:nvSpPr>
-          <p:cNvPr id="16" name="Text 14"/>
-          <p:cNvSpPr txBox="1"/>
-          <p:nvPr/>
-        </p:nvSpPr>
-        <p:spPr>
-          <a:xfrm>
-            <a:off x="1024128" y="3017520"/>
-            <a:ext cx="10424160" cy="365760"/>
-          </a:xfrm>
-          <a:prstGeom prst="rect">
-            <a:avLst/>
-          </a:prstGeom>
-          <a:noFill/>
-          <a:ln/>
-        </p:spPr>
-        <p:txBody>
-          <a:bodyPr wrap="square" lIns="0" tIns="0" rIns="0" bIns="0" rtlCol="0" anchor="ctr"/>
-          <a:lstStyle/>
-          <a:p>
-            <a:pPr indent="0" marL="0">
-              <a:buNone/>
-            </a:pPr>
-            <a:r>
-              <a:rPr lang="en-US" sz="1500" b="1" dirty="0">
-                <a:solidFill>
-                  <a:srgbClr val="0B3C49"/>
-                </a:solidFill>
-                <a:latin typeface="Calibri" pitchFamily="34" charset="0"/>
-                <a:ea typeface="Calibri" pitchFamily="34" charset="-122"/>
-                <a:cs typeface="Calibri" pitchFamily="34" charset="-120"/>
-              </a:rPr>
-              <a:t>Classification heads   </a:t>
-            </a:r>
-            <a:pPr indent="0" marL="0">
-              <a:buNone/>
-            </a:pPr>
-            <a:r>
-              <a:rPr lang="en-US" sz="1250" dirty="0">
-                <a:solidFill>
-                  <a:srgbClr val="58626C"/>
-                </a:solidFill>
-                <a:latin typeface="Calibri" pitchFamily="34" charset="0"/>
-                <a:ea typeface="Calibri" pitchFamily="34" charset="-122"/>
-                <a:cs typeface="Calibri" pitchFamily="34" charset="-120"/>
-              </a:rPr>
-              <a:t>Flat, attention pooling, instance-level MIL</a:t>
-            </a:r>
-            <a:endParaRPr lang="en-US" sz="1500" dirty="0"/>
-          </a:p>
-        </p:txBody>
-      </p:sp>
-      <p:sp>
-        <p:nvSpPr>
-          <p:cNvPr id="17" name="Shape 15"/>
-          <p:cNvSpPr/>
-          <p:nvPr/>
-        </p:nvSpPr>
-        <p:spPr>
-          <a:xfrm>
-            <a:off x="566928" y="3593592"/>
-            <a:ext cx="310896" cy="310896"/>
-          </a:xfrm>
-          <a:prstGeom prst="ellipse">
-            <a:avLst/>
-          </a:prstGeom>
-          <a:solidFill>
-            <a:srgbClr val="1C7293"/>
-          </a:solidFill>
-          <a:ln/>
-        </p:spPr>
-      </p:sp>
-      <p:sp>
-        <p:nvSpPr>
-          <p:cNvPr id="18" name="Text 16"/>
-          <p:cNvSpPr txBox="1"/>
-          <p:nvPr/>
-        </p:nvSpPr>
-        <p:spPr>
-          <a:xfrm>
-            <a:off x="566928" y="3593592"/>
-            <a:ext cx="310896" cy="310896"/>
-          </a:xfrm>
-          <a:prstGeom prst="rect">
-            <a:avLst/>
-          </a:prstGeom>
-          <a:noFill/>
-          <a:ln/>
-        </p:spPr>
-        <p:txBody>
-          <a:bodyPr wrap="square" lIns="0" tIns="0" rIns="0" bIns="0" rtlCol="0" anchor="ctr"/>
-          <a:lstStyle/>
-          <a:p>
-            <a:pPr algn="ctr" indent="0" marL="0">
-              <a:buNone/>
-            </a:pPr>
-            <a:r>
-              <a:rPr lang="en-US" sz="1200" b="1" dirty="0">
-                <a:solidFill>
-                  <a:srgbClr val="FFFFFF"/>
-                </a:solidFill>
-                <a:latin typeface="Calibri" pitchFamily="34" charset="0"/>
-                <a:ea typeface="Calibri" pitchFamily="34" charset="-122"/>
-                <a:cs typeface="Calibri" pitchFamily="34" charset="-120"/>
-              </a:rPr>
-              <a:t>5</a:t>
-            </a:r>
-            <a:endParaRPr lang="en-US" sz="1200" dirty="0"/>
-          </a:p>
-        </p:txBody>
-      </p:sp>
-      <p:sp>
-        <p:nvSpPr>
-          <p:cNvPr id="19" name="Text 17"/>
-          <p:cNvSpPr txBox="1"/>
-          <p:nvPr/>
-        </p:nvSpPr>
-        <p:spPr>
-          <a:xfrm>
-            <a:off x="1024128" y="3566160"/>
-            <a:ext cx="10424160" cy="365760"/>
-          </a:xfrm>
-          <a:prstGeom prst="rect">
-            <a:avLst/>
-          </a:prstGeom>
-          <a:noFill/>
-          <a:ln/>
-        </p:spPr>
-        <p:txBody>
-          <a:bodyPr wrap="square" lIns="0" tIns="0" rIns="0" bIns="0" rtlCol="0" anchor="ctr"/>
-          <a:lstStyle/>
-          <a:p>
-            <a:pPr indent="0" marL="0">
-              <a:buNone/>
-            </a:pPr>
-            <a:r>
-              <a:rPr lang="en-US" sz="1500" b="1" dirty="0">
-                <a:solidFill>
-                  <a:srgbClr val="0B3C49"/>
-                </a:solidFill>
-                <a:latin typeface="Calibri" pitchFamily="34" charset="0"/>
-                <a:ea typeface="Calibri" pitchFamily="34" charset="-122"/>
-                <a:cs typeface="Calibri" pitchFamily="34" charset="-120"/>
-              </a:rPr>
-              <a:t>Our novelty   </a:t>
-            </a:r>
-            <a:pPr indent="0" marL="0">
-              <a:buNone/>
-            </a:pPr>
-            <a:r>
-              <a:rPr lang="en-US" sz="1250" dirty="0">
-                <a:solidFill>
-                  <a:srgbClr val="58626C"/>
-                </a:solidFill>
-                <a:latin typeface="Calibri" pitchFamily="34" charset="0"/>
-                <a:ea typeface="Calibri" pitchFamily="34" charset="-122"/>
-                <a:cs typeface="Calibri" pitchFamily="34" charset="-120"/>
-              </a:rPr>
-              <a:t>Balanced token sampling — rebalancing inside latent space</a:t>
-            </a:r>
-            <a:endParaRPr lang="en-US" sz="1500" dirty="0"/>
-          </a:p>
-        </p:txBody>
-      </p:sp>
-      <p:sp>
-        <p:nvSpPr>
-          <p:cNvPr id="20" name="Shape 18"/>
-          <p:cNvSpPr/>
-          <p:nvPr/>
-        </p:nvSpPr>
-        <p:spPr>
-          <a:xfrm>
-            <a:off x="566928" y="4142232"/>
-            <a:ext cx="310896" cy="310896"/>
-          </a:xfrm>
-          <a:prstGeom prst="ellipse">
-            <a:avLst/>
-          </a:prstGeom>
-          <a:solidFill>
-            <a:srgbClr val="1F6F43"/>
-          </a:solidFill>
-          <a:ln/>
-        </p:spPr>
-      </p:sp>
-      <p:sp>
-        <p:nvSpPr>
-          <p:cNvPr id="21" name="Text 19"/>
-          <p:cNvSpPr txBox="1"/>
-          <p:nvPr/>
-        </p:nvSpPr>
-        <p:spPr>
-          <a:xfrm>
-            <a:off x="566928" y="4142232"/>
-            <a:ext cx="310896" cy="310896"/>
-          </a:xfrm>
-          <a:prstGeom prst="rect">
-            <a:avLst/>
-          </a:prstGeom>
-          <a:noFill/>
-          <a:ln/>
-        </p:spPr>
-        <p:txBody>
-          <a:bodyPr wrap="square" lIns="0" tIns="0" rIns="0" bIns="0" rtlCol="0" anchor="ctr"/>
-          <a:lstStyle/>
-          <a:p>
-            <a:pPr algn="ctr" indent="0" marL="0">
-              <a:buNone/>
-            </a:pPr>
-            <a:r>
-              <a:rPr lang="en-US" sz="1200" b="1" dirty="0">
-                <a:solidFill>
-                  <a:srgbClr val="FFFFFF"/>
-                </a:solidFill>
-                <a:latin typeface="Calibri" pitchFamily="34" charset="0"/>
-                <a:ea typeface="Calibri" pitchFamily="34" charset="-122"/>
-                <a:cs typeface="Calibri" pitchFamily="34" charset="-120"/>
-              </a:rPr>
-              <a:t>6</a:t>
-            </a:r>
-            <a:endParaRPr lang="en-US" sz="1200" dirty="0"/>
-          </a:p>
-        </p:txBody>
-      </p:sp>
-      <p:sp>
-        <p:nvSpPr>
-          <p:cNvPr id="22" name="Text 20"/>
-          <p:cNvSpPr txBox="1"/>
-          <p:nvPr/>
-        </p:nvSpPr>
-        <p:spPr>
-          <a:xfrm>
-            <a:off x="1024128" y="4114800"/>
-            <a:ext cx="10424160" cy="365760"/>
-          </a:xfrm>
-          <a:prstGeom prst="rect">
-            <a:avLst/>
-          </a:prstGeom>
-          <a:noFill/>
-          <a:ln/>
-        </p:spPr>
-        <p:txBody>
-          <a:bodyPr wrap="square" lIns="0" tIns="0" rIns="0" bIns="0" rtlCol="0" anchor="ctr"/>
-          <a:lstStyle/>
-          <a:p>
-            <a:pPr indent="0" marL="0">
-              <a:buNone/>
-            </a:pPr>
-            <a:r>
-              <a:rPr lang="en-US" sz="1500" b="1" dirty="0">
-                <a:solidFill>
-                  <a:srgbClr val="0B3C49"/>
-                </a:solidFill>
-                <a:latin typeface="Calibri" pitchFamily="34" charset="0"/>
-                <a:ea typeface="Calibri" pitchFamily="34" charset="-122"/>
-                <a:cs typeface="Calibri" pitchFamily="34" charset="-120"/>
-              </a:rPr>
-              <a:t>Results   </a:t>
-            </a:r>
-            <a:pPr indent="0" marL="0">
-              <a:buNone/>
-            </a:pPr>
-            <a:r>
-              <a:rPr lang="en-US" sz="1250" dirty="0">
-                <a:solidFill>
-                  <a:srgbClr val="58626C"/>
-                </a:solidFill>
-                <a:latin typeface="Calibri" pitchFamily="34" charset="0"/>
-                <a:ea typeface="Calibri" pitchFamily="34" charset="-122"/>
-                <a:cs typeface="Calibri" pitchFamily="34" charset="-120"/>
-              </a:rPr>
-              <a:t>What the frozen encoder is actually worth</a:t>
-            </a:r>
-            <a:endParaRPr lang="en-US" sz="1500" dirty="0"/>
-          </a:p>
-        </p:txBody>
-      </p:sp>
-      <p:sp>
-        <p:nvSpPr>
-          <p:cNvPr id="23" name="Shape 21"/>
-          <p:cNvSpPr/>
-          <p:nvPr/>
-        </p:nvSpPr>
-        <p:spPr>
-          <a:xfrm>
-            <a:off x="566928" y="4690872"/>
-            <a:ext cx="310896" cy="310896"/>
-          </a:xfrm>
-          <a:prstGeom prst="ellipse">
-            <a:avLst/>
-          </a:prstGeom>
-          <a:solidFill>
-            <a:srgbClr val="0B3C49"/>
-          </a:solidFill>
-          <a:ln/>
-        </p:spPr>
-      </p:sp>
-      <p:sp>
-        <p:nvSpPr>
-          <p:cNvPr id="24" name="Text 22"/>
-          <p:cNvSpPr txBox="1"/>
-          <p:nvPr/>
-        </p:nvSpPr>
-        <p:spPr>
-          <a:xfrm>
-            <a:off x="566928" y="4690872"/>
-            <a:ext cx="310896" cy="310896"/>
-          </a:xfrm>
-          <a:prstGeom prst="rect">
-            <a:avLst/>
-          </a:prstGeom>
-          <a:noFill/>
-          <a:ln/>
-        </p:spPr>
-        <p:txBody>
-          <a:bodyPr wrap="square" lIns="0" tIns="0" rIns="0" bIns="0" rtlCol="0" anchor="ctr"/>
-          <a:lstStyle/>
-          <a:p>
-            <a:pPr algn="ctr" indent="0" marL="0">
-              <a:buNone/>
-            </a:pPr>
-            <a:r>
-              <a:rPr lang="en-US" sz="1200" b="1" dirty="0">
-                <a:solidFill>
-                  <a:srgbClr val="FFFFFF"/>
-                </a:solidFill>
-                <a:latin typeface="Calibri" pitchFamily="34" charset="0"/>
-                <a:ea typeface="Calibri" pitchFamily="34" charset="-122"/>
-                <a:cs typeface="Calibri" pitchFamily="34" charset="-120"/>
-              </a:rPr>
-              <a:t>7</a:t>
-            </a:r>
-            <a:endParaRPr lang="en-US" sz="1200" dirty="0"/>
-          </a:p>
-        </p:txBody>
-      </p:sp>
-      <p:sp>
-        <p:nvSpPr>
-          <p:cNvPr id="25" name="Text 23"/>
-          <p:cNvSpPr txBox="1"/>
-          <p:nvPr/>
-        </p:nvSpPr>
-        <p:spPr>
-          <a:xfrm>
-            <a:off x="1024128" y="4663440"/>
-            <a:ext cx="10424160" cy="365760"/>
-          </a:xfrm>
-          <a:prstGeom prst="rect">
-            <a:avLst/>
-          </a:prstGeom>
-          <a:noFill/>
-          <a:ln/>
-        </p:spPr>
-        <p:txBody>
-          <a:bodyPr wrap="square" lIns="0" tIns="0" rIns="0" bIns="0" rtlCol="0" anchor="ctr"/>
-          <a:lstStyle/>
-          <a:p>
-            <a:pPr indent="0" marL="0">
-              <a:buNone/>
-            </a:pPr>
-            <a:r>
-              <a:rPr lang="en-US" sz="1500" b="1" dirty="0">
-                <a:solidFill>
-                  <a:srgbClr val="0B3C49"/>
-                </a:solidFill>
-                <a:latin typeface="Calibri" pitchFamily="34" charset="0"/>
-                <a:ea typeface="Calibri" pitchFamily="34" charset="-122"/>
-                <a:cs typeface="Calibri" pitchFamily="34" charset="-120"/>
-              </a:rPr>
-              <a:t>Conclusions   </a:t>
-            </a:r>
-            <a:pPr indent="0" marL="0">
-              <a:buNone/>
-            </a:pPr>
-            <a:r>
-              <a:rPr lang="en-US" sz="1250" dirty="0">
-                <a:solidFill>
-                  <a:srgbClr val="58626C"/>
-                </a:solidFill>
-                <a:latin typeface="Calibri" pitchFamily="34" charset="0"/>
-                <a:ea typeface="Calibri" pitchFamily="34" charset="-122"/>
-                <a:cs typeface="Calibri" pitchFamily="34" charset="-120"/>
-              </a:rPr>
-              <a:t>Findings, declared limits, future work</a:t>
-            </a:r>
-            <a:endParaRPr lang="en-US" sz="1500" dirty="0"/>
-          </a:p>
-        </p:txBody>
-      </p:sp>
-      <p:sp>
-        <p:nvSpPr>
-          <p:cNvPr id="26" name="Shape 24"/>
-          <p:cNvSpPr/>
-          <p:nvPr/>
-        </p:nvSpPr>
-        <p:spPr>
-          <a:xfrm>
-            <a:off x="566928" y="5349240"/>
-            <a:ext cx="11057839" cy="914400"/>
-          </a:xfrm>
-          <a:prstGeom prst="roundRect">
-            <a:avLst>
-              <a:gd name="adj" fmla="val 7000"/>
-            </a:avLst>
-          </a:prstGeom>
-          <a:solidFill>
-            <a:srgbClr val="F1F4F6"/>
-          </a:solidFill>
-          <a:ln/>
-        </p:spPr>
-      </p:sp>
-      <p:sp>
-        <p:nvSpPr>
-          <p:cNvPr id="27" name="Text 25"/>
-          <p:cNvSpPr txBox="1"/>
-          <p:nvPr/>
-        </p:nvSpPr>
-        <p:spPr>
-          <a:xfrm>
-            <a:off x="749808" y="5477256"/>
-            <a:ext cx="10692079" cy="274320"/>
-          </a:xfrm>
-          <a:prstGeom prst="rect">
-            <a:avLst/>
-          </a:prstGeom>
-          <a:noFill/>
-          <a:ln/>
-        </p:spPr>
-        <p:txBody>
-          <a:bodyPr wrap="square" lIns="0" tIns="0" rIns="0" bIns="0" rtlCol="0" anchor="ctr"/>
-          <a:lstStyle/>
-          <a:p>
-            <a:pPr indent="0" marL="0">
-              <a:buNone/>
-            </a:pPr>
-            <a:r>
-              <a:rPr lang="en-US" sz="1450" b="1" dirty="0">
-                <a:solidFill>
-                  <a:srgbClr val="0B3C49"/>
-                </a:solidFill>
-                <a:latin typeface="Cambria" pitchFamily="34" charset="0"/>
-                <a:ea typeface="Cambria" pitchFamily="34" charset="-122"/>
-                <a:cs typeface="Cambria" pitchFamily="34" charset="-120"/>
-              </a:rPr>
-              <a:t>How to read every result slide</a:t>
-            </a:r>
-            <a:endParaRPr lang="en-US" sz="1450" dirty="0"/>
-          </a:p>
-        </p:txBody>
-      </p:sp>
-      <p:sp>
-        <p:nvSpPr>
-          <p:cNvPr id="28" name="Text 26"/>
-          <p:cNvSpPr txBox="1"/>
-          <p:nvPr/>
-        </p:nvSpPr>
-        <p:spPr>
-          <a:xfrm>
-            <a:off x="749808" y="5806440"/>
-            <a:ext cx="10692079" cy="292608"/>
-          </a:xfrm>
-          <a:prstGeom prst="rect">
-            <a:avLst/>
-          </a:prstGeom>
-          <a:noFill/>
-          <a:ln/>
-        </p:spPr>
-        <p:txBody>
-          <a:bodyPr wrap="square" lIns="0" tIns="0" rIns="0" bIns="0" rtlCol="0" anchor="ctr"/>
-          <a:lstStyle/>
-          <a:p>
-            <a:pPr indent="0" marL="0">
-              <a:lnSpc>
-                <a:spcPts val="1800"/>
-              </a:lnSpc>
-              <a:buNone/>
-            </a:pPr>
-            <a:r>
-              <a:rPr lang="en-US" sz="1200" dirty="0">
-                <a:solidFill>
-                  <a:srgbClr val="111418"/>
-                </a:solidFill>
-                <a:latin typeface="Calibri" pitchFamily="34" charset="0"/>
-                <a:ea typeface="Calibri" pitchFamily="34" charset="-122"/>
-                <a:cs typeface="Calibri" pitchFamily="34" charset="-120"/>
-              </a:rPr>
-              <a:t>Each analytical slide opens with the same strip: which MODEL, what it is COMPARED WITH, under which PROTOCOL, on which METRIC. Nine protocols and four related metrics appear in this work — the strip tells you at a glance which pair you are looking at.</a:t>
-            </a:r>
-            <a:endParaRPr lang="en-US" sz="1200" dirty="0"/>
-          </a:p>
-        </p:txBody>
-      </p:sp>
-    </p:spTree>
-  </p:cSld>
-  <p:clrMapOvr>
-    <a:masterClrMapping/>
-  </p:clrMapOvr>
-</p:sld>
-</file>
-
-<file path=ppt/slides/slide20.xml><?xml version="1.0" encoding="utf-8"?>
-<p:sld xmlns:a="http://schemas.openxmlformats.org/drawingml/2006/main" xmlns:r="http://schemas.openxmlformats.org/officeDocument/2006/relationships" xmlns:p="http://schemas.openxmlformats.org/presentationml/2006/main">
-  <p:cSld name="Slide 20">
-    <p:bg>
-      <p:bgPr>
-        <a:solidFill>
-          <a:srgbClr val="FFFFFF"/>
-        </a:solidFill>
-      </p:bgPr>
-    </p:bg>
-    <p:spTree>
-      <p:nvGrpSpPr>
-        <p:cNvPr id="1" name=""/>
-        <p:cNvGrpSpPr/>
-        <p:nvPr/>
-      </p:nvGrpSpPr>
-      <p:grpSpPr>
-        <a:xfrm>
-          <a:off x="0" y="0"/>
-          <a:ext cx="0" cy="0"/>
-          <a:chOff x="0" y="0"/>
-          <a:chExt cx="0" cy="0"/>
-        </a:xfrm>
-      </p:grpSpPr>
-      <p:sp>
-        <p:nvSpPr>
-          <p:cNvPr id="2" name="Text 0"/>
-          <p:cNvSpPr txBox="1"/>
-          <p:nvPr/>
-        </p:nvSpPr>
-        <p:spPr>
-          <a:xfrm>
-            <a:off x="566928" y="256032"/>
-            <a:ext cx="9601200" cy="219456"/>
-          </a:xfrm>
-          <a:prstGeom prst="rect">
-            <a:avLst/>
-          </a:prstGeom>
-          <a:noFill/>
-          <a:ln/>
-        </p:spPr>
-        <p:txBody>
-          <a:bodyPr wrap="square" lIns="0" tIns="0" rIns="0" bIns="0" rtlCol="0" anchor="ctr"/>
-          <a:lstStyle/>
-          <a:p>
-            <a:pPr indent="0" marL="0">
-              <a:buNone/>
-            </a:pPr>
-            <a:r>
-              <a:rPr lang="en-US" sz="1050" b="1" spc="140" kern="0" dirty="0">
-                <a:solidFill>
-                  <a:srgbClr val="1C7293"/>
-                </a:solidFill>
-                <a:latin typeface="Calibri" pitchFamily="34" charset="0"/>
-                <a:ea typeface="Calibri" pitchFamily="34" charset="-122"/>
-                <a:cs typeface="Calibri" pitchFamily="34" charset="-120"/>
-              </a:rPr>
               <a:t>RESULTS  ·  OBJECTIVE 1</a:t>
             </a:r>
             <a:endParaRPr lang="en-US" sz="1050" dirty="0"/>
@@ -25304,7 +27058,7 @@
                 <a:ea typeface="Calibri" pitchFamily="34" charset="-122"/>
                 <a:cs typeface="Calibri" pitchFamily="34" charset="-120"/>
               </a:rPr>
-              <a:t>20 / 25</a:t>
+              <a:t>21 / 26</a:t>
             </a:r>
             <a:endParaRPr lang="en-US" sz="1050" dirty="0"/>
           </a:p>
@@ -25354,7 +27108,7 @@
       </p:sp>
       <p:graphicFrame>
         <p:nvGraphicFramePr>
-          <p:cNvPr id="21" name="Table 0"/>
+          <p:cNvPr id="22" name="Table 0"/>
           <p:cNvGraphicFramePr>
             <a:graphicFrameLocks noGrp="1"/>
           </p:cNvGraphicFramePr>
@@ -26813,7 +28567,7 @@
       </p:sp>
       <p:graphicFrame>
         <p:nvGraphicFramePr>
-          <p:cNvPr id="41" name="Table 1"/>
+          <p:cNvPr id="43" name="Table 1"/>
           <p:cNvGraphicFramePr>
             <a:graphicFrameLocks noGrp="1"/>
           </p:cNvGraphicFramePr>
@@ -27989,9 +29743,9 @@
 </p:sld>
 </file>
 
-<file path=ppt/slides/slide21.xml><?xml version="1.0" encoding="utf-8"?>
+<file path=ppt/slides/slide22.xml><?xml version="1.0" encoding="utf-8"?>
 <p:sld xmlns:a="http://schemas.openxmlformats.org/drawingml/2006/main" xmlns:r="http://schemas.openxmlformats.org/officeDocument/2006/relationships" xmlns:p="http://schemas.openxmlformats.org/presentationml/2006/main">
-  <p:cSld name="Slide 21">
+  <p:cSld name="Slide 22">
     <p:bg>
       <p:bgPr>
         <a:solidFill>
@@ -28124,7 +29878,7 @@
                 <a:ea typeface="Calibri" pitchFamily="34" charset="-122"/>
                 <a:cs typeface="Calibri" pitchFamily="34" charset="-120"/>
               </a:rPr>
-              <a:t>21 / 25</a:t>
+              <a:t>22 / 26</a:t>
             </a:r>
             <a:endParaRPr lang="en-US" sz="1050" dirty="0"/>
           </a:p>
@@ -28132,7 +29886,7 @@
       </p:sp>
       <p:graphicFrame>
         <p:nvGraphicFramePr>
-          <p:cNvPr id="22" name="Table 0"/>
+          <p:cNvPr id="23" name="Table 0"/>
           <p:cNvGraphicFramePr>
             <a:graphicFrameLocks noGrp="1"/>
           </p:cNvGraphicFramePr>
@@ -28855,653 +30609,6 @@
 </p:sld>
 </file>
 
-<file path=ppt/slides/slide22.xml><?xml version="1.0" encoding="utf-8"?>
-<p:sld xmlns:a="http://schemas.openxmlformats.org/drawingml/2006/main" xmlns:r="http://schemas.openxmlformats.org/officeDocument/2006/relationships" xmlns:p="http://schemas.openxmlformats.org/presentationml/2006/main">
-  <p:cSld name="Slide 22">
-    <p:bg>
-      <p:bgPr>
-        <a:solidFill>
-          <a:srgbClr val="FFFFFF"/>
-        </a:solidFill>
-      </p:bgPr>
-    </p:bg>
-    <p:spTree>
-      <p:nvGrpSpPr>
-        <p:cNvPr id="1" name=""/>
-        <p:cNvGrpSpPr/>
-        <p:nvPr/>
-      </p:nvGrpSpPr>
-      <p:grpSpPr>
-        <a:xfrm>
-          <a:off x="0" y="0"/>
-          <a:ext cx="0" cy="0"/>
-          <a:chOff x="0" y="0"/>
-          <a:chExt cx="0" cy="0"/>
-        </a:xfrm>
-      </p:grpSpPr>
-      <p:sp>
-        <p:nvSpPr>
-          <p:cNvPr id="2" name="Text 0"/>
-          <p:cNvSpPr txBox="1"/>
-          <p:nvPr/>
-        </p:nvSpPr>
-        <p:spPr>
-          <a:xfrm>
-            <a:off x="566928" y="256032"/>
-            <a:ext cx="9601200" cy="219456"/>
-          </a:xfrm>
-          <a:prstGeom prst="rect">
-            <a:avLst/>
-          </a:prstGeom>
-          <a:noFill/>
-          <a:ln/>
-        </p:spPr>
-        <p:txBody>
-          <a:bodyPr wrap="square" lIns="0" tIns="0" rIns="0" bIns="0" rtlCol="0" anchor="ctr"/>
-          <a:lstStyle/>
-          <a:p>
-            <a:pPr indent="0" marL="0">
-              <a:buNone/>
-            </a:pPr>
-            <a:r>
-              <a:rPr lang="en-US" sz="1050" b="1" spc="140" kern="0" dirty="0">
-                <a:solidFill>
-                  <a:srgbClr val="1C7293"/>
-                </a:solidFill>
-                <a:latin typeface="Calibri" pitchFamily="34" charset="0"/>
-                <a:ea typeface="Calibri" pitchFamily="34" charset="-122"/>
-                <a:cs typeface="Calibri" pitchFamily="34" charset="-120"/>
-              </a:rPr>
-              <a:t>HOW IT WAS CONFIGURED</a:t>
-            </a:r>
-            <a:endParaRPr lang="en-US" sz="1050" dirty="0"/>
-          </a:p>
-        </p:txBody>
-      </p:sp>
-      <p:sp>
-        <p:nvSpPr>
-          <p:cNvPr id="3" name="Text 1"/>
-          <p:cNvSpPr txBox="1"/>
-          <p:nvPr/>
-        </p:nvSpPr>
-        <p:spPr>
-          <a:xfrm>
-            <a:off x="566928" y="493776"/>
-            <a:ext cx="11057839" cy="566928"/>
-          </a:xfrm>
-          <a:prstGeom prst="rect">
-            <a:avLst/>
-          </a:prstGeom>
-          <a:noFill/>
-          <a:ln/>
-        </p:spPr>
-        <p:txBody>
-          <a:bodyPr wrap="square" lIns="0" tIns="0" rIns="0" bIns="0" rtlCol="0" anchor="ctr"/>
-          <a:lstStyle/>
-          <a:p>
-            <a:pPr indent="0" marL="0">
-              <a:buNone/>
-            </a:pPr>
-            <a:r>
-              <a:rPr lang="en-US" sz="2700" b="1" dirty="0">
-                <a:solidFill>
-                  <a:srgbClr val="0B3C49"/>
-                </a:solidFill>
-                <a:latin typeface="Cambria" pitchFamily="34" charset="0"/>
-                <a:ea typeface="Cambria" pitchFamily="34" charset="-122"/>
-                <a:cs typeface="Cambria" pitchFamily="34" charset="-120"/>
-              </a:rPr>
-              <a:t>Statistical discipline</a:t>
-            </a:r>
-            <a:endParaRPr lang="en-US" sz="2700" dirty="0"/>
-          </a:p>
-        </p:txBody>
-      </p:sp>
-      <p:sp>
-        <p:nvSpPr>
-          <p:cNvPr id="4" name="Text 2"/>
-          <p:cNvSpPr txBox="1"/>
-          <p:nvPr/>
-        </p:nvSpPr>
-        <p:spPr>
-          <a:xfrm>
-            <a:off x="10618927" y="6400800"/>
-            <a:ext cx="1005840" cy="237744"/>
-          </a:xfrm>
-          <a:prstGeom prst="rect">
-            <a:avLst/>
-          </a:prstGeom>
-          <a:noFill/>
-          <a:ln/>
-        </p:spPr>
-        <p:txBody>
-          <a:bodyPr wrap="square" lIns="0" tIns="0" rIns="0" bIns="0" rtlCol="0" anchor="ctr"/>
-          <a:lstStyle/>
-          <a:p>
-            <a:pPr algn="r" indent="0" marL="0">
-              <a:buNone/>
-            </a:pPr>
-            <a:r>
-              <a:rPr lang="en-US" sz="1050" dirty="0">
-                <a:solidFill>
-                  <a:srgbClr val="58626C"/>
-                </a:solidFill>
-                <a:latin typeface="Calibri" pitchFamily="34" charset="0"/>
-                <a:ea typeface="Calibri" pitchFamily="34" charset="-122"/>
-                <a:cs typeface="Calibri" pitchFamily="34" charset="-120"/>
-              </a:rPr>
-              <a:t>22 / 25</a:t>
-            </a:r>
-            <a:endParaRPr lang="en-US" sz="1050" dirty="0"/>
-          </a:p>
-        </p:txBody>
-      </p:sp>
-      <p:sp>
-        <p:nvSpPr>
-          <p:cNvPr id="5" name="Text 3"/>
-          <p:cNvSpPr txBox="1"/>
-          <p:nvPr/>
-        </p:nvSpPr>
-        <p:spPr>
-          <a:xfrm>
-            <a:off x="566928" y="1188720"/>
-            <a:ext cx="11057839" cy="365760"/>
-          </a:xfrm>
-          <a:prstGeom prst="rect">
-            <a:avLst/>
-          </a:prstGeom>
-          <a:noFill/>
-          <a:ln/>
-        </p:spPr>
-        <p:txBody>
-          <a:bodyPr wrap="square" lIns="0" tIns="0" rIns="0" bIns="0" rtlCol="0" anchor="ctr"/>
-          <a:lstStyle/>
-          <a:p>
-            <a:pPr indent="0" marL="0">
-              <a:buNone/>
-            </a:pPr>
-            <a:r>
-              <a:rPr lang="en-US" sz="1400" dirty="0">
-                <a:solidFill>
-                  <a:srgbClr val="111418"/>
-                </a:solidFill>
-                <a:latin typeface="Calibri" pitchFamily="34" charset="0"/>
-                <a:ea typeface="Calibri" pitchFamily="34" charset="-122"/>
-                <a:cs typeface="Calibri" pitchFamily="34" charset="-120"/>
-              </a:rPr>
-              <a:t>Three safeguards against reporting a number we could not defend.</a:t>
-            </a:r>
-            <a:endParaRPr lang="en-US" sz="1400" dirty="0"/>
-          </a:p>
-        </p:txBody>
-      </p:sp>
-      <p:sp>
-        <p:nvSpPr>
-          <p:cNvPr id="6" name="Shape 4"/>
-          <p:cNvSpPr/>
-          <p:nvPr/>
-        </p:nvSpPr>
-        <p:spPr>
-          <a:xfrm>
-            <a:off x="566928" y="1837944"/>
-            <a:ext cx="329184" cy="329184"/>
-          </a:xfrm>
-          <a:prstGeom prst="ellipse">
-            <a:avLst/>
-          </a:prstGeom>
-          <a:solidFill>
-            <a:srgbClr val="0B3C49"/>
-          </a:solidFill>
-          <a:ln/>
-        </p:spPr>
-      </p:sp>
-      <p:sp>
-        <p:nvSpPr>
-          <p:cNvPr id="7" name="Text 5"/>
-          <p:cNvSpPr txBox="1"/>
-          <p:nvPr/>
-        </p:nvSpPr>
-        <p:spPr>
-          <a:xfrm>
-            <a:off x="566928" y="1837944"/>
-            <a:ext cx="329184" cy="329184"/>
-          </a:xfrm>
-          <a:prstGeom prst="rect">
-            <a:avLst/>
-          </a:prstGeom>
-          <a:noFill/>
-          <a:ln/>
-        </p:spPr>
-        <p:txBody>
-          <a:bodyPr wrap="square" lIns="0" tIns="0" rIns="0" bIns="0" rtlCol="0" anchor="ctr"/>
-          <a:lstStyle/>
-          <a:p>
-            <a:pPr algn="ctr" indent="0" marL="0">
-              <a:buNone/>
-            </a:pPr>
-            <a:r>
-              <a:rPr lang="en-US" sz="1200" b="1" dirty="0">
-                <a:solidFill>
-                  <a:srgbClr val="FFFFFF"/>
-                </a:solidFill>
-                <a:latin typeface="Calibri" pitchFamily="34" charset="0"/>
-                <a:ea typeface="Calibri" pitchFamily="34" charset="-122"/>
-                <a:cs typeface="Calibri" pitchFamily="34" charset="-120"/>
-              </a:rPr>
-              <a:t>1</a:t>
-            </a:r>
-            <a:endParaRPr lang="en-US" sz="1200" dirty="0"/>
-          </a:p>
-        </p:txBody>
-      </p:sp>
-      <p:sp>
-        <p:nvSpPr>
-          <p:cNvPr id="8" name="Text 6"/>
-          <p:cNvSpPr txBox="1"/>
-          <p:nvPr/>
-        </p:nvSpPr>
-        <p:spPr>
-          <a:xfrm>
-            <a:off x="1069848" y="1783080"/>
-            <a:ext cx="10424160" cy="365760"/>
-          </a:xfrm>
-          <a:prstGeom prst="rect">
-            <a:avLst/>
-          </a:prstGeom>
-          <a:noFill/>
-          <a:ln/>
-        </p:spPr>
-        <p:txBody>
-          <a:bodyPr wrap="square" lIns="0" tIns="0" rIns="0" bIns="0" rtlCol="0" anchor="ctr"/>
-          <a:lstStyle/>
-          <a:p>
-            <a:pPr indent="0" marL="0">
-              <a:buNone/>
-            </a:pPr>
-            <a:r>
-              <a:rPr lang="en-US" sz="1500" b="1" dirty="0">
-                <a:solidFill>
-                  <a:srgbClr val="0B3C49"/>
-                </a:solidFill>
-                <a:latin typeface="Calibri" pitchFamily="34" charset="0"/>
-                <a:ea typeface="Calibri" pitchFamily="34" charset="-122"/>
-                <a:cs typeface="Calibri" pitchFamily="34" charset="-120"/>
-              </a:rPr>
-              <a:t>Selection never touches the test set</a:t>
-            </a:r>
-            <a:endParaRPr lang="en-US" sz="1500" dirty="0"/>
-          </a:p>
-        </p:txBody>
-      </p:sp>
-      <p:sp>
-        <p:nvSpPr>
-          <p:cNvPr id="9" name="Text 7"/>
-          <p:cNvSpPr txBox="1"/>
-          <p:nvPr/>
-        </p:nvSpPr>
-        <p:spPr>
-          <a:xfrm>
-            <a:off x="1069848" y="2167128"/>
-            <a:ext cx="10424160" cy="640080"/>
-          </a:xfrm>
-          <a:prstGeom prst="rect">
-            <a:avLst/>
-          </a:prstGeom>
-          <a:noFill/>
-          <a:ln/>
-        </p:spPr>
-        <p:txBody>
-          <a:bodyPr wrap="square" lIns="0" tIns="0" rIns="0" bIns="0" rtlCol="0" anchor="ctr"/>
-          <a:lstStyle/>
-          <a:p>
-            <a:pPr indent="0" marL="0">
-              <a:lnSpc>
-                <a:spcPts val="1700"/>
-              </a:lnSpc>
-              <a:buNone/>
-            </a:pPr>
-            <a:r>
-              <a:rPr lang="en-US" sz="1250" dirty="0">
-                <a:solidFill>
-                  <a:srgbClr val="58626C"/>
-                </a:solidFill>
-                <a:latin typeface="Calibri" pitchFamily="34" charset="0"/>
-                <a:ea typeface="Calibri" pitchFamily="34" charset="-122"/>
-                <a:cs typeface="Calibri" pitchFamily="34" charset="-120"/>
-              </a:rPr>
-              <a:t>Checkpoint chosen on validation. Learning rate chosen on validation — 3e-4 measured worse there: −0.0304, z = −2.98.</a:t>
-            </a:r>
-            <a:endParaRPr lang="en-US" sz="1250" dirty="0"/>
-          </a:p>
-        </p:txBody>
-      </p:sp>
-      <p:sp>
-        <p:nvSpPr>
-          <p:cNvPr id="10" name="Shape 8"/>
-          <p:cNvSpPr/>
-          <p:nvPr/>
-        </p:nvSpPr>
-        <p:spPr>
-          <a:xfrm>
-            <a:off x="566928" y="3136392"/>
-            <a:ext cx="329184" cy="329184"/>
-          </a:xfrm>
-          <a:prstGeom prst="ellipse">
-            <a:avLst/>
-          </a:prstGeom>
-          <a:solidFill>
-            <a:srgbClr val="0B3C49"/>
-          </a:solidFill>
-          <a:ln/>
-        </p:spPr>
-      </p:sp>
-      <p:sp>
-        <p:nvSpPr>
-          <p:cNvPr id="11" name="Text 9"/>
-          <p:cNvSpPr txBox="1"/>
-          <p:nvPr/>
-        </p:nvSpPr>
-        <p:spPr>
-          <a:xfrm>
-            <a:off x="566928" y="3136392"/>
-            <a:ext cx="329184" cy="329184"/>
-          </a:xfrm>
-          <a:prstGeom prst="rect">
-            <a:avLst/>
-          </a:prstGeom>
-          <a:noFill/>
-          <a:ln/>
-        </p:spPr>
-        <p:txBody>
-          <a:bodyPr wrap="square" lIns="0" tIns="0" rIns="0" bIns="0" rtlCol="0" anchor="ctr"/>
-          <a:lstStyle/>
-          <a:p>
-            <a:pPr algn="ctr" indent="0" marL="0">
-              <a:buNone/>
-            </a:pPr>
-            <a:r>
-              <a:rPr lang="en-US" sz="1200" b="1" dirty="0">
-                <a:solidFill>
-                  <a:srgbClr val="FFFFFF"/>
-                </a:solidFill>
-                <a:latin typeface="Calibri" pitchFamily="34" charset="0"/>
-                <a:ea typeface="Calibri" pitchFamily="34" charset="-122"/>
-                <a:cs typeface="Calibri" pitchFamily="34" charset="-120"/>
-              </a:rPr>
-              <a:t>2</a:t>
-            </a:r>
-            <a:endParaRPr lang="en-US" sz="1200" dirty="0"/>
-          </a:p>
-        </p:txBody>
-      </p:sp>
-      <p:sp>
-        <p:nvSpPr>
-          <p:cNvPr id="12" name="Text 10"/>
-          <p:cNvSpPr txBox="1"/>
-          <p:nvPr/>
-        </p:nvSpPr>
-        <p:spPr>
-          <a:xfrm>
-            <a:off x="1069848" y="3081528"/>
-            <a:ext cx="10424160" cy="365760"/>
-          </a:xfrm>
-          <a:prstGeom prst="rect">
-            <a:avLst/>
-          </a:prstGeom>
-          <a:noFill/>
-          <a:ln/>
-        </p:spPr>
-        <p:txBody>
-          <a:bodyPr wrap="square" lIns="0" tIns="0" rIns="0" bIns="0" rtlCol="0" anchor="ctr"/>
-          <a:lstStyle/>
-          <a:p>
-            <a:pPr indent="0" marL="0">
-              <a:buNone/>
-            </a:pPr>
-            <a:r>
-              <a:rPr lang="en-US" sz="1500" b="1" dirty="0">
-                <a:solidFill>
-                  <a:srgbClr val="0B3C49"/>
-                </a:solidFill>
-                <a:latin typeface="Calibri" pitchFamily="34" charset="0"/>
-                <a:ea typeface="Calibri" pitchFamily="34" charset="-122"/>
-                <a:cs typeface="Calibri" pitchFamily="34" charset="-120"/>
-              </a:rPr>
-              <a:t>Disjoint seeds for the α sweep</a:t>
-            </a:r>
-            <a:endParaRPr lang="en-US" sz="1500" dirty="0"/>
-          </a:p>
-        </p:txBody>
-      </p:sp>
-      <p:sp>
-        <p:nvSpPr>
-          <p:cNvPr id="13" name="Text 11"/>
-          <p:cNvSpPr txBox="1"/>
-          <p:nvPr/>
-        </p:nvSpPr>
-        <p:spPr>
-          <a:xfrm>
-            <a:off x="1069848" y="3465576"/>
-            <a:ext cx="10424160" cy="640080"/>
-          </a:xfrm>
-          <a:prstGeom prst="rect">
-            <a:avLst/>
-          </a:prstGeom>
-          <a:noFill/>
-          <a:ln/>
-        </p:spPr>
-        <p:txBody>
-          <a:bodyPr wrap="square" lIns="0" tIns="0" rIns="0" bIns="0" rtlCol="0" anchor="ctr"/>
-          <a:lstStyle/>
-          <a:p>
-            <a:pPr indent="0" marL="0">
-              <a:lnSpc>
-                <a:spcPts val="1700"/>
-              </a:lnSpc>
-              <a:buNone/>
-            </a:pPr>
-            <a:r>
-              <a:rPr lang="en-US" sz="1250" dirty="0">
-                <a:solidFill>
-                  <a:srgbClr val="58626C"/>
-                </a:solidFill>
-                <a:latin typeface="Calibri" pitchFamily="34" charset="0"/>
-                <a:ea typeface="Calibri" pitchFamily="34" charset="-122"/>
-                <a:cs typeface="Calibri" pitchFamily="34" charset="-120"/>
-              </a:rPr>
-              <a:t>The two finalists were re-measured on five seeds disjoint from the screening ones. Selecting and reporting on the same seeds inflates the winner by about one standard deviation.</a:t>
-            </a:r>
-            <a:endParaRPr lang="en-US" sz="1250" dirty="0"/>
-          </a:p>
-        </p:txBody>
-      </p:sp>
-      <p:sp>
-        <p:nvSpPr>
-          <p:cNvPr id="14" name="Shape 12"/>
-          <p:cNvSpPr/>
-          <p:nvPr/>
-        </p:nvSpPr>
-        <p:spPr>
-          <a:xfrm>
-            <a:off x="566928" y="4434840"/>
-            <a:ext cx="329184" cy="329184"/>
-          </a:xfrm>
-          <a:prstGeom prst="ellipse">
-            <a:avLst/>
-          </a:prstGeom>
-          <a:solidFill>
-            <a:srgbClr val="8A5A12"/>
-          </a:solidFill>
-          <a:ln/>
-        </p:spPr>
-      </p:sp>
-      <p:sp>
-        <p:nvSpPr>
-          <p:cNvPr id="15" name="Text 13"/>
-          <p:cNvSpPr txBox="1"/>
-          <p:nvPr/>
-        </p:nvSpPr>
-        <p:spPr>
-          <a:xfrm>
-            <a:off x="566928" y="4434840"/>
-            <a:ext cx="329184" cy="329184"/>
-          </a:xfrm>
-          <a:prstGeom prst="rect">
-            <a:avLst/>
-          </a:prstGeom>
-          <a:noFill/>
-          <a:ln/>
-        </p:spPr>
-        <p:txBody>
-          <a:bodyPr wrap="square" lIns="0" tIns="0" rIns="0" bIns="0" rtlCol="0" anchor="ctr"/>
-          <a:lstStyle/>
-          <a:p>
-            <a:pPr algn="ctr" indent="0" marL="0">
-              <a:buNone/>
-            </a:pPr>
-            <a:r>
-              <a:rPr lang="en-US" sz="1200" b="1" dirty="0">
-                <a:solidFill>
-                  <a:srgbClr val="FFFFFF"/>
-                </a:solidFill>
-                <a:latin typeface="Calibri" pitchFamily="34" charset="0"/>
-                <a:ea typeface="Calibri" pitchFamily="34" charset="-122"/>
-                <a:cs typeface="Calibri" pitchFamily="34" charset="-120"/>
-              </a:rPr>
-              <a:t>3</a:t>
-            </a:r>
-            <a:endParaRPr lang="en-US" sz="1200" dirty="0"/>
-          </a:p>
-        </p:txBody>
-      </p:sp>
-      <p:sp>
-        <p:nvSpPr>
-          <p:cNvPr id="16" name="Text 14"/>
-          <p:cNvSpPr txBox="1"/>
-          <p:nvPr/>
-        </p:nvSpPr>
-        <p:spPr>
-          <a:xfrm>
-            <a:off x="1069848" y="4379976"/>
-            <a:ext cx="10424160" cy="365760"/>
-          </a:xfrm>
-          <a:prstGeom prst="rect">
-            <a:avLst/>
-          </a:prstGeom>
-          <a:noFill/>
-          <a:ln/>
-        </p:spPr>
-        <p:txBody>
-          <a:bodyPr wrap="square" lIns="0" tIns="0" rIns="0" bIns="0" rtlCol="0" anchor="ctr"/>
-          <a:lstStyle/>
-          <a:p>
-            <a:pPr indent="0" marL="0">
-              <a:buNone/>
-            </a:pPr>
-            <a:r>
-              <a:rPr lang="en-US" sz="1500" b="1" dirty="0">
-                <a:solidFill>
-                  <a:srgbClr val="8A5A12"/>
-                </a:solidFill>
-                <a:latin typeface="Calibri" pitchFamily="34" charset="0"/>
-                <a:ea typeface="Calibri" pitchFamily="34" charset="-122"/>
-                <a:cs typeface="Calibri" pitchFamily="34" charset="-120"/>
-              </a:rPr>
-              <a:t>The ± is reproducibility, not generalisation</a:t>
-            </a:r>
-            <a:endParaRPr lang="en-US" sz="1500" dirty="0"/>
-          </a:p>
-        </p:txBody>
-      </p:sp>
-      <p:sp>
-        <p:nvSpPr>
-          <p:cNvPr id="17" name="Text 15"/>
-          <p:cNvSpPr txBox="1"/>
-          <p:nvPr/>
-        </p:nvSpPr>
-        <p:spPr>
-          <a:xfrm>
-            <a:off x="1069848" y="4764024"/>
-            <a:ext cx="10424160" cy="640080"/>
-          </a:xfrm>
-          <a:prstGeom prst="rect">
-            <a:avLst/>
-          </a:prstGeom>
-          <a:noFill/>
-          <a:ln/>
-        </p:spPr>
-        <p:txBody>
-          <a:bodyPr wrap="square" lIns="0" tIns="0" rIns="0" bIns="0" rtlCol="0" anchor="ctr"/>
-          <a:lstStyle/>
-          <a:p>
-            <a:pPr indent="0" marL="0">
-              <a:lnSpc>
-                <a:spcPts val="1700"/>
-              </a:lnSpc>
-              <a:buNone/>
-            </a:pPr>
-            <a:r>
-              <a:rPr lang="en-US" sz="1250" dirty="0">
-                <a:solidFill>
-                  <a:srgbClr val="58626C"/>
-                </a:solidFill>
-                <a:latin typeface="Calibri" pitchFamily="34" charset="0"/>
-                <a:ea typeface="Calibri" pitchFamily="34" charset="-122"/>
-                <a:cs typeface="Calibri" pitchFamily="34" charset="-120"/>
-              </a:rPr>
-              <a:t>It is the spread across five seeds. It does NOT capture test-set sampling error, which with 112 PAI-5 lesions is roughly 0.021 — ten times larger.</a:t>
-            </a:r>
-            <a:endParaRPr lang="en-US" sz="1250" dirty="0"/>
-          </a:p>
-        </p:txBody>
-      </p:sp>
-      <p:sp>
-        <p:nvSpPr>
-          <p:cNvPr id="18" name="Text 16"/>
-          <p:cNvSpPr txBox="1"/>
-          <p:nvPr/>
-        </p:nvSpPr>
-        <p:spPr>
-          <a:xfrm>
-            <a:off x="566928" y="5623560"/>
-            <a:ext cx="11057839" cy="411480"/>
-          </a:xfrm>
-          <a:prstGeom prst="rect">
-            <a:avLst/>
-          </a:prstGeom>
-          <a:noFill/>
-          <a:ln/>
-        </p:spPr>
-        <p:txBody>
-          <a:bodyPr wrap="square" lIns="0" tIns="0" rIns="0" bIns="0" rtlCol="0" anchor="ctr"/>
-          <a:lstStyle/>
-          <a:p>
-            <a:pPr indent="0" marL="0">
-              <a:buNone/>
-            </a:pPr>
-            <a:r>
-              <a:rPr lang="en-US" sz="1500" b="1" i="1" dirty="0">
-                <a:solidFill>
-                  <a:srgbClr val="0B3C49"/>
-                </a:solidFill>
-                <a:latin typeface="Cambria" pitchFamily="34" charset="0"/>
-                <a:ea typeface="Cambria" pitchFamily="34" charset="-122"/>
-                <a:cs typeface="Cambria" pitchFamily="34" charset="-120"/>
-              </a:rPr>
-              <a:t>Differences below 0.021 are reproducible — not proven to generalise. We say which is which.</a:t>
-            </a:r>
-            <a:endParaRPr lang="en-US" sz="1500" dirty="0"/>
-          </a:p>
-        </p:txBody>
-      </p:sp>
-    </p:spTree>
-  </p:cSld>
-  <p:clrMapOvr>
-    <a:masterClrMapping/>
-  </p:clrMapOvr>
-</p:sld>
-</file>
-
 <file path=ppt/slides/slide23.xml><?xml version="1.0" encoding="utf-8"?>
 <p:sld xmlns:a="http://schemas.openxmlformats.org/drawingml/2006/main" xmlns:r="http://schemas.openxmlformats.org/officeDocument/2006/relationships" xmlns:p="http://schemas.openxmlformats.org/presentationml/2006/main">
   <p:cSld name="Slide 23">
@@ -29559,7 +30666,7 @@
                 <a:ea typeface="Calibri" pitchFamily="34" charset="-122"/>
                 <a:cs typeface="Calibri" pitchFamily="34" charset="-120"/>
               </a:rPr>
-              <a:t>FINAL CONSIDERATIONS AND FUTURE WORK</a:t>
+              <a:t>HOW IT WAS CONFIGURED</a:t>
             </a:r>
             <a:endParaRPr lang="en-US" sz="1050" dirty="0"/>
           </a:p>
@@ -29598,7 +30705,7 @@
                 <a:ea typeface="Cambria" pitchFamily="34" charset="-122"/>
                 <a:cs typeface="Cambria" pitchFamily="34" charset="-120"/>
               </a:rPr>
-              <a:t>Conclusions</a:t>
+              <a:t>Statistical discipline</a:t>
             </a:r>
             <a:endParaRPr lang="en-US" sz="2700" dirty="0"/>
           </a:p>
@@ -29637,7 +30744,7 @@
                 <a:ea typeface="Calibri" pitchFamily="34" charset="-122"/>
                 <a:cs typeface="Calibri" pitchFamily="34" charset="-120"/>
               </a:rPr>
-              <a:t>23 / 25</a:t>
+              <a:t>23 / 26</a:t>
             </a:r>
             <a:endParaRPr lang="en-US" sz="1050" dirty="0"/>
           </a:p>
@@ -29645,34 +30752,73 @@
       </p:sp>
       <p:sp>
         <p:nvSpPr>
-          <p:cNvPr id="5" name="Shape 3"/>
+          <p:cNvPr id="5" name="Text 3"/>
+          <p:cNvSpPr txBox="1"/>
+          <p:nvPr/>
+        </p:nvSpPr>
+        <p:spPr>
+          <a:xfrm>
+            <a:off x="566928" y="1188720"/>
+            <a:ext cx="11057839" cy="365760"/>
+          </a:xfrm>
+          <a:prstGeom prst="rect">
+            <a:avLst/>
+          </a:prstGeom>
+          <a:noFill/>
+          <a:ln/>
+        </p:spPr>
+        <p:txBody>
+          <a:bodyPr wrap="square" lIns="0" tIns="0" rIns="0" bIns="0" rtlCol="0" anchor="ctr"/>
+          <a:lstStyle/>
+          <a:p>
+            <a:pPr indent="0" marL="0">
+              <a:buNone/>
+            </a:pPr>
+            <a:r>
+              <a:rPr lang="en-US" sz="1400" dirty="0">
+                <a:solidFill>
+                  <a:srgbClr val="111418"/>
+                </a:solidFill>
+                <a:latin typeface="Calibri" pitchFamily="34" charset="0"/>
+                <a:ea typeface="Calibri" pitchFamily="34" charset="-122"/>
+                <a:cs typeface="Calibri" pitchFamily="34" charset="-120"/>
+              </a:rPr>
+              <a:t>Three safeguards against reporting a number we could not defend.</a:t>
+            </a:r>
+            <a:endParaRPr lang="en-US" sz="1400" dirty="0"/>
+          </a:p>
+        </p:txBody>
+      </p:sp>
+      <p:sp>
+        <p:nvSpPr>
+          <p:cNvPr id="6" name="Shape 4"/>
           <p:cNvSpPr/>
           <p:nvPr/>
         </p:nvSpPr>
         <p:spPr>
           <a:xfrm>
-            <a:off x="566928" y="1271016"/>
-            <a:ext cx="310896" cy="310896"/>
+            <a:off x="566928" y="1837944"/>
+            <a:ext cx="329184" cy="329184"/>
           </a:xfrm>
           <a:prstGeom prst="ellipse">
             <a:avLst/>
           </a:prstGeom>
           <a:solidFill>
-            <a:srgbClr val="A62B1F"/>
+            <a:srgbClr val="0B3C49"/>
           </a:solidFill>
           <a:ln/>
         </p:spPr>
       </p:sp>
       <p:sp>
         <p:nvSpPr>
-          <p:cNvPr id="6" name="Text 4"/>
+          <p:cNvPr id="7" name="Text 5"/>
           <p:cNvSpPr txBox="1"/>
           <p:nvPr/>
         </p:nvSpPr>
         <p:spPr>
           <a:xfrm>
-            <a:off x="566928" y="1271016"/>
-            <a:ext cx="310896" cy="310896"/>
+            <a:off x="566928" y="1837944"/>
+            <a:ext cx="329184" cy="329184"/>
           </a:xfrm>
           <a:prstGeom prst="rect">
             <a:avLst/>
@@ -29704,14 +30850,14 @@
       </p:sp>
       <p:sp>
         <p:nvSpPr>
-          <p:cNvPr id="7" name="Text 5"/>
+          <p:cNvPr id="8" name="Text 6"/>
           <p:cNvSpPr txBox="1"/>
           <p:nvPr/>
         </p:nvSpPr>
         <p:spPr>
           <a:xfrm>
-            <a:off x="1024128" y="1234440"/>
-            <a:ext cx="6400800" cy="384048"/>
+            <a:off x="1069848" y="1783080"/>
+            <a:ext cx="10424160" cy="365760"/>
           </a:xfrm>
           <a:prstGeom prst="rect">
             <a:avLst/>
@@ -29727,7 +30873,7 @@
               <a:buNone/>
             </a:pPr>
             <a:r>
-              <a:rPr lang="en-US" sz="1400" b="1" dirty="0">
+              <a:rPr lang="en-US" sz="1500" b="1" dirty="0">
                 <a:solidFill>
                   <a:srgbClr val="0B3C49"/>
                 </a:solidFill>
@@ -29735,22 +30881,22 @@
                 <a:ea typeface="Calibri" pitchFamily="34" charset="-122"/>
                 <a:cs typeface="Calibri" pitchFamily="34" charset="-120"/>
               </a:rPr>
-              <a:t>The task is geometric, so the prescribed protocol carries a bag-size bias.</a:t>
-            </a:r>
-            <a:endParaRPr lang="en-US" sz="1400" dirty="0"/>
+              <a:t>Selection never touches the test set</a:t>
+            </a:r>
+            <a:endParaRPr lang="en-US" sz="1500" dirty="0"/>
           </a:p>
         </p:txBody>
       </p:sp>
       <p:sp>
         <p:nvSpPr>
-          <p:cNvPr id="8" name="Text 6"/>
+          <p:cNvPr id="9" name="Text 7"/>
           <p:cNvSpPr txBox="1"/>
           <p:nvPr/>
         </p:nvSpPr>
         <p:spPr>
           <a:xfrm>
-            <a:off x="1024128" y="1618488"/>
-            <a:ext cx="6400800" cy="685800"/>
+            <a:off x="1069848" y="2167128"/>
+            <a:ext cx="10424160" cy="640080"/>
           </a:xfrm>
           <a:prstGeom prst="rect">
             <a:avLst/>
@@ -29764,12 +30910,12 @@
           <a:p>
             <a:pPr indent="0" marL="0">
               <a:lnSpc>
-                <a:spcPts val="1600"/>
+                <a:spcPts val="1700"/>
               </a:lnSpc>
               <a:buNone/>
             </a:pPr>
             <a:r>
-              <a:rPr lang="en-US" sz="1150" dirty="0">
+              <a:rPr lang="en-US" sz="1250" dirty="0">
                 <a:solidFill>
                   <a:srgbClr val="58626C"/>
                 </a:solidFill>
@@ -29777,42 +30923,42 @@
                 <a:ea typeface="Calibri" pitchFamily="34" charset="-122"/>
                 <a:cs typeface="Calibri" pitchFamily="34" charset="-120"/>
               </a:rPr>
-              <a:t>The bounding-box mask alone gives macro-F1 0.7708; a random encoder with the full image gives 0.7705. Lesion area is the PAI criterion, so token count is nearly the label.</a:t>
-            </a:r>
-            <a:endParaRPr lang="en-US" sz="1150" dirty="0"/>
+              <a:t>Checkpoint chosen on validation. Learning rate chosen on validation — 3e-4 measured worse there: −0.0304, z = −2.98.</a:t>
+            </a:r>
+            <a:endParaRPr lang="en-US" sz="1250" dirty="0"/>
           </a:p>
         </p:txBody>
       </p:sp>
       <p:sp>
         <p:nvSpPr>
-          <p:cNvPr id="9" name="Shape 7"/>
+          <p:cNvPr id="10" name="Shape 8"/>
           <p:cNvSpPr/>
           <p:nvPr/>
         </p:nvSpPr>
         <p:spPr>
           <a:xfrm>
-            <a:off x="566928" y="2505456"/>
-            <a:ext cx="310896" cy="310896"/>
+            <a:off x="566928" y="3136392"/>
+            <a:ext cx="329184" cy="329184"/>
           </a:xfrm>
           <a:prstGeom prst="ellipse">
             <a:avLst/>
           </a:prstGeom>
           <a:solidFill>
-            <a:srgbClr val="1F6F43"/>
+            <a:srgbClr val="0B3C49"/>
           </a:solidFill>
           <a:ln/>
         </p:spPr>
       </p:sp>
       <p:sp>
         <p:nvSpPr>
-          <p:cNvPr id="10" name="Text 8"/>
+          <p:cNvPr id="11" name="Text 9"/>
           <p:cNvSpPr txBox="1"/>
           <p:nvPr/>
         </p:nvSpPr>
         <p:spPr>
           <a:xfrm>
-            <a:off x="566928" y="2505456"/>
-            <a:ext cx="310896" cy="310896"/>
+            <a:off x="566928" y="3136392"/>
+            <a:ext cx="329184" cy="329184"/>
           </a:xfrm>
           <a:prstGeom prst="rect">
             <a:avLst/>
@@ -29844,14 +30990,14 @@
       </p:sp>
       <p:sp>
         <p:nvSpPr>
-          <p:cNvPr id="11" name="Text 9"/>
+          <p:cNvPr id="12" name="Text 10"/>
           <p:cNvSpPr txBox="1"/>
           <p:nvPr/>
         </p:nvSpPr>
         <p:spPr>
           <a:xfrm>
-            <a:off x="1024128" y="2468880"/>
-            <a:ext cx="6400800" cy="384048"/>
+            <a:off x="1069848" y="3081528"/>
+            <a:ext cx="10424160" cy="365760"/>
           </a:xfrm>
           <a:prstGeom prst="rect">
             <a:avLst/>
@@ -29867,7 +31013,7 @@
               <a:buNone/>
             </a:pPr>
             <a:r>
-              <a:rPr lang="en-US" sz="1400" b="1" dirty="0">
+              <a:rPr lang="en-US" sz="1500" b="1" dirty="0">
                 <a:solidFill>
                   <a:srgbClr val="0B3C49"/>
                 </a:solidFill>
@@ -29875,22 +31021,22 @@
                 <a:ea typeface="Calibri" pitchFamily="34" charset="-122"/>
                 <a:cs typeface="Calibri" pitchFamily="34" charset="-120"/>
               </a:rPr>
-              <a:t>Removing the bias while keeping localisation reveals the encoder.</a:t>
-            </a:r>
-            <a:endParaRPr lang="en-US" sz="1400" dirty="0"/>
+              <a:t>Disjoint seeds for the α sweep</a:t>
+            </a:r>
+            <a:endParaRPr lang="en-US" sz="1500" dirty="0"/>
           </a:p>
         </p:txBody>
       </p:sp>
       <p:sp>
         <p:nvSpPr>
-          <p:cNvPr id="12" name="Text 10"/>
+          <p:cNvPr id="13" name="Text 11"/>
           <p:cNvSpPr txBox="1"/>
           <p:nvPr/>
         </p:nvSpPr>
         <p:spPr>
           <a:xfrm>
-            <a:off x="1024128" y="2852928"/>
-            <a:ext cx="6400800" cy="685800"/>
+            <a:off x="1069848" y="3465576"/>
+            <a:ext cx="10424160" cy="640080"/>
           </a:xfrm>
           <a:prstGeom prst="rect">
             <a:avLst/>
@@ -29904,12 +31050,12 @@
           <a:p>
             <a:pPr indent="0" marL="0">
               <a:lnSpc>
-                <a:spcPts val="1600"/>
+                <a:spcPts val="1700"/>
               </a:lnSpc>
               <a:buNone/>
             </a:pPr>
             <a:r>
-              <a:rPr lang="en-US" sz="1150" dirty="0">
+              <a:rPr lang="en-US" sz="1250" dirty="0">
                 <a:solidFill>
                   <a:srgbClr val="58626C"/>
                 </a:solidFill>
@@ -29917,42 +31063,42 @@
                 <a:ea typeface="Calibri" pitchFamily="34" charset="-122"/>
                 <a:cs typeface="Calibri" pitchFamily="34" charset="-120"/>
               </a:rPr>
-              <a:t>Up to +32 % PR-AUC on the minority class (z = 8.72), on all three values of K, with the unselected checkpoint too, and +28.8 % with an instance-level MIL head.</a:t>
-            </a:r>
-            <a:endParaRPr lang="en-US" sz="1150" dirty="0"/>
+              <a:t>The two finalists were re-measured on five seeds disjoint from the screening ones. Selecting and reporting on the same seeds inflates the winner by about one standard deviation.</a:t>
+            </a:r>
+            <a:endParaRPr lang="en-US" sz="1250" dirty="0"/>
           </a:p>
         </p:txBody>
       </p:sp>
       <p:sp>
         <p:nvSpPr>
-          <p:cNvPr id="13" name="Shape 11"/>
+          <p:cNvPr id="14" name="Shape 12"/>
           <p:cNvSpPr/>
           <p:nvPr/>
         </p:nvSpPr>
         <p:spPr>
           <a:xfrm>
-            <a:off x="566928" y="3739896"/>
-            <a:ext cx="310896" cy="310896"/>
+            <a:off x="566928" y="4434840"/>
+            <a:ext cx="329184" cy="329184"/>
           </a:xfrm>
           <a:prstGeom prst="ellipse">
             <a:avLst/>
           </a:prstGeom>
           <a:solidFill>
-            <a:srgbClr val="1F6F43"/>
+            <a:srgbClr val="8A5A12"/>
           </a:solidFill>
           <a:ln/>
         </p:spPr>
       </p:sp>
       <p:sp>
         <p:nvSpPr>
-          <p:cNvPr id="14" name="Text 12"/>
+          <p:cNvPr id="15" name="Text 13"/>
           <p:cNvSpPr txBox="1"/>
           <p:nvPr/>
         </p:nvSpPr>
         <p:spPr>
           <a:xfrm>
-            <a:off x="566928" y="3739896"/>
-            <a:ext cx="310896" cy="310896"/>
+            <a:off x="566928" y="4434840"/>
+            <a:ext cx="329184" cy="329184"/>
           </a:xfrm>
           <a:prstGeom prst="rect">
             <a:avLst/>
@@ -29984,14 +31130,14 @@
       </p:sp>
       <p:sp>
         <p:nvSpPr>
-          <p:cNvPr id="15" name="Text 13"/>
+          <p:cNvPr id="16" name="Text 14"/>
           <p:cNvSpPr txBox="1"/>
           <p:nvPr/>
         </p:nvSpPr>
         <p:spPr>
           <a:xfrm>
-            <a:off x="1024128" y="3703320"/>
-            <a:ext cx="6400800" cy="384048"/>
+            <a:off x="1069848" y="4379976"/>
+            <a:ext cx="10424160" cy="365760"/>
           </a:xfrm>
           <a:prstGeom prst="rect">
             <a:avLst/>
@@ -30007,30 +31153,30 @@
               <a:buNone/>
             </a:pPr>
             <a:r>
-              <a:rPr lang="en-US" sz="1400" b="1" dirty="0">
+              <a:rPr lang="en-US" sz="1500" b="1" dirty="0">
                 <a:solidFill>
-                  <a:srgbClr val="0B3C49"/>
+                  <a:srgbClr val="8A5A12"/>
                 </a:solidFill>
                 <a:latin typeface="Calibri" pitchFamily="34" charset="0"/>
                 <a:ea typeface="Calibri" pitchFamily="34" charset="-122"/>
                 <a:cs typeface="Calibri" pitchFamily="34" charset="-120"/>
               </a:rPr>
-              <a:t>Our latent-space novelty beats every baseline on the primary metric.</a:t>
-            </a:r>
-            <a:endParaRPr lang="en-US" sz="1400" dirty="0"/>
+              <a:t>The ± is reproducibility, not generalisation</a:t>
+            </a:r>
+            <a:endParaRPr lang="en-US" sz="1500" dirty="0"/>
           </a:p>
         </p:txBody>
       </p:sp>
       <p:sp>
         <p:nvSpPr>
-          <p:cNvPr id="16" name="Text 14"/>
+          <p:cNvPr id="17" name="Text 15"/>
           <p:cNvSpPr txBox="1"/>
           <p:nvPr/>
         </p:nvSpPr>
         <p:spPr>
           <a:xfrm>
-            <a:off x="1024128" y="4087368"/>
-            <a:ext cx="6400800" cy="685800"/>
+            <a:off x="1069848" y="4764024"/>
+            <a:ext cx="10424160" cy="640080"/>
           </a:xfrm>
           <a:prstGeom prst="rect">
             <a:avLst/>
@@ -30044,12 +31190,12 @@
           <a:p>
             <a:pPr indent="0" marL="0">
               <a:lnSpc>
-                <a:spcPts val="1600"/>
+                <a:spcPts val="1700"/>
               </a:lnSpc>
               <a:buNone/>
             </a:pPr>
             <a:r>
-              <a:rPr lang="en-US" sz="1150" dirty="0">
+              <a:rPr lang="en-US" sz="1250" dirty="0">
                 <a:solidFill>
                   <a:srgbClr val="58626C"/>
                 </a:solidFill>
@@ -30057,68 +31203,9 @@
                 <a:ea typeface="Calibri" pitchFamily="34" charset="-122"/>
                 <a:cs typeface="Calibri" pitchFamily="34" charset="-120"/>
               </a:rPr>
-              <a:t>+0.0168 over oversampling (z = 2.50), with an interior optimum at α = 0.5 that the ICC of the views explains.</a:t>
-            </a:r>
-            <a:endParaRPr lang="en-US" sz="1150" dirty="0"/>
-          </a:p>
-        </p:txBody>
-      </p:sp>
-      <p:sp>
-        <p:nvSpPr>
-          <p:cNvPr id="17" name="Text 15"/>
-          <p:cNvSpPr txBox="1"/>
-          <p:nvPr/>
-        </p:nvSpPr>
-        <p:spPr>
-          <a:xfrm>
-            <a:off x="566928" y="4937760"/>
-            <a:ext cx="6766560" cy="777240"/>
-          </a:xfrm>
-          <a:prstGeom prst="rect">
-            <a:avLst/>
-          </a:prstGeom>
-          <a:noFill/>
-          <a:ln/>
-        </p:spPr>
-        <p:txBody>
-          <a:bodyPr wrap="square" lIns="0" tIns="0" rIns="0" bIns="0" rtlCol="0" anchor="ctr"/>
-          <a:lstStyle/>
-          <a:p>
-            <a:pPr indent="0" marL="0">
-              <a:lnSpc>
-                <a:spcPts val="1600"/>
-              </a:lnSpc>
-              <a:buNone/>
-            </a:pPr>
-            <a:r>
-              <a:rPr lang="en-US" sz="1150" b="1" dirty="0">
-                <a:solidFill>
-                  <a:srgbClr val="0B3C49"/>
-                </a:solidFill>
-                <a:latin typeface="Calibri" pitchFamily="34" charset="0"/>
-                <a:ea typeface="Calibri" pitchFamily="34" charset="-122"/>
-                <a:cs typeface="Calibri" pitchFamily="34" charset="-120"/>
-              </a:rPr>
-              <a:t>Training schedule completed.  </a:t>
-            </a:r>
-            <a:pPr indent="0" marL="0">
-              <a:lnSpc>
-                <a:spcPts val="1600"/>
-              </a:lnSpc>
-              <a:buNone/>
-            </a:pPr>
-            <a:r>
-              <a:rPr lang="en-US" sz="1150" dirty="0">
-                <a:solidFill>
-                  <a:srgbClr val="111418"/>
-                </a:solidFill>
-                <a:latin typeface="Calibri" pitchFamily="34" charset="0"/>
-                <a:ea typeface="Calibri" pitchFamily="34" charset="-122"/>
-                <a:cs typeface="Calibri" pitchFamily="34" charset="-120"/>
-              </a:rPr>
-              <a:t>289 of the 300 scheduled epochs, halted by our own power limiter. The last 11 change nothing measurable — quality had plateaued by epoch 69 (z = +1.15 across the whole run) — and we did not have to assume it: we extracted the final epoch-288 encoder and measured it. It still beats the random baseline by +16 % on the primary metric (z = 3.15).</a:t>
-            </a:r>
-            <a:endParaRPr lang="en-US" sz="1150" dirty="0"/>
+              <a:t>It is the spread across five seeds. It does NOT capture test-set sampling error, which with 112 PAI-5 lesions is roughly 0.021 — ten times larger.</a:t>
+            </a:r>
+            <a:endParaRPr lang="en-US" sz="1250" dirty="0"/>
           </a:p>
         </p:txBody>
       </p:sp>
@@ -30130,8 +31217,8 @@
         </p:nvSpPr>
         <p:spPr>
           <a:xfrm>
-            <a:off x="566928" y="5806440"/>
-            <a:ext cx="10515600" cy="457200"/>
+            <a:off x="566928" y="5623560"/>
+            <a:ext cx="11057839" cy="411480"/>
           </a:xfrm>
           <a:prstGeom prst="rect">
             <a:avLst/>
@@ -30155,7 +31242,7 @@
                 <a:ea typeface="Cambria" pitchFamily="34" charset="-122"/>
                 <a:cs typeface="Cambria" pitchFamily="34" charset="-120"/>
               </a:rPr>
-              <a:t>There is no “best model” — only the best model for a given reading, and choosing that reading is the work.</a:t>
+              <a:t>Differences below 0.021 are reproducible — not proven to generalise. We say which is which.</a:t>
             </a:r>
             <a:endParaRPr lang="en-US" sz="1500" dirty="0"/>
           </a:p>
@@ -30226,7 +31313,7 @@
                 <a:ea typeface="Calibri" pitchFamily="34" charset="-122"/>
                 <a:cs typeface="Calibri" pitchFamily="34" charset="-120"/>
               </a:rPr>
-              <a:t>FINAL CONSIDERATIONS</a:t>
+              <a:t>FINAL CONSIDERATIONS AND FUTURE WORK</a:t>
             </a:r>
             <a:endParaRPr lang="en-US" sz="1050" dirty="0"/>
           </a:p>
@@ -30265,7 +31352,7 @@
                 <a:ea typeface="Cambria" pitchFamily="34" charset="-122"/>
                 <a:cs typeface="Cambria" pitchFamily="34" charset="-120"/>
               </a:rPr>
-              <a:t>Declared limitations, and what comes next</a:t>
+              <a:t>Conclusions</a:t>
             </a:r>
             <a:endParaRPr lang="en-US" sz="2700" dirty="0"/>
           </a:p>
@@ -30304,7 +31391,7 @@
                 <a:ea typeface="Calibri" pitchFamily="34" charset="-122"/>
                 <a:cs typeface="Calibri" pitchFamily="34" charset="-120"/>
               </a:rPr>
-              <a:t>24 / 25</a:t>
+              <a:t>24 / 26</a:t>
             </a:r>
             <a:endParaRPr lang="en-US" sz="1050" dirty="0"/>
           </a:p>
@@ -30318,16 +31405,14 @@
         </p:nvSpPr>
         <p:spPr>
           <a:xfrm>
-            <a:off x="566928" y="1234440"/>
-            <a:ext cx="5394960" cy="457200"/>
-          </a:xfrm>
-          <a:prstGeom prst="roundRect">
-            <a:avLst>
-              <a:gd name="adj" fmla="val 12000"/>
-            </a:avLst>
+            <a:off x="566928" y="1271016"/>
+            <a:ext cx="310896" cy="310896"/>
+          </a:xfrm>
+          <a:prstGeom prst="ellipse">
+            <a:avLst/>
           </a:prstGeom>
           <a:solidFill>
-            <a:srgbClr val="FDF7EC"/>
+            <a:srgbClr val="A62B1F"/>
           </a:solidFill>
           <a:ln/>
         </p:spPr>
@@ -30340,8 +31425,8 @@
         </p:nvSpPr>
         <p:spPr>
           <a:xfrm>
-            <a:off x="749808" y="1325880"/>
-            <a:ext cx="5029200" cy="292608"/>
+            <a:off x="566928" y="1271016"/>
+            <a:ext cx="310896" cy="310896"/>
           </a:xfrm>
           <a:prstGeom prst="rect">
             <a:avLst/>
@@ -30353,93 +31438,73 @@
           <a:bodyPr wrap="square" lIns="0" tIns="0" rIns="0" bIns="0" rtlCol="0" anchor="ctr"/>
           <a:lstStyle/>
           <a:p>
-            <a:pPr indent="0" marL="0">
+            <a:pPr algn="ctr" indent="0" marL="0">
               <a:buNone/>
             </a:pPr>
             <a:r>
-              <a:rPr lang="en-US" sz="1600" b="1" dirty="0">
+              <a:rPr lang="en-US" sz="1200" b="1" dirty="0">
                 <a:solidFill>
-                  <a:srgbClr val="8A5A12"/>
-                </a:solidFill>
-                <a:latin typeface="Cambria" pitchFamily="34" charset="0"/>
-                <a:ea typeface="Cambria" pitchFamily="34" charset="-122"/>
-                <a:cs typeface="Cambria" pitchFamily="34" charset="-120"/>
-              </a:rPr>
-              <a:t>Declared limitations</a:t>
-            </a:r>
-            <a:endParaRPr lang="en-US" sz="1600" dirty="0"/>
-          </a:p>
-        </p:txBody>
-      </p:sp>
-      <p:sp>
-        <p:nvSpPr>
-          <p:cNvPr id="7" name="Shape 5"/>
-          <p:cNvSpPr/>
-          <p:nvPr/>
-        </p:nvSpPr>
-        <p:spPr>
-          <a:xfrm>
-            <a:off x="749808" y="1938528"/>
-            <a:ext cx="137160" cy="137160"/>
-          </a:xfrm>
-          <a:prstGeom prst="ellipse">
-            <a:avLst/>
-          </a:prstGeom>
-          <a:solidFill>
-            <a:srgbClr val="8A5A12"/>
-          </a:solidFill>
-          <a:ln/>
-        </p:spPr>
-      </p:sp>
-      <p:sp>
-        <p:nvSpPr>
-          <p:cNvPr id="8" name="Text 6"/>
-          <p:cNvSpPr txBox="1"/>
-          <p:nvPr/>
-        </p:nvSpPr>
-        <p:spPr>
-          <a:xfrm>
-            <a:off x="1024128" y="1874520"/>
-            <a:ext cx="4754880" cy="292608"/>
-          </a:xfrm>
-          <a:prstGeom prst="rect">
-            <a:avLst/>
-          </a:prstGeom>
-          <a:noFill/>
-          <a:ln/>
-        </p:spPr>
-        <p:txBody>
-          <a:bodyPr wrap="square" lIns="0" tIns="0" rIns="0" bIns="0" rtlCol="0" anchor="ctr"/>
-          <a:lstStyle/>
-          <a:p>
-            <a:pPr indent="0" marL="0">
-              <a:buNone/>
-            </a:pPr>
-            <a:r>
-              <a:rPr lang="en-US" sz="1300" b="1" dirty="0">
-                <a:solidFill>
-                  <a:srgbClr val="111418"/>
+                  <a:srgbClr val="FFFFFF"/>
                 </a:solidFill>
                 <a:latin typeface="Calibri" pitchFamily="34" charset="0"/>
                 <a:ea typeface="Calibri" pitchFamily="34" charset="-122"/>
                 <a:cs typeface="Calibri" pitchFamily="34" charset="-120"/>
               </a:rPr>
-              <a:t>Checkpoint selection</a:t>
-            </a:r>
-            <a:endParaRPr lang="en-US" sz="1300" dirty="0"/>
+              <a:t>1</a:t>
+            </a:r>
+            <a:endParaRPr lang="en-US" sz="1200" dirty="0"/>
           </a:p>
         </p:txBody>
       </p:sp>
       <p:sp>
         <p:nvSpPr>
-          <p:cNvPr id="9" name="Text 7"/>
+          <p:cNvPr id="7" name="Text 5"/>
           <p:cNvSpPr txBox="1"/>
           <p:nvPr/>
         </p:nvSpPr>
         <p:spPr>
           <a:xfrm>
-            <a:off x="1024128" y="2167128"/>
-            <a:ext cx="4754880" cy="548640"/>
+            <a:off x="1024128" y="1234440"/>
+            <a:ext cx="6400800" cy="384048"/>
+          </a:xfrm>
+          <a:prstGeom prst="rect">
+            <a:avLst/>
+          </a:prstGeom>
+          <a:noFill/>
+          <a:ln/>
+        </p:spPr>
+        <p:txBody>
+          <a:bodyPr wrap="square" lIns="0" tIns="0" rIns="0" bIns="0" rtlCol="0" anchor="ctr"/>
+          <a:lstStyle/>
+          <a:p>
+            <a:pPr indent="0" marL="0">
+              <a:buNone/>
+            </a:pPr>
+            <a:r>
+              <a:rPr lang="en-US" sz="1400" b="1" dirty="0">
+                <a:solidFill>
+                  <a:srgbClr val="0B3C49"/>
+                </a:solidFill>
+                <a:latin typeface="Calibri" pitchFamily="34" charset="0"/>
+                <a:ea typeface="Calibri" pitchFamily="34" charset="-122"/>
+                <a:cs typeface="Calibri" pitchFamily="34" charset="-120"/>
+              </a:rPr>
+              <a:t>The task is geometric, so the prescribed protocol carries a bag-size bias.</a:t>
+            </a:r>
+            <a:endParaRPr lang="en-US" sz="1400" dirty="0"/>
+          </a:p>
+        </p:txBody>
+      </p:sp>
+      <p:sp>
+        <p:nvSpPr>
+          <p:cNvPr id="8" name="Text 6"/>
+          <p:cNvSpPr txBox="1"/>
+          <p:nvPr/>
+        </p:nvSpPr>
+        <p:spPr>
+          <a:xfrm>
+            <a:off x="1024128" y="1618488"/>
+            <a:ext cx="6400800" cy="685800"/>
           </a:xfrm>
           <a:prstGeom prst="rect">
             <a:avLst/>
@@ -30466,7 +31531,7 @@
                 <a:ea typeface="Calibri" pitchFamily="34" charset="-122"/>
                 <a:cs typeface="Calibri" pitchFamily="34" charset="-120"/>
               </a:rPr>
-              <a:t>Better on the criterion we selected it with, worse on size-blind readings — the same bias we denounce.</a:t>
+              <a:t>The bounding-box mask alone gives macro-F1 0.7708; a random encoder with the full image gives 0.7705. Lesion area is the PAI criterion, so token count is nearly the label.</a:t>
             </a:r>
             <a:endParaRPr lang="en-US" sz="1150" dirty="0"/>
           </a:p>
@@ -30474,34 +31539,34 @@
       </p:sp>
       <p:sp>
         <p:nvSpPr>
-          <p:cNvPr id="10" name="Shape 8"/>
+          <p:cNvPr id="9" name="Shape 7"/>
           <p:cNvSpPr/>
           <p:nvPr/>
         </p:nvSpPr>
         <p:spPr>
           <a:xfrm>
-            <a:off x="749808" y="2944368"/>
-            <a:ext cx="137160" cy="137160"/>
+            <a:off x="566928" y="2505456"/>
+            <a:ext cx="310896" cy="310896"/>
           </a:xfrm>
           <a:prstGeom prst="ellipse">
             <a:avLst/>
           </a:prstGeom>
           <a:solidFill>
-            <a:srgbClr val="8A5A12"/>
+            <a:srgbClr val="1F6F43"/>
           </a:solidFill>
           <a:ln/>
         </p:spPr>
       </p:sp>
       <p:sp>
         <p:nvSpPr>
-          <p:cNvPr id="11" name="Text 9"/>
+          <p:cNvPr id="10" name="Text 8"/>
           <p:cNvSpPr txBox="1"/>
           <p:nvPr/>
         </p:nvSpPr>
         <p:spPr>
           <a:xfrm>
-            <a:off x="1024128" y="2880360"/>
-            <a:ext cx="4754880" cy="292608"/>
+            <a:off x="566928" y="2505456"/>
+            <a:ext cx="310896" cy="310896"/>
           </a:xfrm>
           <a:prstGeom prst="rect">
             <a:avLst/>
@@ -30513,21 +31578,60 @@
           <a:bodyPr wrap="square" lIns="0" tIns="0" rIns="0" bIns="0" rtlCol="0" anchor="ctr"/>
           <a:lstStyle/>
           <a:p>
-            <a:pPr indent="0" marL="0">
+            <a:pPr algn="ctr" indent="0" marL="0">
               <a:buNone/>
             </a:pPr>
             <a:r>
-              <a:rPr lang="en-US" sz="1300" b="1" dirty="0">
+              <a:rPr lang="en-US" sz="1200" b="1" dirty="0">
                 <a:solidFill>
-                  <a:srgbClr val="111418"/>
+                  <a:srgbClr val="FFFFFF"/>
                 </a:solidFill>
                 <a:latin typeface="Calibri" pitchFamily="34" charset="0"/>
                 <a:ea typeface="Calibri" pitchFamily="34" charset="-122"/>
                 <a:cs typeface="Calibri" pitchFamily="34" charset="-120"/>
               </a:rPr>
-              <a:t>α sweep on a fixed encoder</a:t>
-            </a:r>
-            <a:endParaRPr lang="en-US" sz="1300" dirty="0"/>
+              <a:t>2</a:t>
+            </a:r>
+            <a:endParaRPr lang="en-US" sz="1200" dirty="0"/>
+          </a:p>
+        </p:txBody>
+      </p:sp>
+      <p:sp>
+        <p:nvSpPr>
+          <p:cNvPr id="11" name="Text 9"/>
+          <p:cNvSpPr txBox="1"/>
+          <p:nvPr/>
+        </p:nvSpPr>
+        <p:spPr>
+          <a:xfrm>
+            <a:off x="1024128" y="2468880"/>
+            <a:ext cx="6400800" cy="384048"/>
+          </a:xfrm>
+          <a:prstGeom prst="rect">
+            <a:avLst/>
+          </a:prstGeom>
+          <a:noFill/>
+          <a:ln/>
+        </p:spPr>
+        <p:txBody>
+          <a:bodyPr wrap="square" lIns="0" tIns="0" rIns="0" bIns="0" rtlCol="0" anchor="ctr"/>
+          <a:lstStyle/>
+          <a:p>
+            <a:pPr indent="0" marL="0">
+              <a:buNone/>
+            </a:pPr>
+            <a:r>
+              <a:rPr lang="en-US" sz="1400" b="1" dirty="0">
+                <a:solidFill>
+                  <a:srgbClr val="0B3C49"/>
+                </a:solidFill>
+                <a:latin typeface="Calibri" pitchFamily="34" charset="0"/>
+                <a:ea typeface="Calibri" pitchFamily="34" charset="-122"/>
+                <a:cs typeface="Calibri" pitchFamily="34" charset="-120"/>
+              </a:rPr>
+              <a:t>Removing the bias while keeping localisation reveals the encoder.</a:t>
+            </a:r>
+            <a:endParaRPr lang="en-US" sz="1400" dirty="0"/>
           </a:p>
         </p:txBody>
       </p:sp>
@@ -30539,8 +31643,8 @@
         </p:nvSpPr>
         <p:spPr>
           <a:xfrm>
-            <a:off x="1024128" y="3172968"/>
-            <a:ext cx="4754880" cy="548640"/>
+            <a:off x="1024128" y="2852928"/>
+            <a:ext cx="6400800" cy="685800"/>
           </a:xfrm>
           <a:prstGeom prst="rect">
             <a:avLst/>
@@ -30567,7 +31671,7 @@
                 <a:ea typeface="Calibri" pitchFamily="34" charset="-122"/>
                 <a:cs typeface="Calibri" pitchFamily="34" charset="-120"/>
               </a:rPr>
-              <a:t>Deliberate, to isolate the parameter — but it means the sweep is not encoder-agnostic.</a:t>
+              <a:t>Up to +32 % PR-AUC on the minority class (z = 8.72), on all three values of K, with the unselected checkpoint too, and +28.8 % with an instance-level MIL head.</a:t>
             </a:r>
             <a:endParaRPr lang="en-US" sz="1150" dirty="0"/>
           </a:p>
@@ -30581,14 +31685,14 @@
         </p:nvSpPr>
         <p:spPr>
           <a:xfrm>
-            <a:off x="749808" y="3950208"/>
-            <a:ext cx="137160" cy="137160"/>
+            <a:off x="566928" y="3739896"/>
+            <a:ext cx="310896" cy="310896"/>
           </a:xfrm>
           <a:prstGeom prst="ellipse">
             <a:avLst/>
           </a:prstGeom>
           <a:solidFill>
-            <a:srgbClr val="8A5A12"/>
+            <a:srgbClr val="1F6F43"/>
           </a:solidFill>
           <a:ln/>
         </p:spPr>
@@ -30601,8 +31705,8 @@
         </p:nvSpPr>
         <p:spPr>
           <a:xfrm>
-            <a:off x="1024128" y="3886200"/>
-            <a:ext cx="4754880" cy="292608"/>
+            <a:off x="566928" y="3739896"/>
+            <a:ext cx="310896" cy="310896"/>
           </a:xfrm>
           <a:prstGeom prst="rect">
             <a:avLst/>
@@ -30614,21 +31718,21 @@
           <a:bodyPr wrap="square" lIns="0" tIns="0" rIns="0" bIns="0" rtlCol="0" anchor="ctr"/>
           <a:lstStyle/>
           <a:p>
-            <a:pPr indent="0" marL="0">
+            <a:pPr algn="ctr" indent="0" marL="0">
               <a:buNone/>
             </a:pPr>
             <a:r>
-              <a:rPr lang="en-US" sz="1300" b="1" dirty="0">
+              <a:rPr lang="en-US" sz="1200" b="1" dirty="0">
                 <a:solidFill>
-                  <a:srgbClr val="111418"/>
+                  <a:srgbClr val="FFFFFF"/>
                 </a:solidFill>
                 <a:latin typeface="Calibri" pitchFamily="34" charset="0"/>
                 <a:ea typeface="Calibri" pitchFamily="34" charset="-122"/>
                 <a:cs typeface="Calibri" pitchFamily="34" charset="-120"/>
               </a:rPr>
-              <a:t>± is not generalisation</a:t>
-            </a:r>
-            <a:endParaRPr lang="en-US" sz="1300" dirty="0"/>
+              <a:t>3</a:t>
+            </a:r>
+            <a:endParaRPr lang="en-US" sz="1200" dirty="0"/>
           </a:p>
         </p:txBody>
       </p:sp>
@@ -30640,8 +31744,47 @@
         </p:nvSpPr>
         <p:spPr>
           <a:xfrm>
-            <a:off x="1024128" y="4178808"/>
-            <a:ext cx="4754880" cy="548640"/>
+            <a:off x="1024128" y="3703320"/>
+            <a:ext cx="6400800" cy="384048"/>
+          </a:xfrm>
+          <a:prstGeom prst="rect">
+            <a:avLst/>
+          </a:prstGeom>
+          <a:noFill/>
+          <a:ln/>
+        </p:spPr>
+        <p:txBody>
+          <a:bodyPr wrap="square" lIns="0" tIns="0" rIns="0" bIns="0" rtlCol="0" anchor="ctr"/>
+          <a:lstStyle/>
+          <a:p>
+            <a:pPr indent="0" marL="0">
+              <a:buNone/>
+            </a:pPr>
+            <a:r>
+              <a:rPr lang="en-US" sz="1400" b="1" dirty="0">
+                <a:solidFill>
+                  <a:srgbClr val="0B3C49"/>
+                </a:solidFill>
+                <a:latin typeface="Calibri" pitchFamily="34" charset="0"/>
+                <a:ea typeface="Calibri" pitchFamily="34" charset="-122"/>
+                <a:cs typeface="Calibri" pitchFamily="34" charset="-120"/>
+              </a:rPr>
+              <a:t>Our latent-space novelty beats every baseline on the primary metric.</a:t>
+            </a:r>
+            <a:endParaRPr lang="en-US" sz="1400" dirty="0"/>
+          </a:p>
+        </p:txBody>
+      </p:sp>
+      <p:sp>
+        <p:nvSpPr>
+          <p:cNvPr id="16" name="Text 14"/>
+          <p:cNvSpPr txBox="1"/>
+          <p:nvPr/>
+        </p:nvSpPr>
+        <p:spPr>
+          <a:xfrm>
+            <a:off x="1024128" y="4087368"/>
+            <a:ext cx="6400800" cy="685800"/>
           </a:xfrm>
           <a:prstGeom prst="rect">
             <a:avLst/>
@@ -30668,31 +31811,11 @@
                 <a:ea typeface="Calibri" pitchFamily="34" charset="-122"/>
                 <a:cs typeface="Calibri" pitchFamily="34" charset="-120"/>
               </a:rPr>
-              <a:t>Spread across seeds; test sampling error is ten times larger.</a:t>
+              <a:t>+0.0168 over oversampling (z = 2.50), with an interior optimum at α = 0.5 that the ICC of the views explains.</a:t>
             </a:r>
             <a:endParaRPr lang="en-US" sz="1150" dirty="0"/>
           </a:p>
         </p:txBody>
-      </p:sp>
-      <p:sp>
-        <p:nvSpPr>
-          <p:cNvPr id="16" name="Shape 14"/>
-          <p:cNvSpPr/>
-          <p:nvPr/>
-        </p:nvSpPr>
-        <p:spPr>
-          <a:xfrm>
-            <a:off x="749808" y="4956048"/>
-            <a:ext cx="137160" cy="137160"/>
-          </a:xfrm>
-          <a:prstGeom prst="ellipse">
-            <a:avLst/>
-          </a:prstGeom>
-          <a:solidFill>
-            <a:srgbClr val="8A5A12"/>
-          </a:solidFill>
-          <a:ln/>
-        </p:spPr>
       </p:sp>
       <p:sp>
         <p:nvSpPr>
@@ -30702,8 +31825,8 @@
         </p:nvSpPr>
         <p:spPr>
           <a:xfrm>
-            <a:off x="1024128" y="4892040"/>
-            <a:ext cx="4754880" cy="292608"/>
+            <a:off x="566928" y="4937760"/>
+            <a:ext cx="6766560" cy="777240"/>
           </a:xfrm>
           <a:prstGeom prst="rect">
             <a:avLst/>
@@ -30716,10 +31839,30 @@
           <a:lstStyle/>
           <a:p>
             <a:pPr indent="0" marL="0">
+              <a:lnSpc>
+                <a:spcPts val="1600"/>
+              </a:lnSpc>
               <a:buNone/>
             </a:pPr>
             <a:r>
-              <a:rPr lang="en-US" sz="1300" b="1" dirty="0">
+              <a:rPr lang="en-US" sz="1150" b="1" dirty="0">
+                <a:solidFill>
+                  <a:srgbClr val="0B3C49"/>
+                </a:solidFill>
+                <a:latin typeface="Calibri" pitchFamily="34" charset="0"/>
+                <a:ea typeface="Calibri" pitchFamily="34" charset="-122"/>
+                <a:cs typeface="Calibri" pitchFamily="34" charset="-120"/>
+              </a:rPr>
+              <a:t>Training schedule completed.  </a:t>
+            </a:r>
+            <a:pPr indent="0" marL="0">
+              <a:lnSpc>
+                <a:spcPts val="1600"/>
+              </a:lnSpc>
+              <a:buNone/>
+            </a:pPr>
+            <a:r>
+              <a:rPr lang="en-US" sz="1150" dirty="0">
                 <a:solidFill>
                   <a:srgbClr val="111418"/>
                 </a:solidFill>
@@ -30727,9 +31870,9 @@
                 <a:ea typeface="Calibri" pitchFamily="34" charset="-122"/>
                 <a:cs typeface="Calibri" pitchFamily="34" charset="-120"/>
               </a:rPr>
-              <a:t>SMOTE not measured</a:t>
-            </a:r>
-            <a:endParaRPr lang="en-US" sz="1300" dirty="0"/>
+              <a:t>289 of the 300 scheduled epochs, halted by our own power limiter. The last 11 change nothing measurable — quality had plateaued by epoch 69 (z = +1.15 across the whole run) — and we did not have to assume it: we extracted the final epoch-288 encoder and measured it. It still beats the random baseline by +16 % on the primary metric (z = 3.15).</a:t>
+            </a:r>
+            <a:endParaRPr lang="en-US" sz="1150" dirty="0"/>
           </a:p>
         </p:txBody>
       </p:sp>
@@ -30741,8 +31884,8 @@
         </p:nvSpPr>
         <p:spPr>
           <a:xfrm>
-            <a:off x="1024128" y="5184648"/>
-            <a:ext cx="4754880" cy="548640"/>
+            <a:off x="566928" y="5806440"/>
+            <a:ext cx="10515600" cy="457200"/>
           </a:xfrm>
           <a:prstGeom prst="rect">
             <a:avLst/>
@@ -30755,387 +31898,20 @@
           <a:lstStyle/>
           <a:p>
             <a:pPr indent="0" marL="0">
-              <a:lnSpc>
-                <a:spcPts val="1600"/>
-              </a:lnSpc>
               <a:buNone/>
             </a:pPr>
             <a:r>
-              <a:rPr lang="en-US" sz="1150" dirty="0">
+              <a:rPr lang="en-US" sz="1500" b="1" i="1" dirty="0">
                 <a:solidFill>
-                  <a:srgbClr val="58626C"/>
-                </a:solidFill>
-                <a:latin typeface="Calibri" pitchFamily="34" charset="0"/>
-                <a:ea typeface="Calibri" pitchFamily="34" charset="-122"/>
-                <a:cs typeface="Calibri" pitchFamily="34" charset="-120"/>
-              </a:rPr>
-              <a:t>Not among the baselines of the final grid.</a:t>
-            </a:r>
-            <a:endParaRPr lang="en-US" sz="1150" dirty="0"/>
-          </a:p>
-        </p:txBody>
-      </p:sp>
-      <p:sp>
-        <p:nvSpPr>
-          <p:cNvPr id="19" name="Shape 17"/>
-          <p:cNvSpPr/>
-          <p:nvPr/>
-        </p:nvSpPr>
-        <p:spPr>
-          <a:xfrm>
-            <a:off x="6263640" y="1234440"/>
-            <a:ext cx="5394960" cy="457200"/>
-          </a:xfrm>
-          <a:prstGeom prst="roundRect">
-            <a:avLst>
-              <a:gd name="adj" fmla="val 12000"/>
-            </a:avLst>
-          </a:prstGeom>
-          <a:solidFill>
-            <a:srgbClr val="F1F6F2"/>
-          </a:solidFill>
-          <a:ln/>
-        </p:spPr>
-      </p:sp>
-      <p:sp>
-        <p:nvSpPr>
-          <p:cNvPr id="20" name="Text 18"/>
-          <p:cNvSpPr txBox="1"/>
-          <p:nvPr/>
-        </p:nvSpPr>
-        <p:spPr>
-          <a:xfrm>
-            <a:off x="6446520" y="1325880"/>
-            <a:ext cx="5029200" cy="292608"/>
-          </a:xfrm>
-          <a:prstGeom prst="rect">
-            <a:avLst/>
-          </a:prstGeom>
-          <a:noFill/>
-          <a:ln/>
-        </p:spPr>
-        <p:txBody>
-          <a:bodyPr wrap="square" lIns="0" tIns="0" rIns="0" bIns="0" rtlCol="0" anchor="ctr"/>
-          <a:lstStyle/>
-          <a:p>
-            <a:pPr indent="0" marL="0">
-              <a:buNone/>
-            </a:pPr>
-            <a:r>
-              <a:rPr lang="en-US" sz="1600" b="1" dirty="0">
-                <a:solidFill>
-                  <a:srgbClr val="1F6F43"/>
+                  <a:srgbClr val="0B3C49"/>
                 </a:solidFill>
                 <a:latin typeface="Cambria" pitchFamily="34" charset="0"/>
                 <a:ea typeface="Cambria" pitchFamily="34" charset="-122"/>
                 <a:cs typeface="Cambria" pitchFamily="34" charset="-120"/>
               </a:rPr>
-              <a:t>Future work</a:t>
-            </a:r>
-            <a:endParaRPr lang="en-US" sz="1600" dirty="0"/>
-          </a:p>
-        </p:txBody>
-      </p:sp>
-      <p:sp>
-        <p:nvSpPr>
-          <p:cNvPr id="21" name="Shape 19"/>
-          <p:cNvSpPr/>
-          <p:nvPr/>
-        </p:nvSpPr>
-        <p:spPr>
-          <a:xfrm>
-            <a:off x="6446520" y="1938528"/>
-            <a:ext cx="137160" cy="137160"/>
-          </a:xfrm>
-          <a:prstGeom prst="ellipse">
-            <a:avLst/>
-          </a:prstGeom>
-          <a:solidFill>
-            <a:srgbClr val="1F6F43"/>
-          </a:solidFill>
-          <a:ln/>
-        </p:spPr>
-      </p:sp>
-      <p:sp>
-        <p:nvSpPr>
-          <p:cNvPr id="22" name="Text 20"/>
-          <p:cNvSpPr txBox="1"/>
-          <p:nvPr/>
-        </p:nvSpPr>
-        <p:spPr>
-          <a:xfrm>
-            <a:off x="6720840" y="1874520"/>
-            <a:ext cx="4754880" cy="292608"/>
-          </a:xfrm>
-          <a:prstGeom prst="rect">
-            <a:avLst/>
-          </a:prstGeom>
-          <a:noFill/>
-          <a:ln/>
-        </p:spPr>
-        <p:txBody>
-          <a:bodyPr wrap="square" lIns="0" tIns="0" rIns="0" bIns="0" rtlCol="0" anchor="ctr"/>
-          <a:lstStyle/>
-          <a:p>
-            <a:pPr indent="0" marL="0">
-              <a:buNone/>
-            </a:pPr>
-            <a:r>
-              <a:rPr lang="en-US" sz="1300" b="1" dirty="0">
-                <a:solidFill>
-                  <a:srgbClr val="111418"/>
-                </a:solidFill>
-                <a:latin typeface="Calibri" pitchFamily="34" charset="0"/>
-                <a:ea typeface="Calibri" pitchFamily="34" charset="-122"/>
-                <a:cs typeface="Calibri" pitchFamily="34" charset="-120"/>
-              </a:rPr>
-              <a:t>Remove the box from inference</a:t>
-            </a:r>
-            <a:endParaRPr lang="en-US" sz="1300" dirty="0"/>
-          </a:p>
-        </p:txBody>
-      </p:sp>
-      <p:sp>
-        <p:nvSpPr>
-          <p:cNvPr id="23" name="Text 21"/>
-          <p:cNvSpPr txBox="1"/>
-          <p:nvPr/>
-        </p:nvSpPr>
-        <p:spPr>
-          <a:xfrm>
-            <a:off x="6720840" y="2167128"/>
-            <a:ext cx="4754880" cy="548640"/>
-          </a:xfrm>
-          <a:prstGeom prst="rect">
-            <a:avLst/>
-          </a:prstGeom>
-          <a:noFill/>
-          <a:ln/>
-        </p:spPr>
-        <p:txBody>
-          <a:bodyPr wrap="square" lIns="0" tIns="0" rIns="0" bIns="0" rtlCol="0" anchor="ctr"/>
-          <a:lstStyle/>
-          <a:p>
-            <a:pPr indent="0" marL="0">
-              <a:lnSpc>
-                <a:spcPts val="1600"/>
-              </a:lnSpc>
-              <a:buNone/>
-            </a:pPr>
-            <a:r>
-              <a:rPr lang="en-US" sz="1150" dirty="0">
-                <a:solidFill>
-                  <a:srgbClr val="58626C"/>
-                </a:solidFill>
-                <a:latin typeface="Calibri" pitchFamily="34" charset="0"/>
-                <a:ea typeface="Calibri" pitchFamily="34" charset="-122"/>
-                <a:cs typeface="Calibri" pitchFamily="34" charset="-120"/>
-              </a:rPr>
-              <a:t>Detection and grading end to end. In real use nobody draws the bounding box — drawing it is already the diagnosis.</a:t>
-            </a:r>
-            <a:endParaRPr lang="en-US" sz="1150" dirty="0"/>
-          </a:p>
-        </p:txBody>
-      </p:sp>
-      <p:sp>
-        <p:nvSpPr>
-          <p:cNvPr id="24" name="Shape 22"/>
-          <p:cNvSpPr/>
-          <p:nvPr/>
-        </p:nvSpPr>
-        <p:spPr>
-          <a:xfrm>
-            <a:off x="6446520" y="2944368"/>
-            <a:ext cx="137160" cy="137160"/>
-          </a:xfrm>
-          <a:prstGeom prst="ellipse">
-            <a:avLst/>
-          </a:prstGeom>
-          <a:solidFill>
-            <a:srgbClr val="1F6F43"/>
-          </a:solidFill>
-          <a:ln/>
-        </p:spPr>
-      </p:sp>
-      <p:sp>
-        <p:nvSpPr>
-          <p:cNvPr id="25" name="Text 23"/>
-          <p:cNvSpPr txBox="1"/>
-          <p:nvPr/>
-        </p:nvSpPr>
-        <p:spPr>
-          <a:xfrm>
-            <a:off x="6720840" y="2880360"/>
-            <a:ext cx="4754880" cy="292608"/>
-          </a:xfrm>
-          <a:prstGeom prst="rect">
-            <a:avLst/>
-          </a:prstGeom>
-          <a:noFill/>
-          <a:ln/>
-        </p:spPr>
-        <p:txBody>
-          <a:bodyPr wrap="square" lIns="0" tIns="0" rIns="0" bIns="0" rtlCol="0" anchor="ctr"/>
-          <a:lstStyle/>
-          <a:p>
-            <a:pPr indent="0" marL="0">
-              <a:buNone/>
-            </a:pPr>
-            <a:r>
-              <a:rPr lang="en-US" sz="1300" b="1" dirty="0">
-                <a:solidFill>
-                  <a:srgbClr val="111418"/>
-                </a:solidFill>
-                <a:latin typeface="Calibri" pitchFamily="34" charset="0"/>
-                <a:ea typeface="Calibri" pitchFamily="34" charset="-122"/>
-                <a:cs typeface="Calibri" pitchFamily="34" charset="-120"/>
-              </a:rPr>
-              <a:t>Per-token MIL as the default head</a:t>
-            </a:r>
-            <a:endParaRPr lang="en-US" sz="1300" dirty="0"/>
-          </a:p>
-        </p:txBody>
-      </p:sp>
-      <p:sp>
-        <p:nvSpPr>
-          <p:cNvPr id="26" name="Text 24"/>
-          <p:cNvSpPr txBox="1"/>
-          <p:nvPr/>
-        </p:nvSpPr>
-        <p:spPr>
-          <a:xfrm>
-            <a:off x="6720840" y="3172968"/>
-            <a:ext cx="4754880" cy="548640"/>
-          </a:xfrm>
-          <a:prstGeom prst="rect">
-            <a:avLst/>
-          </a:prstGeom>
-          <a:noFill/>
-          <a:ln/>
-        </p:spPr>
-        <p:txBody>
-          <a:bodyPr wrap="square" lIns="0" tIns="0" rIns="0" bIns="0" rtlCol="0" anchor="ctr"/>
-          <a:lstStyle/>
-          <a:p>
-            <a:pPr indent="0" marL="0">
-              <a:lnSpc>
-                <a:spcPts val="1600"/>
-              </a:lnSpc>
-              <a:buNone/>
-            </a:pPr>
-            <a:r>
-              <a:rPr lang="en-US" sz="1150" dirty="0">
-                <a:solidFill>
-                  <a:srgbClr val="58626C"/>
-                </a:solidFill>
-                <a:latin typeface="Calibri" pitchFamily="34" charset="0"/>
-                <a:ea typeface="Calibri" pitchFamily="34" charset="-122"/>
-                <a:cs typeface="Calibri" pitchFamily="34" charset="-120"/>
-              </a:rPr>
-              <a:t>It gives the largest margin we measured: +28.8 % on fixed count.</a:t>
-            </a:r>
-            <a:endParaRPr lang="en-US" sz="1150" dirty="0"/>
-          </a:p>
-        </p:txBody>
-      </p:sp>
-      <p:sp>
-        <p:nvSpPr>
-          <p:cNvPr id="27" name="Shape 25"/>
-          <p:cNvSpPr/>
-          <p:nvPr/>
-        </p:nvSpPr>
-        <p:spPr>
-          <a:xfrm>
-            <a:off x="6446520" y="3950208"/>
-            <a:ext cx="137160" cy="137160"/>
-          </a:xfrm>
-          <a:prstGeom prst="ellipse">
-            <a:avLst/>
-          </a:prstGeom>
-          <a:solidFill>
-            <a:srgbClr val="1F6F43"/>
-          </a:solidFill>
-          <a:ln/>
-        </p:spPr>
-      </p:sp>
-      <p:sp>
-        <p:nvSpPr>
-          <p:cNvPr id="28" name="Text 26"/>
-          <p:cNvSpPr txBox="1"/>
-          <p:nvPr/>
-        </p:nvSpPr>
-        <p:spPr>
-          <a:xfrm>
-            <a:off x="6720840" y="3886200"/>
-            <a:ext cx="4754880" cy="292608"/>
-          </a:xfrm>
-          <a:prstGeom prst="rect">
-            <a:avLst/>
-          </a:prstGeom>
-          <a:noFill/>
-          <a:ln/>
-        </p:spPr>
-        <p:txBody>
-          <a:bodyPr wrap="square" lIns="0" tIns="0" rIns="0" bIns="0" rtlCol="0" anchor="ctr"/>
-          <a:lstStyle/>
-          <a:p>
-            <a:pPr indent="0" marL="0">
-              <a:buNone/>
-            </a:pPr>
-            <a:r>
-              <a:rPr lang="en-US" sz="1300" b="1" dirty="0">
-                <a:solidFill>
-                  <a:srgbClr val="111418"/>
-                </a:solidFill>
-                <a:latin typeface="Calibri" pitchFamily="34" charset="0"/>
-                <a:ea typeface="Calibri" pitchFamily="34" charset="-122"/>
-                <a:cs typeface="Calibri" pitchFamily="34" charset="-120"/>
-              </a:rPr>
-              <a:t>Explicit anti-collapse term</a:t>
-            </a:r>
-            <a:endParaRPr lang="en-US" sz="1300" dirty="0"/>
-          </a:p>
-        </p:txBody>
-      </p:sp>
-      <p:sp>
-        <p:nvSpPr>
-          <p:cNvPr id="29" name="Text 27"/>
-          <p:cNvSpPr txBox="1"/>
-          <p:nvPr/>
-        </p:nvSpPr>
-        <p:spPr>
-          <a:xfrm>
-            <a:off x="6720840" y="4178808"/>
-            <a:ext cx="4754880" cy="548640"/>
-          </a:xfrm>
-          <a:prstGeom prst="rect">
-            <a:avLst/>
-          </a:prstGeom>
-          <a:noFill/>
-          <a:ln/>
-        </p:spPr>
-        <p:txBody>
-          <a:bodyPr wrap="square" lIns="0" tIns="0" rIns="0" bIns="0" rtlCol="0" anchor="ctr"/>
-          <a:lstStyle/>
-          <a:p>
-            <a:pPr indent="0" marL="0">
-              <a:lnSpc>
-                <a:spcPts val="1600"/>
-              </a:lnSpc>
-              <a:buNone/>
-            </a:pPr>
-            <a:r>
-              <a:rPr lang="en-US" sz="1150" dirty="0">
-                <a:solidFill>
-                  <a:srgbClr val="58626C"/>
-                </a:solidFill>
-                <a:latin typeface="Calibri" pitchFamily="34" charset="0"/>
-                <a:ea typeface="Calibri" pitchFamily="34" charset="-122"/>
-                <a:cs typeface="Calibri" pitchFamily="34" charset="-120"/>
-              </a:rPr>
-              <a:t>Variance-covariance regularisation, instead of relying on the EMA alone.</a:t>
-            </a:r>
-            <a:endParaRPr lang="en-US" sz="1150" dirty="0"/>
+              <a:t>There is no “best model” — only the best model for a given reading, and choosing that reading is the work.</a:t>
+            </a:r>
+            <a:endParaRPr lang="en-US" sz="1500" dirty="0"/>
           </a:p>
         </p:txBody>
       </p:sp>
@@ -31204,6 +31980,984 @@
                 <a:ea typeface="Calibri" pitchFamily="34" charset="-122"/>
                 <a:cs typeface="Calibri" pitchFamily="34" charset="-120"/>
               </a:rPr>
+              <a:t>FINAL CONSIDERATIONS</a:t>
+            </a:r>
+            <a:endParaRPr lang="en-US" sz="1050" dirty="0"/>
+          </a:p>
+        </p:txBody>
+      </p:sp>
+      <p:sp>
+        <p:nvSpPr>
+          <p:cNvPr id="3" name="Text 1"/>
+          <p:cNvSpPr txBox="1"/>
+          <p:nvPr/>
+        </p:nvSpPr>
+        <p:spPr>
+          <a:xfrm>
+            <a:off x="566928" y="493776"/>
+            <a:ext cx="11057839" cy="566928"/>
+          </a:xfrm>
+          <a:prstGeom prst="rect">
+            <a:avLst/>
+          </a:prstGeom>
+          <a:noFill/>
+          <a:ln/>
+        </p:spPr>
+        <p:txBody>
+          <a:bodyPr wrap="square" lIns="0" tIns="0" rIns="0" bIns="0" rtlCol="0" anchor="ctr"/>
+          <a:lstStyle/>
+          <a:p>
+            <a:pPr indent="0" marL="0">
+              <a:buNone/>
+            </a:pPr>
+            <a:r>
+              <a:rPr lang="en-US" sz="2700" b="1" dirty="0">
+                <a:solidFill>
+                  <a:srgbClr val="0B3C49"/>
+                </a:solidFill>
+                <a:latin typeface="Cambria" pitchFamily="34" charset="0"/>
+                <a:ea typeface="Cambria" pitchFamily="34" charset="-122"/>
+                <a:cs typeface="Cambria" pitchFamily="34" charset="-120"/>
+              </a:rPr>
+              <a:t>Declared limitations, and what comes next</a:t>
+            </a:r>
+            <a:endParaRPr lang="en-US" sz="2700" dirty="0"/>
+          </a:p>
+        </p:txBody>
+      </p:sp>
+      <p:sp>
+        <p:nvSpPr>
+          <p:cNvPr id="4" name="Text 2"/>
+          <p:cNvSpPr txBox="1"/>
+          <p:nvPr/>
+        </p:nvSpPr>
+        <p:spPr>
+          <a:xfrm>
+            <a:off x="10618927" y="6400800"/>
+            <a:ext cx="1005840" cy="237744"/>
+          </a:xfrm>
+          <a:prstGeom prst="rect">
+            <a:avLst/>
+          </a:prstGeom>
+          <a:noFill/>
+          <a:ln/>
+        </p:spPr>
+        <p:txBody>
+          <a:bodyPr wrap="square" lIns="0" tIns="0" rIns="0" bIns="0" rtlCol="0" anchor="ctr"/>
+          <a:lstStyle/>
+          <a:p>
+            <a:pPr algn="r" indent="0" marL="0">
+              <a:buNone/>
+            </a:pPr>
+            <a:r>
+              <a:rPr lang="en-US" sz="1050" dirty="0">
+                <a:solidFill>
+                  <a:srgbClr val="58626C"/>
+                </a:solidFill>
+                <a:latin typeface="Calibri" pitchFamily="34" charset="0"/>
+                <a:ea typeface="Calibri" pitchFamily="34" charset="-122"/>
+                <a:cs typeface="Calibri" pitchFamily="34" charset="-120"/>
+              </a:rPr>
+              <a:t>25 / 26</a:t>
+            </a:r>
+            <a:endParaRPr lang="en-US" sz="1050" dirty="0"/>
+          </a:p>
+        </p:txBody>
+      </p:sp>
+      <p:sp>
+        <p:nvSpPr>
+          <p:cNvPr id="5" name="Shape 3"/>
+          <p:cNvSpPr/>
+          <p:nvPr/>
+        </p:nvSpPr>
+        <p:spPr>
+          <a:xfrm>
+            <a:off x="566928" y="1234440"/>
+            <a:ext cx="5394960" cy="457200"/>
+          </a:xfrm>
+          <a:prstGeom prst="roundRect">
+            <a:avLst>
+              <a:gd name="adj" fmla="val 12000"/>
+            </a:avLst>
+          </a:prstGeom>
+          <a:solidFill>
+            <a:srgbClr val="FDF7EC"/>
+          </a:solidFill>
+          <a:ln/>
+        </p:spPr>
+      </p:sp>
+      <p:sp>
+        <p:nvSpPr>
+          <p:cNvPr id="6" name="Text 4"/>
+          <p:cNvSpPr txBox="1"/>
+          <p:nvPr/>
+        </p:nvSpPr>
+        <p:spPr>
+          <a:xfrm>
+            <a:off x="749808" y="1325880"/>
+            <a:ext cx="5029200" cy="292608"/>
+          </a:xfrm>
+          <a:prstGeom prst="rect">
+            <a:avLst/>
+          </a:prstGeom>
+          <a:noFill/>
+          <a:ln/>
+        </p:spPr>
+        <p:txBody>
+          <a:bodyPr wrap="square" lIns="0" tIns="0" rIns="0" bIns="0" rtlCol="0" anchor="ctr"/>
+          <a:lstStyle/>
+          <a:p>
+            <a:pPr indent="0" marL="0">
+              <a:buNone/>
+            </a:pPr>
+            <a:r>
+              <a:rPr lang="en-US" sz="1600" b="1" dirty="0">
+                <a:solidFill>
+                  <a:srgbClr val="8A5A12"/>
+                </a:solidFill>
+                <a:latin typeface="Cambria" pitchFamily="34" charset="0"/>
+                <a:ea typeface="Cambria" pitchFamily="34" charset="-122"/>
+                <a:cs typeface="Cambria" pitchFamily="34" charset="-120"/>
+              </a:rPr>
+              <a:t>Declared limitations</a:t>
+            </a:r>
+            <a:endParaRPr lang="en-US" sz="1600" dirty="0"/>
+          </a:p>
+        </p:txBody>
+      </p:sp>
+      <p:sp>
+        <p:nvSpPr>
+          <p:cNvPr id="7" name="Shape 5"/>
+          <p:cNvSpPr/>
+          <p:nvPr/>
+        </p:nvSpPr>
+        <p:spPr>
+          <a:xfrm>
+            <a:off x="749808" y="1938528"/>
+            <a:ext cx="137160" cy="137160"/>
+          </a:xfrm>
+          <a:prstGeom prst="ellipse">
+            <a:avLst/>
+          </a:prstGeom>
+          <a:solidFill>
+            <a:srgbClr val="8A5A12"/>
+          </a:solidFill>
+          <a:ln/>
+        </p:spPr>
+      </p:sp>
+      <p:sp>
+        <p:nvSpPr>
+          <p:cNvPr id="8" name="Text 6"/>
+          <p:cNvSpPr txBox="1"/>
+          <p:nvPr/>
+        </p:nvSpPr>
+        <p:spPr>
+          <a:xfrm>
+            <a:off x="1024128" y="1874520"/>
+            <a:ext cx="4754880" cy="292608"/>
+          </a:xfrm>
+          <a:prstGeom prst="rect">
+            <a:avLst/>
+          </a:prstGeom>
+          <a:noFill/>
+          <a:ln/>
+        </p:spPr>
+        <p:txBody>
+          <a:bodyPr wrap="square" lIns="0" tIns="0" rIns="0" bIns="0" rtlCol="0" anchor="ctr"/>
+          <a:lstStyle/>
+          <a:p>
+            <a:pPr indent="0" marL="0">
+              <a:buNone/>
+            </a:pPr>
+            <a:r>
+              <a:rPr lang="en-US" sz="1300" b="1" dirty="0">
+                <a:solidFill>
+                  <a:srgbClr val="111418"/>
+                </a:solidFill>
+                <a:latin typeface="Calibri" pitchFamily="34" charset="0"/>
+                <a:ea typeface="Calibri" pitchFamily="34" charset="-122"/>
+                <a:cs typeface="Calibri" pitchFamily="34" charset="-120"/>
+              </a:rPr>
+              <a:t>Checkpoint selection</a:t>
+            </a:r>
+            <a:endParaRPr lang="en-US" sz="1300" dirty="0"/>
+          </a:p>
+        </p:txBody>
+      </p:sp>
+      <p:sp>
+        <p:nvSpPr>
+          <p:cNvPr id="9" name="Text 7"/>
+          <p:cNvSpPr txBox="1"/>
+          <p:nvPr/>
+        </p:nvSpPr>
+        <p:spPr>
+          <a:xfrm>
+            <a:off x="1024128" y="2167128"/>
+            <a:ext cx="4754880" cy="548640"/>
+          </a:xfrm>
+          <a:prstGeom prst="rect">
+            <a:avLst/>
+          </a:prstGeom>
+          <a:noFill/>
+          <a:ln/>
+        </p:spPr>
+        <p:txBody>
+          <a:bodyPr wrap="square" lIns="0" tIns="0" rIns="0" bIns="0" rtlCol="0" anchor="ctr"/>
+          <a:lstStyle/>
+          <a:p>
+            <a:pPr indent="0" marL="0">
+              <a:lnSpc>
+                <a:spcPts val="1600"/>
+              </a:lnSpc>
+              <a:buNone/>
+            </a:pPr>
+            <a:r>
+              <a:rPr lang="en-US" sz="1150" dirty="0">
+                <a:solidFill>
+                  <a:srgbClr val="58626C"/>
+                </a:solidFill>
+                <a:latin typeface="Calibri" pitchFamily="34" charset="0"/>
+                <a:ea typeface="Calibri" pitchFamily="34" charset="-122"/>
+                <a:cs typeface="Calibri" pitchFamily="34" charset="-120"/>
+              </a:rPr>
+              <a:t>Better on the criterion we selected it with, worse on size-blind readings — the same bias we denounce.</a:t>
+            </a:r>
+            <a:endParaRPr lang="en-US" sz="1150" dirty="0"/>
+          </a:p>
+        </p:txBody>
+      </p:sp>
+      <p:sp>
+        <p:nvSpPr>
+          <p:cNvPr id="10" name="Shape 8"/>
+          <p:cNvSpPr/>
+          <p:nvPr/>
+        </p:nvSpPr>
+        <p:spPr>
+          <a:xfrm>
+            <a:off x="749808" y="2944368"/>
+            <a:ext cx="137160" cy="137160"/>
+          </a:xfrm>
+          <a:prstGeom prst="ellipse">
+            <a:avLst/>
+          </a:prstGeom>
+          <a:solidFill>
+            <a:srgbClr val="8A5A12"/>
+          </a:solidFill>
+          <a:ln/>
+        </p:spPr>
+      </p:sp>
+      <p:sp>
+        <p:nvSpPr>
+          <p:cNvPr id="11" name="Text 9"/>
+          <p:cNvSpPr txBox="1"/>
+          <p:nvPr/>
+        </p:nvSpPr>
+        <p:spPr>
+          <a:xfrm>
+            <a:off x="1024128" y="2880360"/>
+            <a:ext cx="4754880" cy="292608"/>
+          </a:xfrm>
+          <a:prstGeom prst="rect">
+            <a:avLst/>
+          </a:prstGeom>
+          <a:noFill/>
+          <a:ln/>
+        </p:spPr>
+        <p:txBody>
+          <a:bodyPr wrap="square" lIns="0" tIns="0" rIns="0" bIns="0" rtlCol="0" anchor="ctr"/>
+          <a:lstStyle/>
+          <a:p>
+            <a:pPr indent="0" marL="0">
+              <a:buNone/>
+            </a:pPr>
+            <a:r>
+              <a:rPr lang="en-US" sz="1300" b="1" dirty="0">
+                <a:solidFill>
+                  <a:srgbClr val="111418"/>
+                </a:solidFill>
+                <a:latin typeface="Calibri" pitchFamily="34" charset="0"/>
+                <a:ea typeface="Calibri" pitchFamily="34" charset="-122"/>
+                <a:cs typeface="Calibri" pitchFamily="34" charset="-120"/>
+              </a:rPr>
+              <a:t>α sweep on a fixed encoder</a:t>
+            </a:r>
+            <a:endParaRPr lang="en-US" sz="1300" dirty="0"/>
+          </a:p>
+        </p:txBody>
+      </p:sp>
+      <p:sp>
+        <p:nvSpPr>
+          <p:cNvPr id="12" name="Text 10"/>
+          <p:cNvSpPr txBox="1"/>
+          <p:nvPr/>
+        </p:nvSpPr>
+        <p:spPr>
+          <a:xfrm>
+            <a:off x="1024128" y="3172968"/>
+            <a:ext cx="4754880" cy="548640"/>
+          </a:xfrm>
+          <a:prstGeom prst="rect">
+            <a:avLst/>
+          </a:prstGeom>
+          <a:noFill/>
+          <a:ln/>
+        </p:spPr>
+        <p:txBody>
+          <a:bodyPr wrap="square" lIns="0" tIns="0" rIns="0" bIns="0" rtlCol="0" anchor="ctr"/>
+          <a:lstStyle/>
+          <a:p>
+            <a:pPr indent="0" marL="0">
+              <a:lnSpc>
+                <a:spcPts val="1600"/>
+              </a:lnSpc>
+              <a:buNone/>
+            </a:pPr>
+            <a:r>
+              <a:rPr lang="en-US" sz="1150" dirty="0">
+                <a:solidFill>
+                  <a:srgbClr val="58626C"/>
+                </a:solidFill>
+                <a:latin typeface="Calibri" pitchFamily="34" charset="0"/>
+                <a:ea typeface="Calibri" pitchFamily="34" charset="-122"/>
+                <a:cs typeface="Calibri" pitchFamily="34" charset="-120"/>
+              </a:rPr>
+              <a:t>Deliberate, to isolate the parameter — but it means the sweep is not encoder-agnostic.</a:t>
+            </a:r>
+            <a:endParaRPr lang="en-US" sz="1150" dirty="0"/>
+          </a:p>
+        </p:txBody>
+      </p:sp>
+      <p:sp>
+        <p:nvSpPr>
+          <p:cNvPr id="13" name="Shape 11"/>
+          <p:cNvSpPr/>
+          <p:nvPr/>
+        </p:nvSpPr>
+        <p:spPr>
+          <a:xfrm>
+            <a:off x="749808" y="3950208"/>
+            <a:ext cx="137160" cy="137160"/>
+          </a:xfrm>
+          <a:prstGeom prst="ellipse">
+            <a:avLst/>
+          </a:prstGeom>
+          <a:solidFill>
+            <a:srgbClr val="8A5A12"/>
+          </a:solidFill>
+          <a:ln/>
+        </p:spPr>
+      </p:sp>
+      <p:sp>
+        <p:nvSpPr>
+          <p:cNvPr id="14" name="Text 12"/>
+          <p:cNvSpPr txBox="1"/>
+          <p:nvPr/>
+        </p:nvSpPr>
+        <p:spPr>
+          <a:xfrm>
+            <a:off x="1024128" y="3886200"/>
+            <a:ext cx="4754880" cy="292608"/>
+          </a:xfrm>
+          <a:prstGeom prst="rect">
+            <a:avLst/>
+          </a:prstGeom>
+          <a:noFill/>
+          <a:ln/>
+        </p:spPr>
+        <p:txBody>
+          <a:bodyPr wrap="square" lIns="0" tIns="0" rIns="0" bIns="0" rtlCol="0" anchor="ctr"/>
+          <a:lstStyle/>
+          <a:p>
+            <a:pPr indent="0" marL="0">
+              <a:buNone/>
+            </a:pPr>
+            <a:r>
+              <a:rPr lang="en-US" sz="1300" b="1" dirty="0">
+                <a:solidFill>
+                  <a:srgbClr val="111418"/>
+                </a:solidFill>
+                <a:latin typeface="Calibri" pitchFamily="34" charset="0"/>
+                <a:ea typeface="Calibri" pitchFamily="34" charset="-122"/>
+                <a:cs typeface="Calibri" pitchFamily="34" charset="-120"/>
+              </a:rPr>
+              <a:t>± is not generalisation</a:t>
+            </a:r>
+            <a:endParaRPr lang="en-US" sz="1300" dirty="0"/>
+          </a:p>
+        </p:txBody>
+      </p:sp>
+      <p:sp>
+        <p:nvSpPr>
+          <p:cNvPr id="15" name="Text 13"/>
+          <p:cNvSpPr txBox="1"/>
+          <p:nvPr/>
+        </p:nvSpPr>
+        <p:spPr>
+          <a:xfrm>
+            <a:off x="1024128" y="4178808"/>
+            <a:ext cx="4754880" cy="548640"/>
+          </a:xfrm>
+          <a:prstGeom prst="rect">
+            <a:avLst/>
+          </a:prstGeom>
+          <a:noFill/>
+          <a:ln/>
+        </p:spPr>
+        <p:txBody>
+          <a:bodyPr wrap="square" lIns="0" tIns="0" rIns="0" bIns="0" rtlCol="0" anchor="ctr"/>
+          <a:lstStyle/>
+          <a:p>
+            <a:pPr indent="0" marL="0">
+              <a:lnSpc>
+                <a:spcPts val="1600"/>
+              </a:lnSpc>
+              <a:buNone/>
+            </a:pPr>
+            <a:r>
+              <a:rPr lang="en-US" sz="1150" dirty="0">
+                <a:solidFill>
+                  <a:srgbClr val="58626C"/>
+                </a:solidFill>
+                <a:latin typeface="Calibri" pitchFamily="34" charset="0"/>
+                <a:ea typeface="Calibri" pitchFamily="34" charset="-122"/>
+                <a:cs typeface="Calibri" pitchFamily="34" charset="-120"/>
+              </a:rPr>
+              <a:t>Spread across seeds; test sampling error is ten times larger.</a:t>
+            </a:r>
+            <a:endParaRPr lang="en-US" sz="1150" dirty="0"/>
+          </a:p>
+        </p:txBody>
+      </p:sp>
+      <p:sp>
+        <p:nvSpPr>
+          <p:cNvPr id="16" name="Shape 14"/>
+          <p:cNvSpPr/>
+          <p:nvPr/>
+        </p:nvSpPr>
+        <p:spPr>
+          <a:xfrm>
+            <a:off x="749808" y="4956048"/>
+            <a:ext cx="137160" cy="137160"/>
+          </a:xfrm>
+          <a:prstGeom prst="ellipse">
+            <a:avLst/>
+          </a:prstGeom>
+          <a:solidFill>
+            <a:srgbClr val="8A5A12"/>
+          </a:solidFill>
+          <a:ln/>
+        </p:spPr>
+      </p:sp>
+      <p:sp>
+        <p:nvSpPr>
+          <p:cNvPr id="17" name="Text 15"/>
+          <p:cNvSpPr txBox="1"/>
+          <p:nvPr/>
+        </p:nvSpPr>
+        <p:spPr>
+          <a:xfrm>
+            <a:off x="1024128" y="4892040"/>
+            <a:ext cx="4754880" cy="292608"/>
+          </a:xfrm>
+          <a:prstGeom prst="rect">
+            <a:avLst/>
+          </a:prstGeom>
+          <a:noFill/>
+          <a:ln/>
+        </p:spPr>
+        <p:txBody>
+          <a:bodyPr wrap="square" lIns="0" tIns="0" rIns="0" bIns="0" rtlCol="0" anchor="ctr"/>
+          <a:lstStyle/>
+          <a:p>
+            <a:pPr indent="0" marL="0">
+              <a:buNone/>
+            </a:pPr>
+            <a:r>
+              <a:rPr lang="en-US" sz="1300" b="1" dirty="0">
+                <a:solidFill>
+                  <a:srgbClr val="111418"/>
+                </a:solidFill>
+                <a:latin typeface="Calibri" pitchFamily="34" charset="0"/>
+                <a:ea typeface="Calibri" pitchFamily="34" charset="-122"/>
+                <a:cs typeface="Calibri" pitchFamily="34" charset="-120"/>
+              </a:rPr>
+              <a:t>SMOTE not measured</a:t>
+            </a:r>
+            <a:endParaRPr lang="en-US" sz="1300" dirty="0"/>
+          </a:p>
+        </p:txBody>
+      </p:sp>
+      <p:sp>
+        <p:nvSpPr>
+          <p:cNvPr id="18" name="Text 16"/>
+          <p:cNvSpPr txBox="1"/>
+          <p:nvPr/>
+        </p:nvSpPr>
+        <p:spPr>
+          <a:xfrm>
+            <a:off x="1024128" y="5184648"/>
+            <a:ext cx="4754880" cy="548640"/>
+          </a:xfrm>
+          <a:prstGeom prst="rect">
+            <a:avLst/>
+          </a:prstGeom>
+          <a:noFill/>
+          <a:ln/>
+        </p:spPr>
+        <p:txBody>
+          <a:bodyPr wrap="square" lIns="0" tIns="0" rIns="0" bIns="0" rtlCol="0" anchor="ctr"/>
+          <a:lstStyle/>
+          <a:p>
+            <a:pPr indent="0" marL="0">
+              <a:lnSpc>
+                <a:spcPts val="1600"/>
+              </a:lnSpc>
+              <a:buNone/>
+            </a:pPr>
+            <a:r>
+              <a:rPr lang="en-US" sz="1150" dirty="0">
+                <a:solidFill>
+                  <a:srgbClr val="58626C"/>
+                </a:solidFill>
+                <a:latin typeface="Calibri" pitchFamily="34" charset="0"/>
+                <a:ea typeface="Calibri" pitchFamily="34" charset="-122"/>
+                <a:cs typeface="Calibri" pitchFamily="34" charset="-120"/>
+              </a:rPr>
+              <a:t>Not among the baselines of the final grid.</a:t>
+            </a:r>
+            <a:endParaRPr lang="en-US" sz="1150" dirty="0"/>
+          </a:p>
+        </p:txBody>
+      </p:sp>
+      <p:sp>
+        <p:nvSpPr>
+          <p:cNvPr id="19" name="Shape 17"/>
+          <p:cNvSpPr/>
+          <p:nvPr/>
+        </p:nvSpPr>
+        <p:spPr>
+          <a:xfrm>
+            <a:off x="6263640" y="1234440"/>
+            <a:ext cx="5394960" cy="457200"/>
+          </a:xfrm>
+          <a:prstGeom prst="roundRect">
+            <a:avLst>
+              <a:gd name="adj" fmla="val 12000"/>
+            </a:avLst>
+          </a:prstGeom>
+          <a:solidFill>
+            <a:srgbClr val="F1F6F2"/>
+          </a:solidFill>
+          <a:ln/>
+        </p:spPr>
+      </p:sp>
+      <p:sp>
+        <p:nvSpPr>
+          <p:cNvPr id="20" name="Text 18"/>
+          <p:cNvSpPr txBox="1"/>
+          <p:nvPr/>
+        </p:nvSpPr>
+        <p:spPr>
+          <a:xfrm>
+            <a:off x="6446520" y="1325880"/>
+            <a:ext cx="5029200" cy="292608"/>
+          </a:xfrm>
+          <a:prstGeom prst="rect">
+            <a:avLst/>
+          </a:prstGeom>
+          <a:noFill/>
+          <a:ln/>
+        </p:spPr>
+        <p:txBody>
+          <a:bodyPr wrap="square" lIns="0" tIns="0" rIns="0" bIns="0" rtlCol="0" anchor="ctr"/>
+          <a:lstStyle/>
+          <a:p>
+            <a:pPr indent="0" marL="0">
+              <a:buNone/>
+            </a:pPr>
+            <a:r>
+              <a:rPr lang="en-US" sz="1600" b="1" dirty="0">
+                <a:solidFill>
+                  <a:srgbClr val="1F6F43"/>
+                </a:solidFill>
+                <a:latin typeface="Cambria" pitchFamily="34" charset="0"/>
+                <a:ea typeface="Cambria" pitchFamily="34" charset="-122"/>
+                <a:cs typeface="Cambria" pitchFamily="34" charset="-120"/>
+              </a:rPr>
+              <a:t>Future work</a:t>
+            </a:r>
+            <a:endParaRPr lang="en-US" sz="1600" dirty="0"/>
+          </a:p>
+        </p:txBody>
+      </p:sp>
+      <p:sp>
+        <p:nvSpPr>
+          <p:cNvPr id="21" name="Shape 19"/>
+          <p:cNvSpPr/>
+          <p:nvPr/>
+        </p:nvSpPr>
+        <p:spPr>
+          <a:xfrm>
+            <a:off x="6446520" y="1938528"/>
+            <a:ext cx="137160" cy="137160"/>
+          </a:xfrm>
+          <a:prstGeom prst="ellipse">
+            <a:avLst/>
+          </a:prstGeom>
+          <a:solidFill>
+            <a:srgbClr val="1F6F43"/>
+          </a:solidFill>
+          <a:ln/>
+        </p:spPr>
+      </p:sp>
+      <p:sp>
+        <p:nvSpPr>
+          <p:cNvPr id="22" name="Text 20"/>
+          <p:cNvSpPr txBox="1"/>
+          <p:nvPr/>
+        </p:nvSpPr>
+        <p:spPr>
+          <a:xfrm>
+            <a:off x="6720840" y="1874520"/>
+            <a:ext cx="4754880" cy="292608"/>
+          </a:xfrm>
+          <a:prstGeom prst="rect">
+            <a:avLst/>
+          </a:prstGeom>
+          <a:noFill/>
+          <a:ln/>
+        </p:spPr>
+        <p:txBody>
+          <a:bodyPr wrap="square" lIns="0" tIns="0" rIns="0" bIns="0" rtlCol="0" anchor="ctr"/>
+          <a:lstStyle/>
+          <a:p>
+            <a:pPr indent="0" marL="0">
+              <a:buNone/>
+            </a:pPr>
+            <a:r>
+              <a:rPr lang="en-US" sz="1300" b="1" dirty="0">
+                <a:solidFill>
+                  <a:srgbClr val="111418"/>
+                </a:solidFill>
+                <a:latin typeface="Calibri" pitchFamily="34" charset="0"/>
+                <a:ea typeface="Calibri" pitchFamily="34" charset="-122"/>
+                <a:cs typeface="Calibri" pitchFamily="34" charset="-120"/>
+              </a:rPr>
+              <a:t>Remove the box from inference</a:t>
+            </a:r>
+            <a:endParaRPr lang="en-US" sz="1300" dirty="0"/>
+          </a:p>
+        </p:txBody>
+      </p:sp>
+      <p:sp>
+        <p:nvSpPr>
+          <p:cNvPr id="23" name="Text 21"/>
+          <p:cNvSpPr txBox="1"/>
+          <p:nvPr/>
+        </p:nvSpPr>
+        <p:spPr>
+          <a:xfrm>
+            <a:off x="6720840" y="2167128"/>
+            <a:ext cx="4754880" cy="548640"/>
+          </a:xfrm>
+          <a:prstGeom prst="rect">
+            <a:avLst/>
+          </a:prstGeom>
+          <a:noFill/>
+          <a:ln/>
+        </p:spPr>
+        <p:txBody>
+          <a:bodyPr wrap="square" lIns="0" tIns="0" rIns="0" bIns="0" rtlCol="0" anchor="ctr"/>
+          <a:lstStyle/>
+          <a:p>
+            <a:pPr indent="0" marL="0">
+              <a:lnSpc>
+                <a:spcPts val="1600"/>
+              </a:lnSpc>
+              <a:buNone/>
+            </a:pPr>
+            <a:r>
+              <a:rPr lang="en-US" sz="1150" dirty="0">
+                <a:solidFill>
+                  <a:srgbClr val="58626C"/>
+                </a:solidFill>
+                <a:latin typeface="Calibri" pitchFamily="34" charset="0"/>
+                <a:ea typeface="Calibri" pitchFamily="34" charset="-122"/>
+                <a:cs typeface="Calibri" pitchFamily="34" charset="-120"/>
+              </a:rPr>
+              <a:t>Detection and grading end to end. In real use nobody draws the bounding box — drawing it is already the diagnosis.</a:t>
+            </a:r>
+            <a:endParaRPr lang="en-US" sz="1150" dirty="0"/>
+          </a:p>
+        </p:txBody>
+      </p:sp>
+      <p:sp>
+        <p:nvSpPr>
+          <p:cNvPr id="24" name="Shape 22"/>
+          <p:cNvSpPr/>
+          <p:nvPr/>
+        </p:nvSpPr>
+        <p:spPr>
+          <a:xfrm>
+            <a:off x="6446520" y="2944368"/>
+            <a:ext cx="137160" cy="137160"/>
+          </a:xfrm>
+          <a:prstGeom prst="ellipse">
+            <a:avLst/>
+          </a:prstGeom>
+          <a:solidFill>
+            <a:srgbClr val="1F6F43"/>
+          </a:solidFill>
+          <a:ln/>
+        </p:spPr>
+      </p:sp>
+      <p:sp>
+        <p:nvSpPr>
+          <p:cNvPr id="25" name="Text 23"/>
+          <p:cNvSpPr txBox="1"/>
+          <p:nvPr/>
+        </p:nvSpPr>
+        <p:spPr>
+          <a:xfrm>
+            <a:off x="6720840" y="2880360"/>
+            <a:ext cx="4754880" cy="292608"/>
+          </a:xfrm>
+          <a:prstGeom prst="rect">
+            <a:avLst/>
+          </a:prstGeom>
+          <a:noFill/>
+          <a:ln/>
+        </p:spPr>
+        <p:txBody>
+          <a:bodyPr wrap="square" lIns="0" tIns="0" rIns="0" bIns="0" rtlCol="0" anchor="ctr"/>
+          <a:lstStyle/>
+          <a:p>
+            <a:pPr indent="0" marL="0">
+              <a:buNone/>
+            </a:pPr>
+            <a:r>
+              <a:rPr lang="en-US" sz="1300" b="1" dirty="0">
+                <a:solidFill>
+                  <a:srgbClr val="111418"/>
+                </a:solidFill>
+                <a:latin typeface="Calibri" pitchFamily="34" charset="0"/>
+                <a:ea typeface="Calibri" pitchFamily="34" charset="-122"/>
+                <a:cs typeface="Calibri" pitchFamily="34" charset="-120"/>
+              </a:rPr>
+              <a:t>Per-token MIL as the default head</a:t>
+            </a:r>
+            <a:endParaRPr lang="en-US" sz="1300" dirty="0"/>
+          </a:p>
+        </p:txBody>
+      </p:sp>
+      <p:sp>
+        <p:nvSpPr>
+          <p:cNvPr id="26" name="Text 24"/>
+          <p:cNvSpPr txBox="1"/>
+          <p:nvPr/>
+        </p:nvSpPr>
+        <p:spPr>
+          <a:xfrm>
+            <a:off x="6720840" y="3172968"/>
+            <a:ext cx="4754880" cy="548640"/>
+          </a:xfrm>
+          <a:prstGeom prst="rect">
+            <a:avLst/>
+          </a:prstGeom>
+          <a:noFill/>
+          <a:ln/>
+        </p:spPr>
+        <p:txBody>
+          <a:bodyPr wrap="square" lIns="0" tIns="0" rIns="0" bIns="0" rtlCol="0" anchor="ctr"/>
+          <a:lstStyle/>
+          <a:p>
+            <a:pPr indent="0" marL="0">
+              <a:lnSpc>
+                <a:spcPts val="1600"/>
+              </a:lnSpc>
+              <a:buNone/>
+            </a:pPr>
+            <a:r>
+              <a:rPr lang="en-US" sz="1150" dirty="0">
+                <a:solidFill>
+                  <a:srgbClr val="58626C"/>
+                </a:solidFill>
+                <a:latin typeface="Calibri" pitchFamily="34" charset="0"/>
+                <a:ea typeface="Calibri" pitchFamily="34" charset="-122"/>
+                <a:cs typeface="Calibri" pitchFamily="34" charset="-120"/>
+              </a:rPr>
+              <a:t>It gives the largest margin we measured: +28.8 % on fixed count.</a:t>
+            </a:r>
+            <a:endParaRPr lang="en-US" sz="1150" dirty="0"/>
+          </a:p>
+        </p:txBody>
+      </p:sp>
+      <p:sp>
+        <p:nvSpPr>
+          <p:cNvPr id="27" name="Shape 25"/>
+          <p:cNvSpPr/>
+          <p:nvPr/>
+        </p:nvSpPr>
+        <p:spPr>
+          <a:xfrm>
+            <a:off x="6446520" y="3950208"/>
+            <a:ext cx="137160" cy="137160"/>
+          </a:xfrm>
+          <a:prstGeom prst="ellipse">
+            <a:avLst/>
+          </a:prstGeom>
+          <a:solidFill>
+            <a:srgbClr val="1F6F43"/>
+          </a:solidFill>
+          <a:ln/>
+        </p:spPr>
+      </p:sp>
+      <p:sp>
+        <p:nvSpPr>
+          <p:cNvPr id="28" name="Text 26"/>
+          <p:cNvSpPr txBox="1"/>
+          <p:nvPr/>
+        </p:nvSpPr>
+        <p:spPr>
+          <a:xfrm>
+            <a:off x="6720840" y="3886200"/>
+            <a:ext cx="4754880" cy="292608"/>
+          </a:xfrm>
+          <a:prstGeom prst="rect">
+            <a:avLst/>
+          </a:prstGeom>
+          <a:noFill/>
+          <a:ln/>
+        </p:spPr>
+        <p:txBody>
+          <a:bodyPr wrap="square" lIns="0" tIns="0" rIns="0" bIns="0" rtlCol="0" anchor="ctr"/>
+          <a:lstStyle/>
+          <a:p>
+            <a:pPr indent="0" marL="0">
+              <a:buNone/>
+            </a:pPr>
+            <a:r>
+              <a:rPr lang="en-US" sz="1300" b="1" dirty="0">
+                <a:solidFill>
+                  <a:srgbClr val="111418"/>
+                </a:solidFill>
+                <a:latin typeface="Calibri" pitchFamily="34" charset="0"/>
+                <a:ea typeface="Calibri" pitchFamily="34" charset="-122"/>
+                <a:cs typeface="Calibri" pitchFamily="34" charset="-120"/>
+              </a:rPr>
+              <a:t>Explicit anti-collapse term</a:t>
+            </a:r>
+            <a:endParaRPr lang="en-US" sz="1300" dirty="0"/>
+          </a:p>
+        </p:txBody>
+      </p:sp>
+      <p:sp>
+        <p:nvSpPr>
+          <p:cNvPr id="29" name="Text 27"/>
+          <p:cNvSpPr txBox="1"/>
+          <p:nvPr/>
+        </p:nvSpPr>
+        <p:spPr>
+          <a:xfrm>
+            <a:off x="6720840" y="4178808"/>
+            <a:ext cx="4754880" cy="548640"/>
+          </a:xfrm>
+          <a:prstGeom prst="rect">
+            <a:avLst/>
+          </a:prstGeom>
+          <a:noFill/>
+          <a:ln/>
+        </p:spPr>
+        <p:txBody>
+          <a:bodyPr wrap="square" lIns="0" tIns="0" rIns="0" bIns="0" rtlCol="0" anchor="ctr"/>
+          <a:lstStyle/>
+          <a:p>
+            <a:pPr indent="0" marL="0">
+              <a:lnSpc>
+                <a:spcPts val="1600"/>
+              </a:lnSpc>
+              <a:buNone/>
+            </a:pPr>
+            <a:r>
+              <a:rPr lang="en-US" sz="1150" dirty="0">
+                <a:solidFill>
+                  <a:srgbClr val="58626C"/>
+                </a:solidFill>
+                <a:latin typeface="Calibri" pitchFamily="34" charset="0"/>
+                <a:ea typeface="Calibri" pitchFamily="34" charset="-122"/>
+                <a:cs typeface="Calibri" pitchFamily="34" charset="-120"/>
+              </a:rPr>
+              <a:t>Variance-covariance regularisation, instead of relying on the EMA alone.</a:t>
+            </a:r>
+            <a:endParaRPr lang="en-US" sz="1150" dirty="0"/>
+          </a:p>
+        </p:txBody>
+      </p:sp>
+    </p:spTree>
+  </p:cSld>
+  <p:clrMapOvr>
+    <a:masterClrMapping/>
+  </p:clrMapOvr>
+</p:sld>
+</file>
+
+<file path=ppt/slides/slide26.xml><?xml version="1.0" encoding="utf-8"?>
+<p:sld xmlns:a="http://schemas.openxmlformats.org/drawingml/2006/main" xmlns:r="http://schemas.openxmlformats.org/officeDocument/2006/relationships" xmlns:p="http://schemas.openxmlformats.org/presentationml/2006/main">
+  <p:cSld name="Slide 26">
+    <p:bg>
+      <p:bgPr>
+        <a:solidFill>
+          <a:srgbClr val="FFFFFF"/>
+        </a:solidFill>
+      </p:bgPr>
+    </p:bg>
+    <p:spTree>
+      <p:nvGrpSpPr>
+        <p:cNvPr id="1" name=""/>
+        <p:cNvGrpSpPr/>
+        <p:nvPr/>
+      </p:nvGrpSpPr>
+      <p:grpSpPr>
+        <a:xfrm>
+          <a:off x="0" y="0"/>
+          <a:ext cx="0" cy="0"/>
+          <a:chOff x="0" y="0"/>
+          <a:chExt cx="0" cy="0"/>
+        </a:xfrm>
+      </p:grpSpPr>
+      <p:sp>
+        <p:nvSpPr>
+          <p:cNvPr id="2" name="Text 0"/>
+          <p:cNvSpPr txBox="1"/>
+          <p:nvPr/>
+        </p:nvSpPr>
+        <p:spPr>
+          <a:xfrm>
+            <a:off x="566928" y="256032"/>
+            <a:ext cx="9601200" cy="219456"/>
+          </a:xfrm>
+          <a:prstGeom prst="rect">
+            <a:avLst/>
+          </a:prstGeom>
+          <a:noFill/>
+          <a:ln/>
+        </p:spPr>
+        <p:txBody>
+          <a:bodyPr wrap="square" lIns="0" tIns="0" rIns="0" bIns="0" rtlCol="0" anchor="ctr"/>
+          <a:lstStyle/>
+          <a:p>
+            <a:pPr indent="0" marL="0">
+              <a:buNone/>
+            </a:pPr>
+            <a:r>
+              <a:rPr lang="en-US" sz="1050" b="1" spc="140" kern="0" dirty="0">
+                <a:solidFill>
+                  <a:srgbClr val="1C7293"/>
+                </a:solidFill>
+                <a:latin typeface="Calibri" pitchFamily="34" charset="0"/>
+                <a:ea typeface="Calibri" pitchFamily="34" charset="-122"/>
+                <a:cs typeface="Calibri" pitchFamily="34" charset="-120"/>
+              </a:rPr>
               <a:t>WHERE WE DREW INSPIRATION FROM</a:t>
             </a:r>
             <a:endParaRPr lang="en-US" sz="1050" dirty="0"/>
@@ -31282,7 +33036,7 @@
                 <a:ea typeface="Calibri" pitchFamily="34" charset="-122"/>
                 <a:cs typeface="Calibri" pitchFamily="34" charset="-120"/>
               </a:rPr>
-              <a:t>25 / 25</a:t>
+              <a:t>26 / 26</a:t>
             </a:r>
             <a:endParaRPr lang="en-US" sz="1050" dirty="0"/>
           </a:p>
@@ -32239,7 +33993,7 @@
                 <a:ea typeface="Calibri" pitchFamily="34" charset="-122"/>
                 <a:cs typeface="Calibri" pitchFamily="34" charset="-120"/>
               </a:rPr>
-              <a:t>3 / 25</a:t>
+              <a:t>3 / 26</a:t>
             </a:r>
             <a:endParaRPr lang="en-US" sz="1050" dirty="0"/>
           </a:p>
@@ -33840,7 +35594,7 @@
                 <a:ea typeface="Calibri" pitchFamily="34" charset="-122"/>
                 <a:cs typeface="Calibri" pitchFamily="34" charset="-120"/>
               </a:rPr>
-              <a:t>4 / 25</a:t>
+              <a:t>4 / 26</a:t>
             </a:r>
             <a:endParaRPr lang="en-US" sz="1050" dirty="0"/>
           </a:p>
@@ -36495,7 +38249,7 @@
                 <a:ea typeface="Calibri" pitchFamily="34" charset="-122"/>
                 <a:cs typeface="Calibri" pitchFamily="34" charset="-120"/>
               </a:rPr>
-              <a:t>5 / 25</a:t>
+              <a:t>5 / 26</a:t>
             </a:r>
             <a:endParaRPr lang="en-US" sz="1050" dirty="0"/>
           </a:p>
@@ -38315,7 +40069,7 @@
                 <a:ea typeface="Calibri" pitchFamily="34" charset="-122"/>
                 <a:cs typeface="Calibri" pitchFamily="34" charset="-120"/>
               </a:rPr>
-              <a:t>6 / 25</a:t>
+              <a:t>6 / 26</a:t>
             </a:r>
             <a:endParaRPr lang="en-US" sz="1050" dirty="0"/>
           </a:p>
@@ -40382,7 +42136,7 @@
                 <a:ea typeface="Calibri" pitchFamily="34" charset="-122"/>
                 <a:cs typeface="Calibri" pitchFamily="34" charset="-120"/>
               </a:rPr>
-              <a:t>7 / 25</a:t>
+              <a:t>7 / 26</a:t>
             </a:r>
             <a:endParaRPr lang="en-US" sz="1050" dirty="0"/>
           </a:p>
@@ -42396,7 +44150,7 @@
                 <a:ea typeface="Calibri" pitchFamily="34" charset="-122"/>
                 <a:cs typeface="Calibri" pitchFamily="34" charset="-120"/>
               </a:rPr>
-              <a:t>8 / 25</a:t>
+              <a:t>8 / 26</a:t>
             </a:r>
             <a:endParaRPr lang="en-US" sz="1050" dirty="0"/>
           </a:p>
@@ -43772,7 +45526,7 @@
                 <a:ea typeface="Calibri" pitchFamily="34" charset="-122"/>
                 <a:cs typeface="Calibri" pitchFamily="34" charset="-120"/>
               </a:rPr>
-              <a:t>9 / 25</a:t>
+              <a:t>9 / 26</a:t>
             </a:r>
             <a:endParaRPr lang="en-US" sz="1050" dirty="0"/>
           </a:p>

--- a/Project8_CV_2025-2026.pptx
+++ b/Project8_CV_2025-2026.pptx
@@ -2897,7 +2897,8 @@
           <a:p>
             <a:r>
               <a:rPr lang="en-US" dirty="0"/>
-              <a:t>50 s. Land hard on 0.7567 with two thresholds. That number frames everything after it.</a:t>
+              <a:t>50 s. Land hard on 0.7567 with two thresholds. Then: we did not assume one patient per image — we found the hidden ID and counted it.
+NO DATA LEAKAGE — FOUND THE HIDDEN PATIENT ID, THEN COUNTED IT — One panoramic per patient, so an image-level split IS a patient-level split, exactly as the assignment requires. verify_patient_level() re-checks it at every run, and load_splits() asserts that no image appears in two splits — so it is a measured result, not a declaration of good faith.</a:t>
             </a:r>
             <a:endParaRPr lang="en-US" dirty="0"/>
           </a:p>
@@ -35208,36 +35209,1142 @@
       </p:sp>
       <p:sp>
         <p:nvSpPr>
-          <p:cNvPr id="8" name="Shape 5"/>
+          <p:cNvPr id="8" name="Text 5"/>
+          <p:cNvSpPr txBox="1"/>
+          <p:nvPr/>
+        </p:nvSpPr>
+        <p:spPr>
+          <a:xfrm>
+            <a:off x="7543800" y="1188720"/>
+            <a:ext cx="4087368" cy="310896"/>
+          </a:xfrm>
+          <a:prstGeom prst="rect">
+            <a:avLst/>
+          </a:prstGeom>
+          <a:noFill/>
+          <a:ln/>
+        </p:spPr>
+        <p:txBody>
+          <a:bodyPr wrap="square" lIns="0" tIns="0" rIns="0" bIns="0" rtlCol="0" anchor="ctr"/>
+          <a:lstStyle/>
+          <a:p>
+            <a:pPr indent="0" marL="0">
+              <a:buNone/>
+            </a:pPr>
+            <a:r>
+              <a:rPr lang="en-US" sz="1300" b="1" dirty="0">
+                <a:solidFill>
+                  <a:srgbClr val="0B3C49"/>
+                </a:solidFill>
+                <a:latin typeface="Calibri" pitchFamily="34" charset="0"/>
+                <a:ea typeface="Calibri" pitchFamily="34" charset="-122"/>
+                <a:cs typeface="Calibri" pitchFamily="34" charset="-120"/>
+              </a:rPr>
+              <a:t>6,741 lesions on 3,924 radiographs — 1.7 lesions per image</a:t>
+            </a:r>
+            <a:endParaRPr lang="en-US" sz="1300" dirty="0"/>
+          </a:p>
+        </p:txBody>
+      </p:sp>
+      <p:graphicFrame>
+        <p:nvGraphicFramePr>
+          <p:cNvPr id="7" name="Table 1"/>
+          <p:cNvGraphicFramePr>
+            <a:graphicFrameLocks noGrp="1"/>
+          </p:cNvGraphicFramePr>
+          <p:nvPr>
+            <p:extLst>
+              <p:ext uri="{D42A27DB-BD31-4B8C-83A1-F6EECF244321}">
+                <p14:modId xmlns:p14="http://schemas.microsoft.com/office/powerpoint/2010/main" val="1579011935"/>
+              </p:ext>
+            </p:extLst>
+          </p:nvPr>
+        </p:nvGraphicFramePr>
+        <p:xfrm>
+          <a:off x="7543800" y="1600200"/>
+          <a:ext cx="4087368" cy="914400"/>
+        </p:xfrm>
+        <a:graphic>
+          <a:graphicData uri="http://schemas.openxmlformats.org/drawingml/2006/table">
+            <a:tbl>
+              <a:tblPr/>
+              <a:tblGrid>
+                <a:gridCol w="1691640"/>
+                <a:gridCol w="1197864"/>
+                <a:gridCol w="1197864"/>
+              </a:tblGrid>
+              <a:tr h="0">
+                <a:tc>
+                  <a:txBody>
+                    <a:bodyPr/>
+                    <a:lstStyle/>
+                    <a:p>
+                      <a:pPr indent="0" marL="0">
+                        <a:buNone/>
+                      </a:pPr>
+                      <a:r>
+                        <a:rPr lang="en-US" sz="1100" b="1" dirty="0">
+                          <a:solidFill>
+                            <a:srgbClr val="FFFFFF"/>
+                          </a:solidFill>
+                          <a:latin typeface="Calibri" pitchFamily="34" charset="0"/>
+                          <a:ea typeface="Calibri" pitchFamily="34" charset="-122"/>
+                          <a:cs typeface="Calibri" pitchFamily="34" charset="-120"/>
+                        </a:rPr>
+                        <a:t>Split</a:t>
+                      </a:r>
+                      <a:endParaRPr lang="en-US" sz="1100" dirty="0">
+                        <a:latin typeface="Calibri" charset="0"/>
+                        <a:ea typeface="Calibri" charset="0"/>
+                        <a:cs typeface="Calibri" charset="0"/>
+                      </a:endParaRPr>
+                    </a:p>
+                  </a:txBody>
+                  <a:tcPr marL="91440" marR="91440" marT="45720" marB="45720" anchor="ctr">
+                    <a:lnL w="9525" cap="flat" cmpd="sng" algn="ctr">
+                      <a:solidFill>
+                        <a:srgbClr val="D6DBDF"/>
+                      </a:solidFill>
+                      <a:prstDash val="solid"/>
+                      <a:round/>
+                      <a:headEnd type="none" w="med" len="med"/>
+                      <a:tailEnd type="none" w="med" len="med"/>
+                    </a:lnL>
+                    <a:lnR w="9525" cap="flat" cmpd="sng" algn="ctr">
+                      <a:solidFill>
+                        <a:srgbClr val="D6DBDF"/>
+                      </a:solidFill>
+                      <a:prstDash val="solid"/>
+                      <a:round/>
+                      <a:headEnd type="none" w="med" len="med"/>
+                      <a:tailEnd type="none" w="med" len="med"/>
+                    </a:lnR>
+                    <a:lnT w="9525" cap="flat" cmpd="sng" algn="ctr">
+                      <a:solidFill>
+                        <a:srgbClr val="D6DBDF"/>
+                      </a:solidFill>
+                      <a:prstDash val="solid"/>
+                      <a:round/>
+                      <a:headEnd type="none" w="med" len="med"/>
+                      <a:tailEnd type="none" w="med" len="med"/>
+                    </a:lnT>
+                    <a:lnB w="9525" cap="flat" cmpd="sng" algn="ctr">
+                      <a:solidFill>
+                        <a:srgbClr val="D6DBDF"/>
+                      </a:solidFill>
+                      <a:prstDash val="solid"/>
+                      <a:round/>
+                      <a:headEnd type="none" w="med" len="med"/>
+                      <a:tailEnd type="none" w="med" len="med"/>
+                    </a:lnB>
+                    <a:solidFill>
+                      <a:srgbClr val="0B3C49"/>
+                    </a:solidFill>
+                  </a:tcPr>
+                </a:tc>
+                <a:tc>
+                  <a:txBody>
+                    <a:bodyPr/>
+                    <a:lstStyle/>
+                    <a:p>
+                      <a:pPr indent="0" marL="0">
+                        <a:buNone/>
+                      </a:pPr>
+                      <a:r>
+                        <a:rPr lang="en-US" sz="1100" b="1" dirty="0">
+                          <a:solidFill>
+                            <a:srgbClr val="FFFFFF"/>
+                          </a:solidFill>
+                          <a:latin typeface="Calibri" pitchFamily="34" charset="0"/>
+                          <a:ea typeface="Calibri" pitchFamily="34" charset="-122"/>
+                          <a:cs typeface="Calibri" pitchFamily="34" charset="-120"/>
+                        </a:rPr>
+                        <a:t>Images</a:t>
+                      </a:r>
+                      <a:endParaRPr lang="en-US" sz="1100" dirty="0">
+                        <a:latin typeface="Calibri" charset="0"/>
+                        <a:ea typeface="Calibri" charset="0"/>
+                        <a:cs typeface="Calibri" charset="0"/>
+                      </a:endParaRPr>
+                    </a:p>
+                  </a:txBody>
+                  <a:tcPr marL="91440" marR="91440" marT="45720" marB="45720" anchor="ctr">
+                    <a:lnL w="9525" cap="flat" cmpd="sng" algn="ctr">
+                      <a:solidFill>
+                        <a:srgbClr val="D6DBDF"/>
+                      </a:solidFill>
+                      <a:prstDash val="solid"/>
+                      <a:round/>
+                      <a:headEnd type="none" w="med" len="med"/>
+                      <a:tailEnd type="none" w="med" len="med"/>
+                    </a:lnL>
+                    <a:lnR w="9525" cap="flat" cmpd="sng" algn="ctr">
+                      <a:solidFill>
+                        <a:srgbClr val="D6DBDF"/>
+                      </a:solidFill>
+                      <a:prstDash val="solid"/>
+                      <a:round/>
+                      <a:headEnd type="none" w="med" len="med"/>
+                      <a:tailEnd type="none" w="med" len="med"/>
+                    </a:lnR>
+                    <a:lnT w="9525" cap="flat" cmpd="sng" algn="ctr">
+                      <a:solidFill>
+                        <a:srgbClr val="D6DBDF"/>
+                      </a:solidFill>
+                      <a:prstDash val="solid"/>
+                      <a:round/>
+                      <a:headEnd type="none" w="med" len="med"/>
+                      <a:tailEnd type="none" w="med" len="med"/>
+                    </a:lnT>
+                    <a:lnB w="9525" cap="flat" cmpd="sng" algn="ctr">
+                      <a:solidFill>
+                        <a:srgbClr val="D6DBDF"/>
+                      </a:solidFill>
+                      <a:prstDash val="solid"/>
+                      <a:round/>
+                      <a:headEnd type="none" w="med" len="med"/>
+                      <a:tailEnd type="none" w="med" len="med"/>
+                    </a:lnB>
+                    <a:solidFill>
+                      <a:srgbClr val="0B3C49"/>
+                    </a:solidFill>
+                  </a:tcPr>
+                </a:tc>
+                <a:tc>
+                  <a:txBody>
+                    <a:bodyPr/>
+                    <a:lstStyle/>
+                    <a:p>
+                      <a:pPr indent="0" marL="0">
+                        <a:buNone/>
+                      </a:pPr>
+                      <a:r>
+                        <a:rPr lang="en-US" sz="1100" b="1" dirty="0">
+                          <a:solidFill>
+                            <a:srgbClr val="FFFFFF"/>
+                          </a:solidFill>
+                          <a:latin typeface="Calibri" pitchFamily="34" charset="0"/>
+                          <a:ea typeface="Calibri" pitchFamily="34" charset="-122"/>
+                          <a:cs typeface="Calibri" pitchFamily="34" charset="-120"/>
+                        </a:rPr>
+                        <a:t>Lesions</a:t>
+                      </a:r>
+                      <a:endParaRPr lang="en-US" sz="1100" dirty="0">
+                        <a:latin typeface="Calibri" charset="0"/>
+                        <a:ea typeface="Calibri" charset="0"/>
+                        <a:cs typeface="Calibri" charset="0"/>
+                      </a:endParaRPr>
+                    </a:p>
+                  </a:txBody>
+                  <a:tcPr marL="91440" marR="91440" marT="45720" marB="45720" anchor="ctr">
+                    <a:lnL w="9525" cap="flat" cmpd="sng" algn="ctr">
+                      <a:solidFill>
+                        <a:srgbClr val="D6DBDF"/>
+                      </a:solidFill>
+                      <a:prstDash val="solid"/>
+                      <a:round/>
+                      <a:headEnd type="none" w="med" len="med"/>
+                      <a:tailEnd type="none" w="med" len="med"/>
+                    </a:lnL>
+                    <a:lnR w="9525" cap="flat" cmpd="sng" algn="ctr">
+                      <a:solidFill>
+                        <a:srgbClr val="D6DBDF"/>
+                      </a:solidFill>
+                      <a:prstDash val="solid"/>
+                      <a:round/>
+                      <a:headEnd type="none" w="med" len="med"/>
+                      <a:tailEnd type="none" w="med" len="med"/>
+                    </a:lnR>
+                    <a:lnT w="9525" cap="flat" cmpd="sng" algn="ctr">
+                      <a:solidFill>
+                        <a:srgbClr val="D6DBDF"/>
+                      </a:solidFill>
+                      <a:prstDash val="solid"/>
+                      <a:round/>
+                      <a:headEnd type="none" w="med" len="med"/>
+                      <a:tailEnd type="none" w="med" len="med"/>
+                    </a:lnT>
+                    <a:lnB w="9525" cap="flat" cmpd="sng" algn="ctr">
+                      <a:solidFill>
+                        <a:srgbClr val="D6DBDF"/>
+                      </a:solidFill>
+                      <a:prstDash val="solid"/>
+                      <a:round/>
+                      <a:headEnd type="none" w="med" len="med"/>
+                      <a:tailEnd type="none" w="med" len="med"/>
+                    </a:lnB>
+                    <a:solidFill>
+                      <a:srgbClr val="0B3C49"/>
+                    </a:solidFill>
+                  </a:tcPr>
+                </a:tc>
+              </a:tr>
+              <a:tr h="0">
+                <a:tc>
+                  <a:txBody>
+                    <a:bodyPr/>
+                    <a:lstStyle/>
+                    <a:p>
+                      <a:pPr indent="0" marL="0">
+                        <a:buNone/>
+                      </a:pPr>
+                      <a:r>
+                        <a:rPr lang="en-US" sz="1150" dirty="0">
+                          <a:solidFill>
+                            <a:srgbClr val="111418"/>
+                          </a:solidFill>
+                          <a:latin typeface="Calibri" pitchFamily="34" charset="0"/>
+                          <a:ea typeface="Calibri" pitchFamily="34" charset="-122"/>
+                          <a:cs typeface="Calibri" pitchFamily="34" charset="-120"/>
+                        </a:rPr>
+                        <a:t>Train</a:t>
+                      </a:r>
+                      <a:endParaRPr lang="en-US" sz="1150" dirty="0">
+                        <a:latin typeface="Calibri" charset="0"/>
+                        <a:ea typeface="Calibri" charset="0"/>
+                        <a:cs typeface="Calibri" charset="0"/>
+                      </a:endParaRPr>
+                    </a:p>
+                  </a:txBody>
+                  <a:tcPr marL="91440" marR="91440" marT="45720" marB="45720" anchor="ctr">
+                    <a:lnL w="9525" cap="flat" cmpd="sng" algn="ctr">
+                      <a:solidFill>
+                        <a:srgbClr val="D6DBDF"/>
+                      </a:solidFill>
+                      <a:prstDash val="solid"/>
+                      <a:round/>
+                      <a:headEnd type="none" w="med" len="med"/>
+                      <a:tailEnd type="none" w="med" len="med"/>
+                    </a:lnL>
+                    <a:lnR w="9525" cap="flat" cmpd="sng" algn="ctr">
+                      <a:solidFill>
+                        <a:srgbClr val="D6DBDF"/>
+                      </a:solidFill>
+                      <a:prstDash val="solid"/>
+                      <a:round/>
+                      <a:headEnd type="none" w="med" len="med"/>
+                      <a:tailEnd type="none" w="med" len="med"/>
+                    </a:lnR>
+                    <a:lnT w="9525" cap="flat" cmpd="sng" algn="ctr">
+                      <a:solidFill>
+                        <a:srgbClr val="D6DBDF"/>
+                      </a:solidFill>
+                      <a:prstDash val="solid"/>
+                      <a:round/>
+                      <a:headEnd type="none" w="med" len="med"/>
+                      <a:tailEnd type="none" w="med" len="med"/>
+                    </a:lnT>
+                    <a:lnB w="9525" cap="flat" cmpd="sng" algn="ctr">
+                      <a:solidFill>
+                        <a:srgbClr val="D6DBDF"/>
+                      </a:solidFill>
+                      <a:prstDash val="solid"/>
+                      <a:round/>
+                      <a:headEnd type="none" w="med" len="med"/>
+                      <a:tailEnd type="none" w="med" len="med"/>
+                    </a:lnB>
+                  </a:tcPr>
+                </a:tc>
+                <a:tc>
+                  <a:txBody>
+                    <a:bodyPr/>
+                    <a:lstStyle/>
+                    <a:p>
+                      <a:pPr algn="r" indent="0" marL="0">
+                        <a:buNone/>
+                      </a:pPr>
+                      <a:r>
+                        <a:rPr lang="en-US" sz="1150" dirty="0">
+                          <a:solidFill>
+                            <a:srgbClr val="111418"/>
+                          </a:solidFill>
+                          <a:latin typeface="Calibri" pitchFamily="34" charset="0"/>
+                          <a:ea typeface="Calibri" pitchFamily="34" charset="-122"/>
+                          <a:cs typeface="Calibri" pitchFamily="34" charset="-120"/>
+                        </a:rPr>
+                        <a:t>2,746</a:t>
+                      </a:r>
+                      <a:endParaRPr lang="en-US" sz="1150" dirty="0">
+                        <a:latin typeface="Calibri" charset="0"/>
+                        <a:ea typeface="Calibri" charset="0"/>
+                        <a:cs typeface="Calibri" charset="0"/>
+                      </a:endParaRPr>
+                    </a:p>
+                  </a:txBody>
+                  <a:tcPr marL="91440" marR="91440" marT="45720" marB="45720" anchor="ctr">
+                    <a:lnL w="9525" cap="flat" cmpd="sng" algn="ctr">
+                      <a:solidFill>
+                        <a:srgbClr val="D6DBDF"/>
+                      </a:solidFill>
+                      <a:prstDash val="solid"/>
+                      <a:round/>
+                      <a:headEnd type="none" w="med" len="med"/>
+                      <a:tailEnd type="none" w="med" len="med"/>
+                    </a:lnL>
+                    <a:lnR w="9525" cap="flat" cmpd="sng" algn="ctr">
+                      <a:solidFill>
+                        <a:srgbClr val="D6DBDF"/>
+                      </a:solidFill>
+                      <a:prstDash val="solid"/>
+                      <a:round/>
+                      <a:headEnd type="none" w="med" len="med"/>
+                      <a:tailEnd type="none" w="med" len="med"/>
+                    </a:lnR>
+                    <a:lnT w="9525" cap="flat" cmpd="sng" algn="ctr">
+                      <a:solidFill>
+                        <a:srgbClr val="D6DBDF"/>
+                      </a:solidFill>
+                      <a:prstDash val="solid"/>
+                      <a:round/>
+                      <a:headEnd type="none" w="med" len="med"/>
+                      <a:tailEnd type="none" w="med" len="med"/>
+                    </a:lnT>
+                    <a:lnB w="9525" cap="flat" cmpd="sng" algn="ctr">
+                      <a:solidFill>
+                        <a:srgbClr val="D6DBDF"/>
+                      </a:solidFill>
+                      <a:prstDash val="solid"/>
+                      <a:round/>
+                      <a:headEnd type="none" w="med" len="med"/>
+                      <a:tailEnd type="none" w="med" len="med"/>
+                    </a:lnB>
+                  </a:tcPr>
+                </a:tc>
+                <a:tc>
+                  <a:txBody>
+                    <a:bodyPr/>
+                    <a:lstStyle/>
+                    <a:p>
+                      <a:pPr algn="r" indent="0" marL="0">
+                        <a:buNone/>
+                      </a:pPr>
+                      <a:r>
+                        <a:rPr lang="en-US" sz="1150" dirty="0">
+                          <a:solidFill>
+                            <a:srgbClr val="111418"/>
+                          </a:solidFill>
+                          <a:latin typeface="Calibri" pitchFamily="34" charset="0"/>
+                          <a:ea typeface="Calibri" pitchFamily="34" charset="-122"/>
+                          <a:cs typeface="Calibri" pitchFamily="34" charset="-120"/>
+                        </a:rPr>
+                        <a:t>4,719</a:t>
+                      </a:r>
+                      <a:endParaRPr lang="en-US" sz="1150" dirty="0">
+                        <a:latin typeface="Calibri" charset="0"/>
+                        <a:ea typeface="Calibri" charset="0"/>
+                        <a:cs typeface="Calibri" charset="0"/>
+                      </a:endParaRPr>
+                    </a:p>
+                  </a:txBody>
+                  <a:tcPr marL="91440" marR="91440" marT="45720" marB="45720" anchor="ctr">
+                    <a:lnL w="9525" cap="flat" cmpd="sng" algn="ctr">
+                      <a:solidFill>
+                        <a:srgbClr val="D6DBDF"/>
+                      </a:solidFill>
+                      <a:prstDash val="solid"/>
+                      <a:round/>
+                      <a:headEnd type="none" w="med" len="med"/>
+                      <a:tailEnd type="none" w="med" len="med"/>
+                    </a:lnL>
+                    <a:lnR w="9525" cap="flat" cmpd="sng" algn="ctr">
+                      <a:solidFill>
+                        <a:srgbClr val="D6DBDF"/>
+                      </a:solidFill>
+                      <a:prstDash val="solid"/>
+                      <a:round/>
+                      <a:headEnd type="none" w="med" len="med"/>
+                      <a:tailEnd type="none" w="med" len="med"/>
+                    </a:lnR>
+                    <a:lnT w="9525" cap="flat" cmpd="sng" algn="ctr">
+                      <a:solidFill>
+                        <a:srgbClr val="D6DBDF"/>
+                      </a:solidFill>
+                      <a:prstDash val="solid"/>
+                      <a:round/>
+                      <a:headEnd type="none" w="med" len="med"/>
+                      <a:tailEnd type="none" w="med" len="med"/>
+                    </a:lnT>
+                    <a:lnB w="9525" cap="flat" cmpd="sng" algn="ctr">
+                      <a:solidFill>
+                        <a:srgbClr val="D6DBDF"/>
+                      </a:solidFill>
+                      <a:prstDash val="solid"/>
+                      <a:round/>
+                      <a:headEnd type="none" w="med" len="med"/>
+                      <a:tailEnd type="none" w="med" len="med"/>
+                    </a:lnB>
+                  </a:tcPr>
+                </a:tc>
+              </a:tr>
+              <a:tr h="0">
+                <a:tc>
+                  <a:txBody>
+                    <a:bodyPr/>
+                    <a:lstStyle/>
+                    <a:p>
+                      <a:pPr indent="0" marL="0">
+                        <a:buNone/>
+                      </a:pPr>
+                      <a:r>
+                        <a:rPr lang="en-US" sz="1150" dirty="0">
+                          <a:solidFill>
+                            <a:srgbClr val="111418"/>
+                          </a:solidFill>
+                          <a:latin typeface="Calibri" pitchFamily="34" charset="0"/>
+                          <a:ea typeface="Calibri" pitchFamily="34" charset="-122"/>
+                          <a:cs typeface="Calibri" pitchFamily="34" charset="-120"/>
+                        </a:rPr>
+                        <a:t>Validation</a:t>
+                      </a:r>
+                      <a:endParaRPr lang="en-US" sz="1150" dirty="0">
+                        <a:latin typeface="Calibri" charset="0"/>
+                        <a:ea typeface="Calibri" charset="0"/>
+                        <a:cs typeface="Calibri" charset="0"/>
+                      </a:endParaRPr>
+                    </a:p>
+                  </a:txBody>
+                  <a:tcPr marL="91440" marR="91440" marT="45720" marB="45720" anchor="ctr">
+                    <a:lnL w="9525" cap="flat" cmpd="sng" algn="ctr">
+                      <a:solidFill>
+                        <a:srgbClr val="D6DBDF"/>
+                      </a:solidFill>
+                      <a:prstDash val="solid"/>
+                      <a:round/>
+                      <a:headEnd type="none" w="med" len="med"/>
+                      <a:tailEnd type="none" w="med" len="med"/>
+                    </a:lnL>
+                    <a:lnR w="9525" cap="flat" cmpd="sng" algn="ctr">
+                      <a:solidFill>
+                        <a:srgbClr val="D6DBDF"/>
+                      </a:solidFill>
+                      <a:prstDash val="solid"/>
+                      <a:round/>
+                      <a:headEnd type="none" w="med" len="med"/>
+                      <a:tailEnd type="none" w="med" len="med"/>
+                    </a:lnR>
+                    <a:lnT w="9525" cap="flat" cmpd="sng" algn="ctr">
+                      <a:solidFill>
+                        <a:srgbClr val="D6DBDF"/>
+                      </a:solidFill>
+                      <a:prstDash val="solid"/>
+                      <a:round/>
+                      <a:headEnd type="none" w="med" len="med"/>
+                      <a:tailEnd type="none" w="med" len="med"/>
+                    </a:lnT>
+                    <a:lnB w="9525" cap="flat" cmpd="sng" algn="ctr">
+                      <a:solidFill>
+                        <a:srgbClr val="D6DBDF"/>
+                      </a:solidFill>
+                      <a:prstDash val="solid"/>
+                      <a:round/>
+                      <a:headEnd type="none" w="med" len="med"/>
+                      <a:tailEnd type="none" w="med" len="med"/>
+                    </a:lnB>
+                  </a:tcPr>
+                </a:tc>
+                <a:tc>
+                  <a:txBody>
+                    <a:bodyPr/>
+                    <a:lstStyle/>
+                    <a:p>
+                      <a:pPr algn="r" indent="0" marL="0">
+                        <a:buNone/>
+                      </a:pPr>
+                      <a:r>
+                        <a:rPr lang="en-US" sz="1150" dirty="0">
+                          <a:solidFill>
+                            <a:srgbClr val="111418"/>
+                          </a:solidFill>
+                          <a:latin typeface="Calibri" pitchFamily="34" charset="0"/>
+                          <a:ea typeface="Calibri" pitchFamily="34" charset="-122"/>
+                          <a:cs typeface="Calibri" pitchFamily="34" charset="-120"/>
+                        </a:rPr>
+                        <a:t>588</a:t>
+                      </a:r>
+                      <a:endParaRPr lang="en-US" sz="1150" dirty="0">
+                        <a:latin typeface="Calibri" charset="0"/>
+                        <a:ea typeface="Calibri" charset="0"/>
+                        <a:cs typeface="Calibri" charset="0"/>
+                      </a:endParaRPr>
+                    </a:p>
+                  </a:txBody>
+                  <a:tcPr marL="91440" marR="91440" marT="45720" marB="45720" anchor="ctr">
+                    <a:lnL w="9525" cap="flat" cmpd="sng" algn="ctr">
+                      <a:solidFill>
+                        <a:srgbClr val="D6DBDF"/>
+                      </a:solidFill>
+                      <a:prstDash val="solid"/>
+                      <a:round/>
+                      <a:headEnd type="none" w="med" len="med"/>
+                      <a:tailEnd type="none" w="med" len="med"/>
+                    </a:lnL>
+                    <a:lnR w="9525" cap="flat" cmpd="sng" algn="ctr">
+                      <a:solidFill>
+                        <a:srgbClr val="D6DBDF"/>
+                      </a:solidFill>
+                      <a:prstDash val="solid"/>
+                      <a:round/>
+                      <a:headEnd type="none" w="med" len="med"/>
+                      <a:tailEnd type="none" w="med" len="med"/>
+                    </a:lnR>
+                    <a:lnT w="9525" cap="flat" cmpd="sng" algn="ctr">
+                      <a:solidFill>
+                        <a:srgbClr val="D6DBDF"/>
+                      </a:solidFill>
+                      <a:prstDash val="solid"/>
+                      <a:round/>
+                      <a:headEnd type="none" w="med" len="med"/>
+                      <a:tailEnd type="none" w="med" len="med"/>
+                    </a:lnT>
+                    <a:lnB w="9525" cap="flat" cmpd="sng" algn="ctr">
+                      <a:solidFill>
+                        <a:srgbClr val="D6DBDF"/>
+                      </a:solidFill>
+                      <a:prstDash val="solid"/>
+                      <a:round/>
+                      <a:headEnd type="none" w="med" len="med"/>
+                      <a:tailEnd type="none" w="med" len="med"/>
+                    </a:lnB>
+                  </a:tcPr>
+                </a:tc>
+                <a:tc>
+                  <a:txBody>
+                    <a:bodyPr/>
+                    <a:lstStyle/>
+                    <a:p>
+                      <a:pPr algn="r" indent="0" marL="0">
+                        <a:buNone/>
+                      </a:pPr>
+                      <a:r>
+                        <a:rPr lang="en-US" sz="1150" dirty="0">
+                          <a:solidFill>
+                            <a:srgbClr val="111418"/>
+                          </a:solidFill>
+                          <a:latin typeface="Calibri" pitchFamily="34" charset="0"/>
+                          <a:ea typeface="Calibri" pitchFamily="34" charset="-122"/>
+                          <a:cs typeface="Calibri" pitchFamily="34" charset="-120"/>
+                        </a:rPr>
+                        <a:t>1,009</a:t>
+                      </a:r>
+                      <a:endParaRPr lang="en-US" sz="1150" dirty="0">
+                        <a:latin typeface="Calibri" charset="0"/>
+                        <a:ea typeface="Calibri" charset="0"/>
+                        <a:cs typeface="Calibri" charset="0"/>
+                      </a:endParaRPr>
+                    </a:p>
+                  </a:txBody>
+                  <a:tcPr marL="91440" marR="91440" marT="45720" marB="45720" anchor="ctr">
+                    <a:lnL w="9525" cap="flat" cmpd="sng" algn="ctr">
+                      <a:solidFill>
+                        <a:srgbClr val="D6DBDF"/>
+                      </a:solidFill>
+                      <a:prstDash val="solid"/>
+                      <a:round/>
+                      <a:headEnd type="none" w="med" len="med"/>
+                      <a:tailEnd type="none" w="med" len="med"/>
+                    </a:lnL>
+                    <a:lnR w="9525" cap="flat" cmpd="sng" algn="ctr">
+                      <a:solidFill>
+                        <a:srgbClr val="D6DBDF"/>
+                      </a:solidFill>
+                      <a:prstDash val="solid"/>
+                      <a:round/>
+                      <a:headEnd type="none" w="med" len="med"/>
+                      <a:tailEnd type="none" w="med" len="med"/>
+                    </a:lnR>
+                    <a:lnT w="9525" cap="flat" cmpd="sng" algn="ctr">
+                      <a:solidFill>
+                        <a:srgbClr val="D6DBDF"/>
+                      </a:solidFill>
+                      <a:prstDash val="solid"/>
+                      <a:round/>
+                      <a:headEnd type="none" w="med" len="med"/>
+                      <a:tailEnd type="none" w="med" len="med"/>
+                    </a:lnT>
+                    <a:lnB w="9525" cap="flat" cmpd="sng" algn="ctr">
+                      <a:solidFill>
+                        <a:srgbClr val="D6DBDF"/>
+                      </a:solidFill>
+                      <a:prstDash val="solid"/>
+                      <a:round/>
+                      <a:headEnd type="none" w="med" len="med"/>
+                      <a:tailEnd type="none" w="med" len="med"/>
+                    </a:lnB>
+                  </a:tcPr>
+                </a:tc>
+              </a:tr>
+              <a:tr h="0">
+                <a:tc>
+                  <a:txBody>
+                    <a:bodyPr/>
+                    <a:lstStyle/>
+                    <a:p>
+                      <a:pPr indent="0" marL="0">
+                        <a:buNone/>
+                      </a:pPr>
+                      <a:r>
+                        <a:rPr lang="en-US" sz="1150" dirty="0">
+                          <a:solidFill>
+                            <a:srgbClr val="111418"/>
+                          </a:solidFill>
+                          <a:latin typeface="Calibri" pitchFamily="34" charset="0"/>
+                          <a:ea typeface="Calibri" pitchFamily="34" charset="-122"/>
+                          <a:cs typeface="Calibri" pitchFamily="34" charset="-120"/>
+                        </a:rPr>
+                        <a:t>Test</a:t>
+                      </a:r>
+                      <a:endParaRPr lang="en-US" sz="1150" dirty="0">
+                        <a:latin typeface="Calibri" charset="0"/>
+                        <a:ea typeface="Calibri" charset="0"/>
+                        <a:cs typeface="Calibri" charset="0"/>
+                      </a:endParaRPr>
+                    </a:p>
+                  </a:txBody>
+                  <a:tcPr marL="91440" marR="91440" marT="45720" marB="45720" anchor="ctr">
+                    <a:lnL w="9525" cap="flat" cmpd="sng" algn="ctr">
+                      <a:solidFill>
+                        <a:srgbClr val="D6DBDF"/>
+                      </a:solidFill>
+                      <a:prstDash val="solid"/>
+                      <a:round/>
+                      <a:headEnd type="none" w="med" len="med"/>
+                      <a:tailEnd type="none" w="med" len="med"/>
+                    </a:lnL>
+                    <a:lnR w="9525" cap="flat" cmpd="sng" algn="ctr">
+                      <a:solidFill>
+                        <a:srgbClr val="D6DBDF"/>
+                      </a:solidFill>
+                      <a:prstDash val="solid"/>
+                      <a:round/>
+                      <a:headEnd type="none" w="med" len="med"/>
+                      <a:tailEnd type="none" w="med" len="med"/>
+                    </a:lnR>
+                    <a:lnT w="9525" cap="flat" cmpd="sng" algn="ctr">
+                      <a:solidFill>
+                        <a:srgbClr val="D6DBDF"/>
+                      </a:solidFill>
+                      <a:prstDash val="solid"/>
+                      <a:round/>
+                      <a:headEnd type="none" w="med" len="med"/>
+                      <a:tailEnd type="none" w="med" len="med"/>
+                    </a:lnT>
+                    <a:lnB w="9525" cap="flat" cmpd="sng" algn="ctr">
+                      <a:solidFill>
+                        <a:srgbClr val="D6DBDF"/>
+                      </a:solidFill>
+                      <a:prstDash val="solid"/>
+                      <a:round/>
+                      <a:headEnd type="none" w="med" len="med"/>
+                      <a:tailEnd type="none" w="med" len="med"/>
+                    </a:lnB>
+                  </a:tcPr>
+                </a:tc>
+                <a:tc>
+                  <a:txBody>
+                    <a:bodyPr/>
+                    <a:lstStyle/>
+                    <a:p>
+                      <a:pPr algn="r" indent="0" marL="0">
+                        <a:buNone/>
+                      </a:pPr>
+                      <a:r>
+                        <a:rPr lang="en-US" sz="1150" dirty="0">
+                          <a:solidFill>
+                            <a:srgbClr val="111418"/>
+                          </a:solidFill>
+                          <a:latin typeface="Calibri" pitchFamily="34" charset="0"/>
+                          <a:ea typeface="Calibri" pitchFamily="34" charset="-122"/>
+                          <a:cs typeface="Calibri" pitchFamily="34" charset="-120"/>
+                        </a:rPr>
+                        <a:t>590</a:t>
+                      </a:r>
+                      <a:endParaRPr lang="en-US" sz="1150" dirty="0">
+                        <a:latin typeface="Calibri" charset="0"/>
+                        <a:ea typeface="Calibri" charset="0"/>
+                        <a:cs typeface="Calibri" charset="0"/>
+                      </a:endParaRPr>
+                    </a:p>
+                  </a:txBody>
+                  <a:tcPr marL="91440" marR="91440" marT="45720" marB="45720" anchor="ctr">
+                    <a:lnL w="9525" cap="flat" cmpd="sng" algn="ctr">
+                      <a:solidFill>
+                        <a:srgbClr val="D6DBDF"/>
+                      </a:solidFill>
+                      <a:prstDash val="solid"/>
+                      <a:round/>
+                      <a:headEnd type="none" w="med" len="med"/>
+                      <a:tailEnd type="none" w="med" len="med"/>
+                    </a:lnL>
+                    <a:lnR w="9525" cap="flat" cmpd="sng" algn="ctr">
+                      <a:solidFill>
+                        <a:srgbClr val="D6DBDF"/>
+                      </a:solidFill>
+                      <a:prstDash val="solid"/>
+                      <a:round/>
+                      <a:headEnd type="none" w="med" len="med"/>
+                      <a:tailEnd type="none" w="med" len="med"/>
+                    </a:lnR>
+                    <a:lnT w="9525" cap="flat" cmpd="sng" algn="ctr">
+                      <a:solidFill>
+                        <a:srgbClr val="D6DBDF"/>
+                      </a:solidFill>
+                      <a:prstDash val="solid"/>
+                      <a:round/>
+                      <a:headEnd type="none" w="med" len="med"/>
+                      <a:tailEnd type="none" w="med" len="med"/>
+                    </a:lnT>
+                    <a:lnB w="9525" cap="flat" cmpd="sng" algn="ctr">
+                      <a:solidFill>
+                        <a:srgbClr val="D6DBDF"/>
+                      </a:solidFill>
+                      <a:prstDash val="solid"/>
+                      <a:round/>
+                      <a:headEnd type="none" w="med" len="med"/>
+                      <a:tailEnd type="none" w="med" len="med"/>
+                    </a:lnB>
+                  </a:tcPr>
+                </a:tc>
+                <a:tc>
+                  <a:txBody>
+                    <a:bodyPr/>
+                    <a:lstStyle/>
+                    <a:p>
+                      <a:pPr algn="r" indent="0" marL="0">
+                        <a:buNone/>
+                      </a:pPr>
+                      <a:r>
+                        <a:rPr lang="en-US" sz="1150" dirty="0">
+                          <a:solidFill>
+                            <a:srgbClr val="111418"/>
+                          </a:solidFill>
+                          <a:latin typeface="Calibri" pitchFamily="34" charset="0"/>
+                          <a:ea typeface="Calibri" pitchFamily="34" charset="-122"/>
+                          <a:cs typeface="Calibri" pitchFamily="34" charset="-120"/>
+                        </a:rPr>
+                        <a:t>1,013</a:t>
+                      </a:r>
+                      <a:endParaRPr lang="en-US" sz="1150" dirty="0">
+                        <a:latin typeface="Calibri" charset="0"/>
+                        <a:ea typeface="Calibri" charset="0"/>
+                        <a:cs typeface="Calibri" charset="0"/>
+                      </a:endParaRPr>
+                    </a:p>
+                  </a:txBody>
+                  <a:tcPr marL="91440" marR="91440" marT="45720" marB="45720" anchor="ctr">
+                    <a:lnL w="9525" cap="flat" cmpd="sng" algn="ctr">
+                      <a:solidFill>
+                        <a:srgbClr val="D6DBDF"/>
+                      </a:solidFill>
+                      <a:prstDash val="solid"/>
+                      <a:round/>
+                      <a:headEnd type="none" w="med" len="med"/>
+                      <a:tailEnd type="none" w="med" len="med"/>
+                    </a:lnL>
+                    <a:lnR w="9525" cap="flat" cmpd="sng" algn="ctr">
+                      <a:solidFill>
+                        <a:srgbClr val="D6DBDF"/>
+                      </a:solidFill>
+                      <a:prstDash val="solid"/>
+                      <a:round/>
+                      <a:headEnd type="none" w="med" len="med"/>
+                      <a:tailEnd type="none" w="med" len="med"/>
+                    </a:lnR>
+                    <a:lnT w="9525" cap="flat" cmpd="sng" algn="ctr">
+                      <a:solidFill>
+                        <a:srgbClr val="D6DBDF"/>
+                      </a:solidFill>
+                      <a:prstDash val="solid"/>
+                      <a:round/>
+                      <a:headEnd type="none" w="med" len="med"/>
+                      <a:tailEnd type="none" w="med" len="med"/>
+                    </a:lnT>
+                    <a:lnB w="9525" cap="flat" cmpd="sng" algn="ctr">
+                      <a:solidFill>
+                        <a:srgbClr val="D6DBDF"/>
+                      </a:solidFill>
+                      <a:prstDash val="solid"/>
+                      <a:round/>
+                      <a:headEnd type="none" w="med" len="med"/>
+                      <a:tailEnd type="none" w="med" len="med"/>
+                    </a:lnB>
+                  </a:tcPr>
+                </a:tc>
+              </a:tr>
+              <a:tr h="0">
+                <a:tc>
+                  <a:txBody>
+                    <a:bodyPr/>
+                    <a:lstStyle/>
+                    <a:p>
+                      <a:pPr indent="0" marL="0">
+                        <a:buNone/>
+                      </a:pPr>
+                      <a:r>
+                        <a:rPr lang="en-US" sz="1150" b="1" dirty="0">
+                          <a:solidFill>
+                            <a:srgbClr val="111418"/>
+                          </a:solidFill>
+                          <a:latin typeface="Calibri" pitchFamily="34" charset="0"/>
+                          <a:ea typeface="Calibri" pitchFamily="34" charset="-122"/>
+                          <a:cs typeface="Calibri" pitchFamily="34" charset="-120"/>
+                        </a:rPr>
+                        <a:t>Total</a:t>
+                      </a:r>
+                      <a:endParaRPr lang="en-US" sz="1150" dirty="0">
+                        <a:latin typeface="Calibri" charset="0"/>
+                        <a:ea typeface="Calibri" charset="0"/>
+                        <a:cs typeface="Calibri" charset="0"/>
+                      </a:endParaRPr>
+                    </a:p>
+                  </a:txBody>
+                  <a:tcPr marL="91440" marR="91440" marT="45720" marB="45720" anchor="ctr">
+                    <a:lnL w="9525" cap="flat" cmpd="sng" algn="ctr">
+                      <a:solidFill>
+                        <a:srgbClr val="D6DBDF"/>
+                      </a:solidFill>
+                      <a:prstDash val="solid"/>
+                      <a:round/>
+                      <a:headEnd type="none" w="med" len="med"/>
+                      <a:tailEnd type="none" w="med" len="med"/>
+                    </a:lnL>
+                    <a:lnR w="9525" cap="flat" cmpd="sng" algn="ctr">
+                      <a:solidFill>
+                        <a:srgbClr val="D6DBDF"/>
+                      </a:solidFill>
+                      <a:prstDash val="solid"/>
+                      <a:round/>
+                      <a:headEnd type="none" w="med" len="med"/>
+                      <a:tailEnd type="none" w="med" len="med"/>
+                    </a:lnR>
+                    <a:lnT w="9525" cap="flat" cmpd="sng" algn="ctr">
+                      <a:solidFill>
+                        <a:srgbClr val="D6DBDF"/>
+                      </a:solidFill>
+                      <a:prstDash val="solid"/>
+                      <a:round/>
+                      <a:headEnd type="none" w="med" len="med"/>
+                      <a:tailEnd type="none" w="med" len="med"/>
+                    </a:lnT>
+                    <a:lnB w="9525" cap="flat" cmpd="sng" algn="ctr">
+                      <a:solidFill>
+                        <a:srgbClr val="D6DBDF"/>
+                      </a:solidFill>
+                      <a:prstDash val="solid"/>
+                      <a:round/>
+                      <a:headEnd type="none" w="med" len="med"/>
+                      <a:tailEnd type="none" w="med" len="med"/>
+                    </a:lnB>
+                  </a:tcPr>
+                </a:tc>
+                <a:tc>
+                  <a:txBody>
+                    <a:bodyPr/>
+                    <a:lstStyle/>
+                    <a:p>
+                      <a:pPr algn="r" indent="0" marL="0">
+                        <a:buNone/>
+                      </a:pPr>
+                      <a:r>
+                        <a:rPr lang="en-US" sz="1150" b="1" dirty="0">
+                          <a:solidFill>
+                            <a:srgbClr val="111418"/>
+                          </a:solidFill>
+                          <a:latin typeface="Calibri" pitchFamily="34" charset="0"/>
+                          <a:ea typeface="Calibri" pitchFamily="34" charset="-122"/>
+                          <a:cs typeface="Calibri" pitchFamily="34" charset="-120"/>
+                        </a:rPr>
+                        <a:t>3,924</a:t>
+                      </a:r>
+                      <a:endParaRPr lang="en-US" sz="1150" dirty="0">
+                        <a:latin typeface="Calibri" charset="0"/>
+                        <a:ea typeface="Calibri" charset="0"/>
+                        <a:cs typeface="Calibri" charset="0"/>
+                      </a:endParaRPr>
+                    </a:p>
+                  </a:txBody>
+                  <a:tcPr marL="91440" marR="91440" marT="45720" marB="45720" anchor="ctr">
+                    <a:lnL w="9525" cap="flat" cmpd="sng" algn="ctr">
+                      <a:solidFill>
+                        <a:srgbClr val="D6DBDF"/>
+                      </a:solidFill>
+                      <a:prstDash val="solid"/>
+                      <a:round/>
+                      <a:headEnd type="none" w="med" len="med"/>
+                      <a:tailEnd type="none" w="med" len="med"/>
+                    </a:lnL>
+                    <a:lnR w="9525" cap="flat" cmpd="sng" algn="ctr">
+                      <a:solidFill>
+                        <a:srgbClr val="D6DBDF"/>
+                      </a:solidFill>
+                      <a:prstDash val="solid"/>
+                      <a:round/>
+                      <a:headEnd type="none" w="med" len="med"/>
+                      <a:tailEnd type="none" w="med" len="med"/>
+                    </a:lnR>
+                    <a:lnT w="9525" cap="flat" cmpd="sng" algn="ctr">
+                      <a:solidFill>
+                        <a:srgbClr val="D6DBDF"/>
+                      </a:solidFill>
+                      <a:prstDash val="solid"/>
+                      <a:round/>
+                      <a:headEnd type="none" w="med" len="med"/>
+                      <a:tailEnd type="none" w="med" len="med"/>
+                    </a:lnT>
+                    <a:lnB w="9525" cap="flat" cmpd="sng" algn="ctr">
+                      <a:solidFill>
+                        <a:srgbClr val="D6DBDF"/>
+                      </a:solidFill>
+                      <a:prstDash val="solid"/>
+                      <a:round/>
+                      <a:headEnd type="none" w="med" len="med"/>
+                      <a:tailEnd type="none" w="med" len="med"/>
+                    </a:lnB>
+                  </a:tcPr>
+                </a:tc>
+                <a:tc>
+                  <a:txBody>
+                    <a:bodyPr/>
+                    <a:lstStyle/>
+                    <a:p>
+                      <a:pPr algn="r" indent="0" marL="0">
+                        <a:buNone/>
+                      </a:pPr>
+                      <a:r>
+                        <a:rPr lang="en-US" sz="1150" b="1" dirty="0">
+                          <a:solidFill>
+                            <a:srgbClr val="111418"/>
+                          </a:solidFill>
+                          <a:latin typeface="Calibri" pitchFamily="34" charset="0"/>
+                          <a:ea typeface="Calibri" pitchFamily="34" charset="-122"/>
+                          <a:cs typeface="Calibri" pitchFamily="34" charset="-120"/>
+                        </a:rPr>
+                        <a:t>6,741</a:t>
+                      </a:r>
+                      <a:endParaRPr lang="en-US" sz="1150" dirty="0">
+                        <a:latin typeface="Calibri" charset="0"/>
+                        <a:ea typeface="Calibri" charset="0"/>
+                        <a:cs typeface="Calibri" charset="0"/>
+                      </a:endParaRPr>
+                    </a:p>
+                  </a:txBody>
+                  <a:tcPr marL="91440" marR="91440" marT="45720" marB="45720" anchor="ctr">
+                    <a:lnL w="9525" cap="flat" cmpd="sng" algn="ctr">
+                      <a:solidFill>
+                        <a:srgbClr val="D6DBDF"/>
+                      </a:solidFill>
+                      <a:prstDash val="solid"/>
+                      <a:round/>
+                      <a:headEnd type="none" w="med" len="med"/>
+                      <a:tailEnd type="none" w="med" len="med"/>
+                    </a:lnL>
+                    <a:lnR w="9525" cap="flat" cmpd="sng" algn="ctr">
+                      <a:solidFill>
+                        <a:srgbClr val="D6DBDF"/>
+                      </a:solidFill>
+                      <a:prstDash val="solid"/>
+                      <a:round/>
+                      <a:headEnd type="none" w="med" len="med"/>
+                      <a:tailEnd type="none" w="med" len="med"/>
+                    </a:lnR>
+                    <a:lnT w="9525" cap="flat" cmpd="sng" algn="ctr">
+                      <a:solidFill>
+                        <a:srgbClr val="D6DBDF"/>
+                      </a:solidFill>
+                      <a:prstDash val="solid"/>
+                      <a:round/>
+                      <a:headEnd type="none" w="med" len="med"/>
+                      <a:tailEnd type="none" w="med" len="med"/>
+                    </a:lnT>
+                    <a:lnB w="9525" cap="flat" cmpd="sng" algn="ctr">
+                      <a:solidFill>
+                        <a:srgbClr val="D6DBDF"/>
+                      </a:solidFill>
+                      <a:prstDash val="solid"/>
+                      <a:round/>
+                      <a:headEnd type="none" w="med" len="med"/>
+                      <a:tailEnd type="none" w="med" len="med"/>
+                    </a:lnB>
+                  </a:tcPr>
+                </a:tc>
+              </a:tr>
+            </a:tbl>
+          </a:graphicData>
+        </a:graphic>
+      </p:graphicFrame>
+      <p:sp>
+        <p:nvSpPr>
+          <p:cNvPr id="10" name="Text 6"/>
+          <p:cNvSpPr txBox="1"/>
+          <p:nvPr/>
+        </p:nvSpPr>
+        <p:spPr>
+          <a:xfrm>
+            <a:off x="7543800" y="3703320"/>
+            <a:ext cx="4087368" cy="548640"/>
+          </a:xfrm>
+          <a:prstGeom prst="rect">
+            <a:avLst/>
+          </a:prstGeom>
+          <a:noFill/>
+          <a:ln/>
+        </p:spPr>
+        <p:txBody>
+          <a:bodyPr wrap="square" lIns="0" tIns="0" rIns="0" bIns="0" rtlCol="0" anchor="ctr"/>
+          <a:lstStyle/>
+          <a:p>
+            <a:pPr indent="0" marL="0">
+              <a:lnSpc>
+                <a:spcPts val="1700"/>
+              </a:lnSpc>
+              <a:buNone/>
+            </a:pPr>
+            <a:r>
+              <a:rPr lang="en-US" sz="1200" dirty="0">
+                <a:solidFill>
+                  <a:srgbClr val="111418"/>
+                </a:solidFill>
+                <a:latin typeface="Calibri" pitchFamily="34" charset="0"/>
+                <a:ea typeface="Calibri" pitchFamily="34" charset="-122"/>
+                <a:cs typeface="Calibri" pitchFamily="34" charset="-120"/>
+              </a:rPr>
+              <a:t>Several lesions share one image — so splitting by LESION would put the same patient on both sides.</a:t>
+            </a:r>
+            <a:endParaRPr lang="en-US" sz="1200" dirty="0"/>
+          </a:p>
+        </p:txBody>
+      </p:sp>
+      <p:sp>
+        <p:nvSpPr>
+          <p:cNvPr id="11" name="Shape 7"/>
           <p:cNvSpPr/>
           <p:nvPr/>
         </p:nvSpPr>
         <p:spPr>
           <a:xfrm>
-            <a:off x="7543800" y="1188720"/>
-            <a:ext cx="4087368" cy="2240280"/>
+            <a:off x="566928" y="4709160"/>
+            <a:ext cx="11057839" cy="1371600"/>
           </a:xfrm>
           <a:prstGeom prst="roundRect">
             <a:avLst>
-              <a:gd name="adj" fmla="val 2857"/>
+              <a:gd name="adj" fmla="val 4667"/>
             </a:avLst>
           </a:prstGeom>
           <a:solidFill>
-            <a:srgbClr val="F4F6F7"/>
+            <a:srgbClr val="F1F6F2"/>
           </a:solidFill>
           <a:ln/>
         </p:spPr>
       </p:sp>
       <p:sp>
         <p:nvSpPr>
-          <p:cNvPr id="9" name="Text 6"/>
+          <p:cNvPr id="12" name="Text 8"/>
           <p:cNvSpPr txBox="1"/>
           <p:nvPr/>
         </p:nvSpPr>
         <p:spPr>
           <a:xfrm>
-            <a:off x="7726680" y="1316736"/>
-            <a:ext cx="3721608" cy="274320"/>
+            <a:off x="749808" y="4837176"/>
+            <a:ext cx="10692079" cy="274320"/>
           </a:xfrm>
           <a:prstGeom prst="rect">
             <a:avLst/>
@@ -35255,13 +36362,13 @@
             <a:r>
               <a:rPr lang="en-US" sz="1450" b="1" dirty="0">
                 <a:solidFill>
-                  <a:srgbClr val="0B3C49"/>
+                  <a:srgbClr val="1F6F43"/>
                 </a:solidFill>
                 <a:latin typeface="Cambria" pitchFamily="34" charset="0"/>
                 <a:ea typeface="Cambria" pitchFamily="34" charset="-122"/>
                 <a:cs typeface="Cambria" pitchFamily="34" charset="-120"/>
               </a:rPr>
-              <a:t>Why this matters for a CNN-free pipeline</a:t>
+              <a:t>No data leakage — found the hidden patient ID, then counted it</a:t>
             </a:r>
             <a:endParaRPr lang="en-US" sz="1450" dirty="0"/>
           </a:p>
@@ -35269,14 +36376,14 @@
       </p:sp>
       <p:sp>
         <p:nvSpPr>
-          <p:cNvPr id="10" name="Text 7"/>
+          <p:cNvPr id="13" name="Text 9"/>
           <p:cNvSpPr txBox="1"/>
           <p:nvPr/>
         </p:nvSpPr>
         <p:spPr>
           <a:xfrm>
-            <a:off x="7726680" y="1645920"/>
-            <a:ext cx="3721608" cy="1618488"/>
+            <a:off x="749808" y="5166360"/>
+            <a:ext cx="10692079" cy="749808"/>
           </a:xfrm>
           <a:prstGeom prst="rect">
             <a:avLst/>
@@ -35303,151 +36410,9 @@
                 <a:ea typeface="Calibri" pitchFamily="34" charset="-122"/>
                 <a:cs typeface="Calibri" pitchFamily="34" charset="-120"/>
               </a:rPr>
-              <a:t>A randomly initialised ViT already encodes lesion intensity (R² = 0.99) and lesion size (R² = 0.89) with no training whatsoever. Architecture plus geometry starts close to the ceiling — before any learning happens.</a:t>
+              <a:t>The published files are renamed with a running number, so patient IDs look absent. They are not: every XML keeps the ORIGINAL name in its &lt;filename&gt; field, as PN######. Measured: 3,924 distinct PN on 3,924 images — zero repetitions.</a:t>
             </a:r>
             <a:endParaRPr lang="en-US" sz="1200" dirty="0"/>
-          </a:p>
-        </p:txBody>
-      </p:sp>
-      <p:sp>
-        <p:nvSpPr>
-          <p:cNvPr id="11" name="Shape 8"/>
-          <p:cNvSpPr/>
-          <p:nvPr/>
-        </p:nvSpPr>
-        <p:spPr>
-          <a:xfrm>
-            <a:off x="7543800" y="3611880"/>
-            <a:ext cx="4087368" cy="2103120"/>
-          </a:xfrm>
-          <a:prstGeom prst="roundRect">
-            <a:avLst>
-              <a:gd name="adj" fmla="val 3043"/>
-            </a:avLst>
-          </a:prstGeom>
-          <a:solidFill>
-            <a:srgbClr val="FBF3F2"/>
-          </a:solidFill>
-          <a:ln/>
-        </p:spPr>
-      </p:sp>
-      <p:sp>
-        <p:nvSpPr>
-          <p:cNvPr id="12" name="Text 9"/>
-          <p:cNvSpPr txBox="1"/>
-          <p:nvPr/>
-        </p:nvSpPr>
-        <p:spPr>
-          <a:xfrm>
-            <a:off x="7726680" y="3739896"/>
-            <a:ext cx="3721608" cy="274320"/>
-          </a:xfrm>
-          <a:prstGeom prst="rect">
-            <a:avLst/>
-          </a:prstGeom>
-          <a:noFill/>
-          <a:ln/>
-        </p:spPr>
-        <p:txBody>
-          <a:bodyPr wrap="square" lIns="0" tIns="0" rIns="0" bIns="0" rtlCol="0" anchor="ctr"/>
-          <a:lstStyle/>
-          <a:p>
-            <a:pPr indent="0" marL="0">
-              <a:buNone/>
-            </a:pPr>
-            <a:r>
-              <a:rPr lang="en-US" sz="1450" b="1" dirty="0">
-                <a:solidFill>
-                  <a:srgbClr val="A62B1F"/>
-                </a:solidFill>
-                <a:latin typeface="Cambria" pitchFamily="34" charset="0"/>
-                <a:ea typeface="Cambria" pitchFamily="34" charset="-122"/>
-                <a:cs typeface="Cambria" pitchFamily="34" charset="-120"/>
-              </a:rPr>
-              <a:t>The consequence we had to confront</a:t>
-            </a:r>
-            <a:endParaRPr lang="en-US" sz="1450" dirty="0"/>
-          </a:p>
-        </p:txBody>
-      </p:sp>
-      <p:sp>
-        <p:nvSpPr>
-          <p:cNvPr id="13" name="Text 10"/>
-          <p:cNvSpPr txBox="1"/>
-          <p:nvPr/>
-        </p:nvSpPr>
-        <p:spPr>
-          <a:xfrm>
-            <a:off x="7726680" y="4069080"/>
-            <a:ext cx="3721608" cy="1481328"/>
-          </a:xfrm>
-          <a:prstGeom prst="rect">
-            <a:avLst/>
-          </a:prstGeom>
-          <a:noFill/>
-          <a:ln/>
-        </p:spPr>
-        <p:txBody>
-          <a:bodyPr wrap="square" lIns="0" tIns="0" rIns="0" bIns="0" rtlCol="0" anchor="ctr"/>
-          <a:lstStyle/>
-          <a:p>
-            <a:pPr indent="0" marL="0">
-              <a:lnSpc>
-                <a:spcPts val="1800"/>
-              </a:lnSpc>
-              <a:buNone/>
-            </a:pPr>
-            <a:r>
-              <a:rPr lang="en-US" sz="1200" dirty="0">
-                <a:solidFill>
-                  <a:srgbClr val="111418"/>
-                </a:solidFill>
-                <a:latin typeface="Calibri" pitchFamily="34" charset="0"/>
-                <a:ea typeface="Calibri" pitchFamily="34" charset="-122"/>
-                <a:cs typeface="Calibri" pitchFamily="34" charset="-120"/>
-              </a:rPr>
-              <a:t>Any evaluation that gives the model access to lesion size through a side channel is measuring the disease definition, not the representation. This is what happened, and detecting it is the core of this work.</a:t>
-            </a:r>
-            <a:endParaRPr lang="en-US" sz="1200" dirty="0"/>
-          </a:p>
-        </p:txBody>
-      </p:sp>
-      <p:sp>
-        <p:nvSpPr>
-          <p:cNvPr id="14" name="Text 11"/>
-          <p:cNvSpPr txBox="1"/>
-          <p:nvPr/>
-        </p:nvSpPr>
-        <p:spPr>
-          <a:xfrm>
-            <a:off x="566928" y="5943600"/>
-            <a:ext cx="11057839" cy="274320"/>
-          </a:xfrm>
-          <a:prstGeom prst="rect">
-            <a:avLst/>
-          </a:prstGeom>
-          <a:noFill/>
-          <a:ln/>
-        </p:spPr>
-        <p:txBody>
-          <a:bodyPr wrap="square" lIns="0" tIns="0" rIns="0" bIns="0" rtlCol="0" anchor="ctr"/>
-          <a:lstStyle/>
-          <a:p>
-            <a:pPr indent="0" marL="0">
-              <a:buNone/>
-            </a:pPr>
-            <a:r>
-              <a:rPr lang="en-US" sz="1100" dirty="0">
-                <a:solidFill>
-                  <a:srgbClr val="58626C"/>
-                </a:solidFill>
-                <a:latin typeface="Calibri" pitchFamily="34" charset="0"/>
-                <a:ea typeface="Calibri" pitchFamily="34" charset="-122"/>
-                <a:cs typeface="Calibri" pitchFamily="34" charset="-120"/>
-              </a:rPr>
-              <a:t>Dataset: 2,746 panoramic radiographs · 6,741 annotated lesions · patient-level split (4,719 / 1,009 / 1,013)   —   Do et al., Data in Brief 54:110486 (2024)</a:t>
-            </a:r>
-            <a:endParaRPr lang="en-US" sz="1100" dirty="0"/>
           </a:p>
         </p:txBody>
       </p:sp>
